--- a/Slides_MICRO59/4.volt_compiler_pipeline.pptx
+++ b/Slides_MICRO59/4.volt_compiler_pipeline.pptx
@@ -5,7 +5,7 @@
     <p:sldMasterId id="2147483661" r:id="rId1"/>
   </p:sldMasterIdLst>
   <p:notesMasterIdLst>
-    <p:notesMasterId r:id="rId21"/>
+    <p:notesMasterId r:id="rId25"/>
   </p:notesMasterIdLst>
   <p:sldIdLst>
     <p:sldId id="491" r:id="rId2"/>
@@ -24,31 +24,42 @@
     <p:sldId id="523" r:id="rId15"/>
     <p:sldId id="541" r:id="rId16"/>
     <p:sldId id="535" r:id="rId17"/>
-    <p:sldId id="542" r:id="rId18"/>
-    <p:sldId id="543" r:id="rId19"/>
-    <p:sldId id="532" r:id="rId20"/>
+    <p:sldId id="544" r:id="rId18"/>
+    <p:sldId id="545" r:id="rId19"/>
+    <p:sldId id="546" r:id="rId20"/>
+    <p:sldId id="547" r:id="rId21"/>
+    <p:sldId id="542" r:id="rId22"/>
+    <p:sldId id="543" r:id="rId23"/>
+    <p:sldId id="532" r:id="rId24"/>
   </p:sldIdLst>
   <p:sldSz cx="9144000" cy="5143500" type="screen16x9"/>
   <p:notesSz cx="6858000" cy="9144000"/>
   <p:embeddedFontLst>
     <p:embeddedFont>
-      <p:font typeface="Daytona" panose="020B0604030500040204" pitchFamily="34" charset="0"/>
-      <p:regular r:id="rId22"/>
-      <p:bold r:id="rId23"/>
-      <p:italic r:id="rId24"/>
-      <p:boldItalic r:id="rId25"/>
-    </p:embeddedFont>
-    <p:embeddedFont>
-      <p:font typeface="Roboto" panose="02000000000000000000" pitchFamily="2" charset="0"/>
+      <p:font typeface="Consolas" panose="020B0609020204030204" pitchFamily="49" charset="0"/>
       <p:regular r:id="rId26"/>
       <p:bold r:id="rId27"/>
       <p:italic r:id="rId28"/>
       <p:boldItalic r:id="rId29"/>
     </p:embeddedFont>
     <p:embeddedFont>
-      <p:font typeface="Tahoma" panose="020B0604030504040204" pitchFamily="34" charset="0"/>
+      <p:font typeface="Daytona" panose="020B0604030500040204" pitchFamily="34" charset="0"/>
       <p:regular r:id="rId30"/>
       <p:bold r:id="rId31"/>
+      <p:italic r:id="rId32"/>
+      <p:boldItalic r:id="rId33"/>
+    </p:embeddedFont>
+    <p:embeddedFont>
+      <p:font typeface="Roboto" panose="02000000000000000000" pitchFamily="2" charset="0"/>
+      <p:regular r:id="rId34"/>
+      <p:bold r:id="rId35"/>
+      <p:italic r:id="rId36"/>
+      <p:boldItalic r:id="rId37"/>
+    </p:embeddedFont>
+    <p:embeddedFont>
+      <p:font typeface="Tahoma" panose="020B0604030504040204" pitchFamily="34" charset="0"/>
+      <p:regular r:id="rId38"/>
+      <p:bold r:id="rId39"/>
     </p:embeddedFont>
   </p:embeddedFontLst>
   <p:defaultTextStyle>
@@ -1370,12 +1381,12 @@
       </p:grpSpPr>
       <p:sp>
         <p:nvSpPr>
-          <p:cNvPr id="2" name="슬라이드 이미지 개체 틀 1"/>
+          <p:cNvPr id="2" name="Slide Image Placeholder 1"/>
           <p:cNvSpPr>
             <a:spLocks noGrp="1" noRot="1" noChangeAspect="1"/>
           </p:cNvSpPr>
           <p:nvPr>
-            <p:ph type="sldImg"/>
+            <p:ph type="sldImg" idx="2"/>
           </p:nvPr>
         </p:nvSpPr>
         <p:spPr>
@@ -1387,7 +1398,7 @@
       </p:sp>
       <p:sp>
         <p:nvSpPr>
-          <p:cNvPr id="3" name="슬라이드 노트 개체 틀 2"/>
+          <p:cNvPr id="3" name="Notes Placeholder 2"/>
           <p:cNvSpPr>
             <a:spLocks noGrp="1"/>
           </p:cNvSpPr>
@@ -1400,16 +1411,11 @@
           <a:bodyPr/>
           <a:lstStyle/>
           <a:p>
-            <a:endParaRPr kumimoji="1" lang="ko-Kore-KR" altLang="en-US" dirty="0"/>
+            <a:endParaRPr lang="en-US" dirty="0"/>
           </a:p>
         </p:txBody>
       </p:sp>
     </p:spTree>
-    <p:extLst>
-      <p:ext uri="{BB962C8B-B14F-4D97-AF65-F5344CB8AC3E}">
-        <p14:creationId xmlns:p14="http://schemas.microsoft.com/office/powerpoint/2010/main" val="206717653"/>
-      </p:ext>
-    </p:extLst>
   </p:cSld>
   <p:clrMapOvr>
     <a:masterClrMapping/>
@@ -1436,12 +1442,12 @@
       </p:grpSpPr>
       <p:sp>
         <p:nvSpPr>
-          <p:cNvPr id="2" name="슬라이드 이미지 개체 틀 1"/>
+          <p:cNvPr id="2" name="Slide Image Placeholder 1"/>
           <p:cNvSpPr>
             <a:spLocks noGrp="1" noRot="1" noChangeAspect="1"/>
           </p:cNvSpPr>
           <p:nvPr>
-            <p:ph type="sldImg"/>
+            <p:ph type="sldImg" idx="2"/>
           </p:nvPr>
         </p:nvSpPr>
         <p:spPr>
@@ -1453,7 +1459,7 @@
       </p:sp>
       <p:sp>
         <p:nvSpPr>
-          <p:cNvPr id="3" name="슬라이드 노트 개체 틀 2"/>
+          <p:cNvPr id="3" name="Notes Placeholder 2"/>
           <p:cNvSpPr>
             <a:spLocks noGrp="1"/>
           </p:cNvSpPr>
@@ -1466,16 +1472,11 @@
           <a:bodyPr/>
           <a:lstStyle/>
           <a:p>
-            <a:endParaRPr kumimoji="1" lang="ko-Kore-KR" altLang="en-US" dirty="0"/>
+            <a:endParaRPr lang="ko-Kore-KR" altLang="en-US" dirty="0"/>
           </a:p>
         </p:txBody>
       </p:sp>
     </p:spTree>
-    <p:extLst>
-      <p:ext uri="{BB962C8B-B14F-4D97-AF65-F5344CB8AC3E}">
-        <p14:creationId xmlns:p14="http://schemas.microsoft.com/office/powerpoint/2010/main" val="1776096595"/>
-      </p:ext>
-    </p:extLst>
   </p:cSld>
   <p:clrMapOvr>
     <a:masterClrMapping/>
@@ -1502,12 +1503,12 @@
       </p:grpSpPr>
       <p:sp>
         <p:nvSpPr>
-          <p:cNvPr id="2" name="슬라이드 이미지 개체 틀 1"/>
+          <p:cNvPr id="2" name="Slide Image Placeholder 1"/>
           <p:cNvSpPr>
             <a:spLocks noGrp="1" noRot="1" noChangeAspect="1"/>
           </p:cNvSpPr>
           <p:nvPr>
-            <p:ph type="sldImg"/>
+            <p:ph type="sldImg" idx="2"/>
           </p:nvPr>
         </p:nvSpPr>
         <p:spPr>
@@ -1519,7 +1520,7 @@
       </p:sp>
       <p:sp>
         <p:nvSpPr>
-          <p:cNvPr id="3" name="슬라이드 노트 개체 틀 2"/>
+          <p:cNvPr id="3" name="Notes Placeholder 2"/>
           <p:cNvSpPr>
             <a:spLocks noGrp="1"/>
           </p:cNvSpPr>
@@ -1532,34 +1533,11 @@
           <a:bodyPr/>
           <a:lstStyle/>
           <a:p>
-            <a:r>
-              <a:rPr lang="en" altLang="ko-Kore-KR" b="1" dirty="0"/>
-              <a:t>Thank you for listening.</a:t>
-            </a:r>
-            <a:br>
-              <a:rPr lang="en" altLang="ko-Kore-KR" dirty="0"/>
-            </a:br>
-            <a:r>
-              <a:rPr lang="en" altLang="ko-Kore-KR" b="1" dirty="0"/>
-              <a:t>For more details and to try the tool, please scan the QR code.</a:t>
-            </a:r>
-            <a:br>
-              <a:rPr lang="en" altLang="ko-Kore-KR" dirty="0"/>
-            </a:br>
-            <a:r>
-              <a:rPr lang="en" altLang="ko-Kore-KR" b="1" dirty="0"/>
-              <a:t>I would be happy to answer any questions.</a:t>
-            </a:r>
-            <a:endParaRPr kumimoji="1" lang="ko-Kore-KR" altLang="en-US" dirty="0"/>
+            <a:endParaRPr lang="en-US" dirty="0"/>
           </a:p>
         </p:txBody>
       </p:sp>
     </p:spTree>
-    <p:extLst>
-      <p:ext uri="{BB962C8B-B14F-4D97-AF65-F5344CB8AC3E}">
-        <p14:creationId xmlns:p14="http://schemas.microsoft.com/office/powerpoint/2010/main" val="2052508655"/>
-      </p:ext>
-    </p:extLst>
   </p:cSld>
   <p:clrMapOvr>
     <a:masterClrMapping/>
@@ -1642,6 +1620,265 @@
     <p:extLst>
       <p:ext uri="{BB962C8B-B14F-4D97-AF65-F5344CB8AC3E}">
         <p14:creationId xmlns:p14="http://schemas.microsoft.com/office/powerpoint/2010/main" val="3145737744"/>
+      </p:ext>
+    </p:extLst>
+  </p:cSld>
+  <p:clrMapOvr>
+    <a:masterClrMapping/>
+  </p:clrMapOvr>
+</p:notes>
+</file>
+
+<file path=ppt/notesSlides/notesSlide20.xml><?xml version="1.0" encoding="utf-8"?>
+<p:notes xmlns:a="http://schemas.openxmlformats.org/drawingml/2006/main" xmlns:r="http://schemas.openxmlformats.org/officeDocument/2006/relationships" xmlns:p="http://schemas.openxmlformats.org/presentationml/2006/main">
+  <p:cSld>
+    <p:spTree>
+      <p:nvGrpSpPr>
+        <p:cNvPr id="1" name=""/>
+        <p:cNvGrpSpPr/>
+        <p:nvPr/>
+      </p:nvGrpSpPr>
+      <p:grpSpPr>
+        <a:xfrm>
+          <a:off x="0" y="0"/>
+          <a:ext cx="0" cy="0"/>
+          <a:chOff x="0" y="0"/>
+          <a:chExt cx="0" cy="0"/>
+        </a:xfrm>
+      </p:grpSpPr>
+      <p:sp>
+        <p:nvSpPr>
+          <p:cNvPr id="2" name="Slide Image Placeholder 1"/>
+          <p:cNvSpPr>
+            <a:spLocks noGrp="1" noRot="1" noChangeAspect="1"/>
+          </p:cNvSpPr>
+          <p:nvPr>
+            <p:ph type="sldImg" idx="2"/>
+          </p:nvPr>
+        </p:nvSpPr>
+        <p:spPr>
+          <a:xfrm>
+            <a:off x="381000" y="685800"/>
+            <a:ext cx="6096000" cy="3429000"/>
+          </a:xfrm>
+        </p:spPr>
+      </p:sp>
+      <p:sp>
+        <p:nvSpPr>
+          <p:cNvPr id="3" name="Notes Placeholder 2"/>
+          <p:cNvSpPr>
+            <a:spLocks noGrp="1"/>
+          </p:cNvSpPr>
+          <p:nvPr>
+            <p:ph type="body" idx="1"/>
+          </p:nvPr>
+        </p:nvSpPr>
+        <p:spPr/>
+        <p:txBody>
+          <a:bodyPr/>
+          <a:lstStyle/>
+          <a:p>
+            <a:endParaRPr lang="en-US" dirty="0"/>
+          </a:p>
+        </p:txBody>
+      </p:sp>
+    </p:spTree>
+  </p:cSld>
+  <p:clrMapOvr>
+    <a:masterClrMapping/>
+  </p:clrMapOvr>
+</p:notes>
+</file>
+
+<file path=ppt/notesSlides/notesSlide21.xml><?xml version="1.0" encoding="utf-8"?>
+<p:notes xmlns:a="http://schemas.openxmlformats.org/drawingml/2006/main" xmlns:r="http://schemas.openxmlformats.org/officeDocument/2006/relationships" xmlns:p="http://schemas.openxmlformats.org/presentationml/2006/main">
+  <p:cSld>
+    <p:spTree>
+      <p:nvGrpSpPr>
+        <p:cNvPr id="1" name=""/>
+        <p:cNvGrpSpPr/>
+        <p:nvPr/>
+      </p:nvGrpSpPr>
+      <p:grpSpPr>
+        <a:xfrm>
+          <a:off x="0" y="0"/>
+          <a:ext cx="0" cy="0"/>
+          <a:chOff x="0" y="0"/>
+          <a:chExt cx="0" cy="0"/>
+        </a:xfrm>
+      </p:grpSpPr>
+      <p:sp>
+        <p:nvSpPr>
+          <p:cNvPr id="2" name="슬라이드 이미지 개체 틀 1"/>
+          <p:cNvSpPr>
+            <a:spLocks noGrp="1" noRot="1" noChangeAspect="1"/>
+          </p:cNvSpPr>
+          <p:nvPr>
+            <p:ph type="sldImg"/>
+          </p:nvPr>
+        </p:nvSpPr>
+        <p:spPr>
+          <a:xfrm>
+            <a:off x="381000" y="685800"/>
+            <a:ext cx="6096000" cy="3429000"/>
+          </a:xfrm>
+        </p:spPr>
+      </p:sp>
+      <p:sp>
+        <p:nvSpPr>
+          <p:cNvPr id="3" name="슬라이드 노트 개체 틀 2"/>
+          <p:cNvSpPr>
+            <a:spLocks noGrp="1"/>
+          </p:cNvSpPr>
+          <p:nvPr>
+            <p:ph type="body" idx="1"/>
+          </p:nvPr>
+        </p:nvSpPr>
+        <p:spPr/>
+        <p:txBody>
+          <a:bodyPr/>
+          <a:lstStyle/>
+          <a:p>
+            <a:endParaRPr kumimoji="1" lang="ko-Kore-KR" altLang="en-US" dirty="0"/>
+          </a:p>
+        </p:txBody>
+      </p:sp>
+    </p:spTree>
+    <p:extLst>
+      <p:ext uri="{BB962C8B-B14F-4D97-AF65-F5344CB8AC3E}">
+        <p14:creationId xmlns:p14="http://schemas.microsoft.com/office/powerpoint/2010/main" val="206717653"/>
+      </p:ext>
+    </p:extLst>
+  </p:cSld>
+  <p:clrMapOvr>
+    <a:masterClrMapping/>
+  </p:clrMapOvr>
+</p:notes>
+</file>
+
+<file path=ppt/notesSlides/notesSlide22.xml><?xml version="1.0" encoding="utf-8"?>
+<p:notes xmlns:a="http://schemas.openxmlformats.org/drawingml/2006/main" xmlns:r="http://schemas.openxmlformats.org/officeDocument/2006/relationships" xmlns:p="http://schemas.openxmlformats.org/presentationml/2006/main">
+  <p:cSld>
+    <p:spTree>
+      <p:nvGrpSpPr>
+        <p:cNvPr id="1" name=""/>
+        <p:cNvGrpSpPr/>
+        <p:nvPr/>
+      </p:nvGrpSpPr>
+      <p:grpSpPr>
+        <a:xfrm>
+          <a:off x="0" y="0"/>
+          <a:ext cx="0" cy="0"/>
+          <a:chOff x="0" y="0"/>
+          <a:chExt cx="0" cy="0"/>
+        </a:xfrm>
+      </p:grpSpPr>
+      <p:sp>
+        <p:nvSpPr>
+          <p:cNvPr id="2" name="슬라이드 이미지 개체 틀 1"/>
+          <p:cNvSpPr>
+            <a:spLocks noGrp="1" noRot="1" noChangeAspect="1"/>
+          </p:cNvSpPr>
+          <p:nvPr>
+            <p:ph type="sldImg"/>
+          </p:nvPr>
+        </p:nvSpPr>
+        <p:spPr>
+          <a:xfrm>
+            <a:off x="381000" y="685800"/>
+            <a:ext cx="6096000" cy="3429000"/>
+          </a:xfrm>
+        </p:spPr>
+      </p:sp>
+      <p:sp>
+        <p:nvSpPr>
+          <p:cNvPr id="3" name="슬라이드 노트 개체 틀 2"/>
+          <p:cNvSpPr>
+            <a:spLocks noGrp="1"/>
+          </p:cNvSpPr>
+          <p:nvPr>
+            <p:ph type="body" idx="1"/>
+          </p:nvPr>
+        </p:nvSpPr>
+        <p:spPr/>
+        <p:txBody>
+          <a:bodyPr/>
+          <a:lstStyle/>
+          <a:p>
+            <a:endParaRPr kumimoji="1" lang="ko-Kore-KR" altLang="en-US" dirty="0"/>
+          </a:p>
+        </p:txBody>
+      </p:sp>
+    </p:spTree>
+    <p:extLst>
+      <p:ext uri="{BB962C8B-B14F-4D97-AF65-F5344CB8AC3E}">
+        <p14:creationId xmlns:p14="http://schemas.microsoft.com/office/powerpoint/2010/main" val="1776096595"/>
+      </p:ext>
+    </p:extLst>
+  </p:cSld>
+  <p:clrMapOvr>
+    <a:masterClrMapping/>
+  </p:clrMapOvr>
+</p:notes>
+</file>
+
+<file path=ppt/notesSlides/notesSlide23.xml><?xml version="1.0" encoding="utf-8"?>
+<p:notes xmlns:a="http://schemas.openxmlformats.org/drawingml/2006/main" xmlns:r="http://schemas.openxmlformats.org/officeDocument/2006/relationships" xmlns:p="http://schemas.openxmlformats.org/presentationml/2006/main">
+  <p:cSld>
+    <p:spTree>
+      <p:nvGrpSpPr>
+        <p:cNvPr id="1" name=""/>
+        <p:cNvGrpSpPr/>
+        <p:nvPr/>
+      </p:nvGrpSpPr>
+      <p:grpSpPr>
+        <a:xfrm>
+          <a:off x="0" y="0"/>
+          <a:ext cx="0" cy="0"/>
+          <a:chOff x="0" y="0"/>
+          <a:chExt cx="0" cy="0"/>
+        </a:xfrm>
+      </p:grpSpPr>
+      <p:sp>
+        <p:nvSpPr>
+          <p:cNvPr id="2" name="슬라이드 이미지 개체 틀 1"/>
+          <p:cNvSpPr>
+            <a:spLocks noGrp="1" noRot="1" noChangeAspect="1"/>
+          </p:cNvSpPr>
+          <p:nvPr>
+            <p:ph type="sldImg"/>
+          </p:nvPr>
+        </p:nvSpPr>
+        <p:spPr>
+          <a:xfrm>
+            <a:off x="381000" y="685800"/>
+            <a:ext cx="6096000" cy="3429000"/>
+          </a:xfrm>
+        </p:spPr>
+      </p:sp>
+      <p:sp>
+        <p:nvSpPr>
+          <p:cNvPr id="3" name="슬라이드 노트 개체 틀 2"/>
+          <p:cNvSpPr>
+            <a:spLocks noGrp="1"/>
+          </p:cNvSpPr>
+          <p:nvPr>
+            <p:ph type="body" idx="1"/>
+          </p:nvPr>
+        </p:nvSpPr>
+        <p:spPr/>
+        <p:txBody>
+          <a:bodyPr/>
+          <a:lstStyle/>
+          <a:p>
+            <a:endParaRPr kumimoji="1" lang="ko-Kore-KR" altLang="en-US" dirty="0"/>
+          </a:p>
+        </p:txBody>
+      </p:sp>
+    </p:spTree>
+    <p:extLst>
+      <p:ext uri="{BB962C8B-B14F-4D97-AF65-F5344CB8AC3E}">
+        <p14:creationId xmlns:p14="http://schemas.microsoft.com/office/powerpoint/2010/main" val="2052508655"/>
       </p:ext>
     </p:extLst>
   </p:cSld>
@@ -2187,10 +2424,7 @@
           <a:bodyPr/>
           <a:lstStyle/>
           <a:p>
-            <a:r>
-              <a:rPr lang="en" altLang="ko-Kore-KR" dirty="0"/>
-              <a:t>=</a:t>
-            </a:r>
+            <a:endParaRPr lang="en" altLang="ko-Kore-KR" dirty="0"/>
           </a:p>
         </p:txBody>
       </p:sp>
@@ -2354,7 +2588,7 @@
           <a:p>
             <a:fld id="{3D7D5ACB-58BF-614E-BE8D-2914A418BC4C}" type="datetime1">
               <a:rPr lang="en-US" smtClean="0"/>
-              <a:t>10/31/26</a:t>
+              <a:t>11/1/26</a:t>
             </a:fld>
             <a:endParaRPr lang="en-US"/>
           </a:p>
@@ -2769,7 +3003,7 @@
           <a:p>
             <a:fld id="{AC0E05B7-1AA5-A349-B18C-476A719B5B18}" type="datetime1">
               <a:rPr lang="en-US" smtClean="0"/>
-              <a:t>10/31/26</a:t>
+              <a:t>11/1/26</a:t>
             </a:fld>
             <a:endParaRPr lang="en-US"/>
           </a:p>
@@ -2975,7 +3209,7 @@
           <a:p>
             <a:fld id="{3924081B-4726-814D-9CB6-D8D432F3BAA7}" type="datetime1">
               <a:rPr lang="en-US" smtClean="0"/>
-              <a:t>10/31/26</a:t>
+              <a:t>11/1/26</a:t>
             </a:fld>
             <a:endParaRPr lang="en-US"/>
           </a:p>
@@ -3191,7 +3425,7 @@
           <a:p>
             <a:fld id="{9CF6B51B-A645-D249-8F78-550ADFD8950E}" type="datetime1">
               <a:rPr lang="en-US" smtClean="0"/>
-              <a:t>10/31/26</a:t>
+              <a:t>11/1/26</a:t>
             </a:fld>
             <a:endParaRPr lang="en-US"/>
           </a:p>
@@ -3341,7 +3575,7 @@
           <a:p>
             <a:fld id="{E1F22DAF-15F4-314E-A047-A06D5E0FAD10}" type="datetime1">
               <a:rPr lang="en-US" smtClean="0"/>
-              <a:t>10/31/26</a:t>
+              <a:t>11/1/26</a:t>
             </a:fld>
             <a:endParaRPr lang="en-US"/>
           </a:p>
@@ -3580,7 +3814,7 @@
           <a:p>
             <a:fld id="{5608C00F-D222-CF4C-B2FA-8159BF4D9A31}" type="datetime1">
               <a:rPr lang="en-US" smtClean="0"/>
-              <a:t>10/31/26</a:t>
+              <a:t>11/1/26</a:t>
             </a:fld>
             <a:endParaRPr lang="en-US"/>
           </a:p>
@@ -3873,7 +4107,7 @@
           <a:p>
             <a:fld id="{8BD355CB-9A2D-3146-8AD7-B06EF0D3044F}" type="datetime1">
               <a:rPr lang="en-US" smtClean="0"/>
-              <a:t>10/31/26</a:t>
+              <a:t>11/1/26</a:t>
             </a:fld>
             <a:endParaRPr lang="en-US"/>
           </a:p>
@@ -4146,7 +4380,7 @@
           <a:p>
             <a:fld id="{6212AA1E-1FC9-FF4F-B2EE-58F45298DDE2}" type="datetime1">
               <a:rPr lang="en-US" smtClean="0"/>
-              <a:t>10/31/26</a:t>
+              <a:t>11/1/26</a:t>
             </a:fld>
             <a:endParaRPr lang="en-US"/>
           </a:p>
@@ -4566,7 +4800,7 @@
           <a:p>
             <a:fld id="{78A6DC0F-A1F7-B641-9492-BBAB09575E98}" type="datetime1">
               <a:rPr lang="en-US" smtClean="0"/>
-              <a:t>10/31/26</a:t>
+              <a:t>11/1/26</a:t>
             </a:fld>
             <a:endParaRPr lang="en-US"/>
           </a:p>
@@ -4715,7 +4949,7 @@
           <a:p>
             <a:fld id="{2C829F09-0423-5C49-9531-2BCB1FBB7911}" type="datetime1">
               <a:rPr lang="en-US" smtClean="0"/>
-              <a:t>10/31/26</a:t>
+              <a:t>11/1/26</a:t>
             </a:fld>
             <a:endParaRPr lang="en-US"/>
           </a:p>
@@ -4836,7 +5070,7 @@
           <a:p>
             <a:fld id="{8E108EBF-149B-964A-A133-799895995CC2}" type="datetime1">
               <a:rPr lang="en-US" smtClean="0"/>
-              <a:t>10/31/26</a:t>
+              <a:t>11/1/26</a:t>
             </a:fld>
             <a:endParaRPr lang="en-US"/>
           </a:p>
@@ -5155,7 +5389,7 @@
           <a:p>
             <a:fld id="{50C6314B-600B-5848-AEC7-50BDBB80A495}" type="datetime1">
               <a:rPr lang="en-US" smtClean="0"/>
-              <a:t>10/31/26</a:t>
+              <a:t>11/1/26</a:t>
             </a:fld>
             <a:endParaRPr lang="en-US"/>
           </a:p>
@@ -5404,7 +5638,7 @@
           <a:p>
             <a:fld id="{E1F22DAF-15F4-314E-A047-A06D5E0FAD10}" type="datetime1">
               <a:rPr lang="en-US" smtClean="0"/>
-              <a:t>10/31/26</a:t>
+              <a:t>11/1/26</a:t>
             </a:fld>
             <a:endParaRPr lang="en-US" dirty="0"/>
           </a:p>
@@ -11928,7 +12162,7 @@
               <a:rPr lang="en" altLang="ko-Kore-KR" sz="1600" b="1" dirty="0">
                 <a:effectLst/>
               </a:rPr>
-              <a:t>Moved from a pre-release Vortex snapshot to release v3.0 + tools-v3.0.1</a:t>
+              <a:t>Support vortex v3.0 + tools-v3.0.1</a:t>
             </a:r>
             <a:endParaRPr lang="en" altLang="ko-Kore-KR" sz="1600" b="1" dirty="0"/>
           </a:p>
@@ -12386,10 +12620,1061 @@
       </p:grpSpPr>
       <p:sp>
         <p:nvSpPr>
-          <p:cNvPr id="2" name="제목 1">
-            <a:extLst>
-              <a:ext uri="{FF2B5EF4-FFF2-40B4-BE49-F238E27FC236}">
-                <a16:creationId xmlns:a16="http://schemas.microsoft.com/office/drawing/2014/main" id="{330A76B4-F0AC-64EA-0EB3-EF91FC65C828}"/>
+          <p:cNvPr id="3" name="TextBox 2"/>
+          <p:cNvSpPr txBox="1"/>
+          <p:nvPr/>
+        </p:nvSpPr>
+        <p:spPr>
+          <a:xfrm>
+            <a:off x="628650" y="1110260"/>
+            <a:ext cx="7955279" cy="275792"/>
+          </a:xfrm>
+          <a:prstGeom prst="rect">
+            <a:avLst/>
+          </a:prstGeom>
+          <a:noFill/>
+        </p:spPr>
+        <p:txBody>
+          <a:bodyPr wrap="square" lIns="27432" tIns="12801" rIns="27432" bIns="12801" anchor="ctr">
+            <a:spAutoFit/>
+          </a:bodyPr>
+          <a:lstStyle/>
+          <a:p>
+            <a:pPr algn="l">
+              <a:lnSpc>
+                <a:spcPct val="106000"/>
+              </a:lnSpc>
+              <a:spcBef>
+                <a:spcPts val="0"/>
+              </a:spcBef>
+              <a:spcAft>
+                <a:spcPts val="0"/>
+              </a:spcAft>
+            </a:pPr>
+            <a:r>
+              <a:rPr sz="1600" b="0" dirty="0">
+                <a:solidFill>
+                  <a:schemeClr val="tx1"/>
+                </a:solidFill>
+                <a:latin typeface="Calibri"/>
+              </a:rPr>
+              <a:t>Expose GPU-specific kernel operations through existing compiler extension points</a:t>
+            </a:r>
+          </a:p>
+        </p:txBody>
+      </p:sp>
+      <p:sp>
+        <p:nvSpPr>
+          <p:cNvPr id="5" name="TextBox 4"/>
+          <p:cNvSpPr txBox="1"/>
+          <p:nvPr/>
+        </p:nvSpPr>
+        <p:spPr>
+          <a:xfrm>
+            <a:off x="8366760" y="4690872"/>
+            <a:ext cx="338328" cy="256032"/>
+          </a:xfrm>
+          <a:prstGeom prst="rect">
+            <a:avLst/>
+          </a:prstGeom>
+          <a:noFill/>
+        </p:spPr>
+        <p:txBody>
+          <a:bodyPr wrap="square" lIns="27432" tIns="12801" rIns="27432" bIns="12801" anchor="ctr">
+            <a:spAutoFit/>
+          </a:bodyPr>
+          <a:lstStyle/>
+          <a:p>
+            <a:pPr algn="r">
+              <a:lnSpc>
+                <a:spcPct val="106000"/>
+              </a:lnSpc>
+              <a:spcBef>
+                <a:spcPts val="0"/>
+              </a:spcBef>
+              <a:spcAft>
+                <a:spcPts val="0"/>
+              </a:spcAft>
+            </a:pPr>
+            <a:r>
+              <a:rPr sz="900" b="0">
+                <a:solidFill>
+                  <a:srgbClr val="47545D"/>
+                </a:solidFill>
+                <a:latin typeface="Calibri"/>
+              </a:rPr>
+              <a:t>17</a:t>
+            </a:r>
+          </a:p>
+        </p:txBody>
+      </p:sp>
+      <p:sp>
+        <p:nvSpPr>
+          <p:cNvPr id="6" name="Rounded Rectangle 5"/>
+          <p:cNvSpPr/>
+          <p:nvPr/>
+        </p:nvSpPr>
+        <p:spPr>
+          <a:xfrm>
+            <a:off x="630936" y="1554480"/>
+            <a:ext cx="3822191" cy="2496312"/>
+          </a:xfrm>
+          <a:prstGeom prst="roundRect">
+            <a:avLst>
+              <a:gd name="adj" fmla="val 7000"/>
+            </a:avLst>
+          </a:prstGeom>
+          <a:solidFill>
+            <a:srgbClr val="FBFDFE"/>
+          </a:solidFill>
+          <a:ln w="10160">
+            <a:solidFill>
+              <a:srgbClr val="C5D5E0"/>
+            </a:solidFill>
+          </a:ln>
+        </p:spPr>
+        <p:style>
+          <a:lnRef idx="1">
+            <a:schemeClr val="accent1"/>
+          </a:lnRef>
+          <a:fillRef idx="3">
+            <a:schemeClr val="accent1"/>
+          </a:fillRef>
+          <a:effectRef idx="2">
+            <a:schemeClr val="accent1"/>
+          </a:effectRef>
+          <a:fontRef idx="minor">
+            <a:schemeClr val="lt1"/>
+          </a:fontRef>
+        </p:style>
+        <p:txBody>
+          <a:bodyPr rtlCol="0" anchor="ctr"/>
+          <a:lstStyle/>
+          <a:p>
+            <a:pPr algn="ctr"/>
+            <a:endParaRPr/>
+          </a:p>
+        </p:txBody>
+      </p:sp>
+      <p:sp>
+        <p:nvSpPr>
+          <p:cNvPr id="7" name="Rounded Rectangle 6"/>
+          <p:cNvSpPr/>
+          <p:nvPr/>
+        </p:nvSpPr>
+        <p:spPr>
+          <a:xfrm>
+            <a:off x="640080" y="1563624"/>
+            <a:ext cx="3803904" cy="393192"/>
+          </a:xfrm>
+          <a:prstGeom prst="roundRect">
+            <a:avLst>
+              <a:gd name="adj" fmla="val 7000"/>
+            </a:avLst>
+          </a:prstGeom>
+          <a:solidFill>
+            <a:srgbClr val="E2F2F9"/>
+          </a:solidFill>
+          <a:ln w="2540">
+            <a:solidFill>
+              <a:srgbClr val="E2F2F9"/>
+            </a:solidFill>
+          </a:ln>
+        </p:spPr>
+        <p:style>
+          <a:lnRef idx="1">
+            <a:schemeClr val="accent1"/>
+          </a:lnRef>
+          <a:fillRef idx="3">
+            <a:schemeClr val="accent1"/>
+          </a:fillRef>
+          <a:effectRef idx="2">
+            <a:schemeClr val="accent1"/>
+          </a:effectRef>
+          <a:fontRef idx="minor">
+            <a:schemeClr val="lt1"/>
+          </a:fontRef>
+        </p:style>
+        <p:txBody>
+          <a:bodyPr rtlCol="0" anchor="ctr"/>
+          <a:lstStyle/>
+          <a:p>
+            <a:pPr algn="ctr"/>
+            <a:endParaRPr/>
+          </a:p>
+        </p:txBody>
+      </p:sp>
+      <p:sp>
+        <p:nvSpPr>
+          <p:cNvPr id="8" name="TextBox 7"/>
+          <p:cNvSpPr txBox="1"/>
+          <p:nvPr/>
+        </p:nvSpPr>
+        <p:spPr>
+          <a:xfrm>
+            <a:off x="786384" y="1613212"/>
+            <a:ext cx="3547872" cy="275729"/>
+          </a:xfrm>
+          <a:prstGeom prst="rect">
+            <a:avLst/>
+          </a:prstGeom>
+          <a:noFill/>
+        </p:spPr>
+        <p:txBody>
+          <a:bodyPr wrap="square" lIns="27432" tIns="12801" rIns="27432" bIns="12801" anchor="ctr">
+            <a:spAutoFit/>
+          </a:bodyPr>
+          <a:lstStyle/>
+          <a:p>
+            <a:pPr algn="l">
+              <a:lnSpc>
+                <a:spcPct val="106000"/>
+              </a:lnSpc>
+              <a:spcBef>
+                <a:spcPts val="0"/>
+              </a:spcBef>
+              <a:spcAft>
+                <a:spcPts val="0"/>
+              </a:spcAft>
+            </a:pPr>
+            <a:r>
+              <a:rPr sz="1600" b="1" dirty="0" err="1">
+                <a:solidFill>
+                  <a:srgbClr val="063352"/>
+                </a:solidFill>
+                <a:latin typeface="Calibri"/>
+              </a:rPr>
+              <a:t>PoCL</a:t>
+            </a:r>
+            <a:r>
+              <a:rPr sz="1600" b="1" dirty="0">
+                <a:solidFill>
+                  <a:srgbClr val="063352"/>
+                </a:solidFill>
+                <a:latin typeface="Calibri"/>
+              </a:rPr>
+              <a:t> / OpenCL</a:t>
+            </a:r>
+          </a:p>
+        </p:txBody>
+      </p:sp>
+      <p:sp>
+        <p:nvSpPr>
+          <p:cNvPr id="9" name="Rounded Rectangle 8"/>
+          <p:cNvSpPr/>
+          <p:nvPr/>
+        </p:nvSpPr>
+        <p:spPr>
+          <a:xfrm>
+            <a:off x="795528" y="2029968"/>
+            <a:ext cx="3456432" cy="384048"/>
+          </a:xfrm>
+          <a:prstGeom prst="roundRect">
+            <a:avLst>
+              <a:gd name="adj" fmla="val 7000"/>
+            </a:avLst>
+          </a:prstGeom>
+          <a:solidFill>
+            <a:srgbClr val="F5F9FB"/>
+          </a:solidFill>
+          <a:ln w="8890">
+            <a:solidFill>
+              <a:srgbClr val="F5F9FB"/>
+            </a:solidFill>
+          </a:ln>
+        </p:spPr>
+        <p:style>
+          <a:lnRef idx="1">
+            <a:schemeClr val="accent1"/>
+          </a:lnRef>
+          <a:fillRef idx="3">
+            <a:schemeClr val="accent1"/>
+          </a:fillRef>
+          <a:effectRef idx="2">
+            <a:schemeClr val="accent1"/>
+          </a:effectRef>
+          <a:fontRef idx="minor">
+            <a:schemeClr val="lt1"/>
+          </a:fontRef>
+        </p:style>
+        <p:txBody>
+          <a:bodyPr rtlCol="0" anchor="ctr"/>
+          <a:lstStyle/>
+          <a:p>
+            <a:pPr algn="ctr"/>
+            <a:endParaRPr/>
+          </a:p>
+        </p:txBody>
+      </p:sp>
+      <p:sp>
+        <p:nvSpPr>
+          <p:cNvPr id="10" name="TextBox 9"/>
+          <p:cNvSpPr txBox="1"/>
+          <p:nvPr/>
+        </p:nvSpPr>
+        <p:spPr>
+          <a:xfrm>
+            <a:off x="896112" y="2099709"/>
+            <a:ext cx="3291839" cy="244566"/>
+          </a:xfrm>
+          <a:prstGeom prst="rect">
+            <a:avLst/>
+          </a:prstGeom>
+          <a:noFill/>
+        </p:spPr>
+        <p:txBody>
+          <a:bodyPr wrap="square" lIns="27432" tIns="12801" rIns="27432" bIns="12801" anchor="ctr">
+            <a:spAutoFit/>
+          </a:bodyPr>
+          <a:lstStyle/>
+          <a:p>
+            <a:pPr algn="l">
+              <a:lnSpc>
+                <a:spcPct val="106000"/>
+              </a:lnSpc>
+              <a:spcBef>
+                <a:spcPts val="0"/>
+              </a:spcBef>
+              <a:spcAft>
+                <a:spcPts val="0"/>
+              </a:spcAft>
+            </a:pPr>
+            <a:r>
+              <a:rPr b="1">
+                <a:solidFill>
+                  <a:srgbClr val="156FA5"/>
+                </a:solidFill>
+                <a:latin typeface="Calibri"/>
+              </a:rPr>
+              <a:t>pocl_vx_shfl_up(...) → Vortex shfl.up</a:t>
+            </a:r>
+          </a:p>
+        </p:txBody>
+      </p:sp>
+      <p:sp>
+        <p:nvSpPr>
+          <p:cNvPr id="11" name="TextBox 10"/>
+          <p:cNvSpPr txBox="1"/>
+          <p:nvPr/>
+        </p:nvSpPr>
+        <p:spPr>
+          <a:xfrm>
+            <a:off x="850392" y="2588945"/>
+            <a:ext cx="3410712" cy="244502"/>
+          </a:xfrm>
+          <a:prstGeom prst="rect">
+            <a:avLst/>
+          </a:prstGeom>
+          <a:noFill/>
+        </p:spPr>
+        <p:txBody>
+          <a:bodyPr wrap="square" lIns="27432" tIns="12801" rIns="27432" bIns="12801" anchor="ctr">
+            <a:spAutoFit/>
+          </a:bodyPr>
+          <a:lstStyle/>
+          <a:p>
+            <a:pPr algn="l">
+              <a:lnSpc>
+                <a:spcPct val="106000"/>
+              </a:lnSpc>
+              <a:spcBef>
+                <a:spcPts val="0"/>
+              </a:spcBef>
+              <a:spcAft>
+                <a:spcPts val="0"/>
+              </a:spcAft>
+            </a:pPr>
+            <a:r>
+              <a:rPr b="0" dirty="0">
+                <a:solidFill>
+                  <a:srgbClr val="17232C"/>
+                </a:solidFill>
+                <a:latin typeface="Calibri"/>
+              </a:rPr>
+              <a:t>1  Declare in _</a:t>
+            </a:r>
+            <a:r>
+              <a:rPr b="0" dirty="0" err="1">
+                <a:solidFill>
+                  <a:srgbClr val="17232C"/>
+                </a:solidFill>
+                <a:latin typeface="Calibri"/>
+              </a:rPr>
+              <a:t>clang_opencl.h</a:t>
+            </a:r>
+            <a:endParaRPr b="0" dirty="0">
+              <a:solidFill>
+                <a:srgbClr val="17232C"/>
+              </a:solidFill>
+              <a:latin typeface="Calibri"/>
+            </a:endParaRPr>
+          </a:p>
+        </p:txBody>
+      </p:sp>
+      <p:sp>
+        <p:nvSpPr>
+          <p:cNvPr id="12" name="TextBox 11"/>
+          <p:cNvSpPr txBox="1"/>
+          <p:nvPr/>
+        </p:nvSpPr>
+        <p:spPr>
+          <a:xfrm>
+            <a:off x="850392" y="3009569"/>
+            <a:ext cx="3410712" cy="244502"/>
+          </a:xfrm>
+          <a:prstGeom prst="rect">
+            <a:avLst/>
+          </a:prstGeom>
+          <a:noFill/>
+        </p:spPr>
+        <p:txBody>
+          <a:bodyPr wrap="square" lIns="27432" tIns="12801" rIns="27432" bIns="12801" anchor="ctr">
+            <a:spAutoFit/>
+          </a:bodyPr>
+          <a:lstStyle/>
+          <a:p>
+            <a:pPr algn="l">
+              <a:lnSpc>
+                <a:spcPct val="106000"/>
+              </a:lnSpc>
+              <a:spcBef>
+                <a:spcPts val="0"/>
+              </a:spcBef>
+              <a:spcAft>
+                <a:spcPts val="0"/>
+              </a:spcAft>
+            </a:pPr>
+            <a:r>
+              <a:rPr b="0" dirty="0">
+                <a:solidFill>
+                  <a:srgbClr val="17232C"/>
+                </a:solidFill>
+                <a:latin typeface="Calibri"/>
+              </a:rPr>
+              <a:t>2  Implement Vortex built-in library</a:t>
+            </a:r>
+          </a:p>
+        </p:txBody>
+      </p:sp>
+      <p:sp>
+        <p:nvSpPr>
+          <p:cNvPr id="14" name="TextBox 13"/>
+          <p:cNvSpPr txBox="1"/>
+          <p:nvPr/>
+        </p:nvSpPr>
+        <p:spPr>
+          <a:xfrm>
+            <a:off x="850392" y="3425256"/>
+            <a:ext cx="3410712" cy="244502"/>
+          </a:xfrm>
+          <a:prstGeom prst="rect">
+            <a:avLst/>
+          </a:prstGeom>
+          <a:noFill/>
+        </p:spPr>
+        <p:txBody>
+          <a:bodyPr wrap="square" lIns="27432" tIns="12801" rIns="27432" bIns="12801" anchor="ctr">
+            <a:spAutoFit/>
+          </a:bodyPr>
+          <a:lstStyle/>
+          <a:p>
+            <a:pPr algn="l">
+              <a:lnSpc>
+                <a:spcPct val="106000"/>
+              </a:lnSpc>
+              <a:spcBef>
+                <a:spcPts val="0"/>
+              </a:spcBef>
+              <a:spcAft>
+                <a:spcPts val="0"/>
+              </a:spcAft>
+            </a:pPr>
+            <a:r>
+              <a:rPr b="0" dirty="0">
+                <a:solidFill>
+                  <a:srgbClr val="17232C"/>
+                </a:solidFill>
+                <a:latin typeface="Calibri"/>
+              </a:rPr>
+              <a:t>3  Link into the OpenCL kernel</a:t>
+            </a:r>
+          </a:p>
+        </p:txBody>
+      </p:sp>
+      <p:sp>
+        <p:nvSpPr>
+          <p:cNvPr id="15" name="Rounded Rectangle 14"/>
+          <p:cNvSpPr/>
+          <p:nvPr/>
+        </p:nvSpPr>
+        <p:spPr>
+          <a:xfrm>
+            <a:off x="4626864" y="1554480"/>
+            <a:ext cx="3822191" cy="2496312"/>
+          </a:xfrm>
+          <a:prstGeom prst="roundRect">
+            <a:avLst>
+              <a:gd name="adj" fmla="val 7000"/>
+            </a:avLst>
+          </a:prstGeom>
+          <a:solidFill>
+            <a:srgbClr val="FBFDFE"/>
+          </a:solidFill>
+          <a:ln w="10160">
+            <a:solidFill>
+              <a:srgbClr val="C5D5E0"/>
+            </a:solidFill>
+          </a:ln>
+        </p:spPr>
+        <p:style>
+          <a:lnRef idx="1">
+            <a:schemeClr val="accent1"/>
+          </a:lnRef>
+          <a:fillRef idx="3">
+            <a:schemeClr val="accent1"/>
+          </a:fillRef>
+          <a:effectRef idx="2">
+            <a:schemeClr val="accent1"/>
+          </a:effectRef>
+          <a:fontRef idx="minor">
+            <a:schemeClr val="lt1"/>
+          </a:fontRef>
+        </p:style>
+        <p:txBody>
+          <a:bodyPr rtlCol="0" anchor="ctr"/>
+          <a:lstStyle/>
+          <a:p>
+            <a:pPr algn="ctr"/>
+            <a:endParaRPr/>
+          </a:p>
+        </p:txBody>
+      </p:sp>
+      <p:sp>
+        <p:nvSpPr>
+          <p:cNvPr id="16" name="Rounded Rectangle 15"/>
+          <p:cNvSpPr/>
+          <p:nvPr/>
+        </p:nvSpPr>
+        <p:spPr>
+          <a:xfrm>
+            <a:off x="4636007" y="1563624"/>
+            <a:ext cx="3803904" cy="393192"/>
+          </a:xfrm>
+          <a:prstGeom prst="roundRect">
+            <a:avLst>
+              <a:gd name="adj" fmla="val 7000"/>
+            </a:avLst>
+          </a:prstGeom>
+          <a:solidFill>
+            <a:srgbClr val="E2F2F9"/>
+          </a:solidFill>
+          <a:ln w="2540">
+            <a:solidFill>
+              <a:srgbClr val="E2F2F9"/>
+            </a:solidFill>
+          </a:ln>
+        </p:spPr>
+        <p:style>
+          <a:lnRef idx="1">
+            <a:schemeClr val="accent1"/>
+          </a:lnRef>
+          <a:fillRef idx="3">
+            <a:schemeClr val="accent1"/>
+          </a:fillRef>
+          <a:effectRef idx="2">
+            <a:schemeClr val="accent1"/>
+          </a:effectRef>
+          <a:fontRef idx="minor">
+            <a:schemeClr val="lt1"/>
+          </a:fontRef>
+        </p:style>
+        <p:txBody>
+          <a:bodyPr rtlCol="0" anchor="ctr"/>
+          <a:lstStyle/>
+          <a:p>
+            <a:pPr algn="ctr"/>
+            <a:endParaRPr/>
+          </a:p>
+        </p:txBody>
+      </p:sp>
+      <p:sp>
+        <p:nvSpPr>
+          <p:cNvPr id="17" name="TextBox 16"/>
+          <p:cNvSpPr txBox="1"/>
+          <p:nvPr/>
+        </p:nvSpPr>
+        <p:spPr>
+          <a:xfrm>
+            <a:off x="4782312" y="1613212"/>
+            <a:ext cx="3547872" cy="275729"/>
+          </a:xfrm>
+          <a:prstGeom prst="rect">
+            <a:avLst/>
+          </a:prstGeom>
+          <a:noFill/>
+        </p:spPr>
+        <p:txBody>
+          <a:bodyPr wrap="square" lIns="27432" tIns="12801" rIns="27432" bIns="12801" anchor="ctr">
+            <a:spAutoFit/>
+          </a:bodyPr>
+          <a:lstStyle/>
+          <a:p>
+            <a:pPr algn="l">
+              <a:lnSpc>
+                <a:spcPct val="106000"/>
+              </a:lnSpc>
+              <a:spcBef>
+                <a:spcPts val="0"/>
+              </a:spcBef>
+              <a:spcAft>
+                <a:spcPts val="0"/>
+              </a:spcAft>
+            </a:pPr>
+            <a:r>
+              <a:rPr sz="1600" b="1">
+                <a:solidFill>
+                  <a:srgbClr val="063352"/>
+                </a:solidFill>
+                <a:latin typeface="Calibri"/>
+              </a:rPr>
+              <a:t>CuPBoP / CUDA</a:t>
+            </a:r>
+          </a:p>
+        </p:txBody>
+      </p:sp>
+      <p:sp>
+        <p:nvSpPr>
+          <p:cNvPr id="18" name="Rounded Rectangle 17"/>
+          <p:cNvSpPr/>
+          <p:nvPr/>
+        </p:nvSpPr>
+        <p:spPr>
+          <a:xfrm>
+            <a:off x="4800600" y="2029968"/>
+            <a:ext cx="3456432" cy="384048"/>
+          </a:xfrm>
+          <a:prstGeom prst="roundRect">
+            <a:avLst>
+              <a:gd name="adj" fmla="val 7000"/>
+            </a:avLst>
+          </a:prstGeom>
+          <a:solidFill>
+            <a:srgbClr val="F5F9FB"/>
+          </a:solidFill>
+          <a:ln w="8890">
+            <a:solidFill>
+              <a:srgbClr val="F5F9FB"/>
+            </a:solidFill>
+          </a:ln>
+        </p:spPr>
+        <p:style>
+          <a:lnRef idx="1">
+            <a:schemeClr val="accent1"/>
+          </a:lnRef>
+          <a:fillRef idx="3">
+            <a:schemeClr val="accent1"/>
+          </a:fillRef>
+          <a:effectRef idx="2">
+            <a:schemeClr val="accent1"/>
+          </a:effectRef>
+          <a:fontRef idx="minor">
+            <a:schemeClr val="lt1"/>
+          </a:fontRef>
+        </p:style>
+        <p:txBody>
+          <a:bodyPr rtlCol="0" anchor="ctr"/>
+          <a:lstStyle/>
+          <a:p>
+            <a:pPr algn="ctr"/>
+            <a:endParaRPr/>
+          </a:p>
+        </p:txBody>
+      </p:sp>
+      <p:sp>
+        <p:nvSpPr>
+          <p:cNvPr id="19" name="TextBox 18"/>
+          <p:cNvSpPr txBox="1"/>
+          <p:nvPr/>
+        </p:nvSpPr>
+        <p:spPr>
+          <a:xfrm>
+            <a:off x="4901184" y="2099709"/>
+            <a:ext cx="3291839" cy="244566"/>
+          </a:xfrm>
+          <a:prstGeom prst="rect">
+            <a:avLst/>
+          </a:prstGeom>
+          <a:noFill/>
+        </p:spPr>
+        <p:txBody>
+          <a:bodyPr wrap="square" lIns="27432" tIns="12801" rIns="27432" bIns="12801" anchor="ctr">
+            <a:spAutoFit/>
+          </a:bodyPr>
+          <a:lstStyle/>
+          <a:p>
+            <a:pPr algn="l">
+              <a:lnSpc>
+                <a:spcPct val="106000"/>
+              </a:lnSpc>
+              <a:spcBef>
+                <a:spcPts val="0"/>
+              </a:spcBef>
+              <a:spcAft>
+                <a:spcPts val="0"/>
+              </a:spcAft>
+            </a:pPr>
+            <a:r>
+              <a:rPr b="1">
+                <a:solidFill>
+                  <a:srgbClr val="156FA5"/>
+                </a:solidFill>
+                <a:latin typeface="Calibri"/>
+              </a:rPr>
+              <a:t>__reduce_add_sync(...) → warp reduction</a:t>
+            </a:r>
+          </a:p>
+        </p:txBody>
+      </p:sp>
+      <p:sp>
+        <p:nvSpPr>
+          <p:cNvPr id="20" name="TextBox 19"/>
+          <p:cNvSpPr txBox="1"/>
+          <p:nvPr/>
+        </p:nvSpPr>
+        <p:spPr>
+          <a:xfrm>
+            <a:off x="4846320" y="2575229"/>
+            <a:ext cx="3383280" cy="244502"/>
+          </a:xfrm>
+          <a:prstGeom prst="rect">
+            <a:avLst/>
+          </a:prstGeom>
+          <a:noFill/>
+        </p:spPr>
+        <p:txBody>
+          <a:bodyPr wrap="square" lIns="27432" tIns="12801" rIns="27432" bIns="12801" anchor="ctr">
+            <a:spAutoFit/>
+          </a:bodyPr>
+          <a:lstStyle/>
+          <a:p>
+            <a:pPr algn="l">
+              <a:lnSpc>
+                <a:spcPct val="106000"/>
+              </a:lnSpc>
+              <a:spcBef>
+                <a:spcPts val="0"/>
+              </a:spcBef>
+              <a:spcAft>
+                <a:spcPts val="0"/>
+              </a:spcAft>
+            </a:pPr>
+            <a:r>
+              <a:rPr b="0">
+                <a:solidFill>
+                  <a:srgbClr val="17232C"/>
+                </a:solidFill>
+                <a:latin typeface="Calibri"/>
+              </a:rPr>
+              <a:t>1  Match NVVM reduction intrinsic</a:t>
+            </a:r>
+          </a:p>
+        </p:txBody>
+      </p:sp>
+      <p:sp>
+        <p:nvSpPr>
+          <p:cNvPr id="21" name="TextBox 20"/>
+          <p:cNvSpPr txBox="1"/>
+          <p:nvPr/>
+        </p:nvSpPr>
+        <p:spPr>
+          <a:xfrm>
+            <a:off x="5056632" y="2826689"/>
+            <a:ext cx="3108960" cy="244502"/>
+          </a:xfrm>
+          <a:prstGeom prst="rect">
+            <a:avLst/>
+          </a:prstGeom>
+          <a:noFill/>
+        </p:spPr>
+        <p:txBody>
+          <a:bodyPr wrap="square" lIns="27432" tIns="12801" rIns="27432" bIns="12801" anchor="ctr">
+            <a:spAutoFit/>
+          </a:bodyPr>
+          <a:lstStyle/>
+          <a:p>
+            <a:pPr algn="l">
+              <a:lnSpc>
+                <a:spcPct val="106000"/>
+              </a:lnSpc>
+              <a:spcBef>
+                <a:spcPts val="0"/>
+              </a:spcBef>
+              <a:spcAft>
+                <a:spcPts val="0"/>
+              </a:spcAft>
+            </a:pPr>
+            <a:r>
+              <a:rPr b="0">
+                <a:solidFill>
+                  <a:srgbClr val="47545D"/>
+                </a:solidFill>
+                <a:latin typeface="Calibri"/>
+              </a:rPr>
+              <a:t>llvm.nvvm.redux.sync.add</a:t>
+            </a:r>
+          </a:p>
+        </p:txBody>
+      </p:sp>
+      <p:sp>
+        <p:nvSpPr>
+          <p:cNvPr id="22" name="TextBox 21"/>
+          <p:cNvSpPr txBox="1"/>
+          <p:nvPr/>
+        </p:nvSpPr>
+        <p:spPr>
+          <a:xfrm>
+            <a:off x="4846320" y="3178733"/>
+            <a:ext cx="3383280" cy="244502"/>
+          </a:xfrm>
+          <a:prstGeom prst="rect">
+            <a:avLst/>
+          </a:prstGeom>
+          <a:noFill/>
+        </p:spPr>
+        <p:txBody>
+          <a:bodyPr wrap="square" lIns="27432" tIns="12801" rIns="27432" bIns="12801" anchor="ctr">
+            <a:spAutoFit/>
+          </a:bodyPr>
+          <a:lstStyle/>
+          <a:p>
+            <a:pPr algn="l">
+              <a:lnSpc>
+                <a:spcPct val="106000"/>
+              </a:lnSpc>
+              <a:spcBef>
+                <a:spcPts val="0"/>
+              </a:spcBef>
+              <a:spcAft>
+                <a:spcPts val="0"/>
+              </a:spcAft>
+            </a:pPr>
+            <a:r>
+              <a:rPr b="0">
+                <a:solidFill>
+                  <a:srgbClr val="17232C"/>
+                </a:solidFill>
+                <a:latin typeface="Calibri"/>
+              </a:rPr>
+              <a:t>2  Redirect to a runtime helper</a:t>
+            </a:r>
+          </a:p>
+        </p:txBody>
+      </p:sp>
+      <p:sp>
+        <p:nvSpPr>
+          <p:cNvPr id="23" name="TextBox 22"/>
+          <p:cNvSpPr txBox="1"/>
+          <p:nvPr/>
+        </p:nvSpPr>
+        <p:spPr>
+          <a:xfrm>
+            <a:off x="4846320" y="3577203"/>
+            <a:ext cx="3383280" cy="243091"/>
+          </a:xfrm>
+          <a:prstGeom prst="rect">
+            <a:avLst/>
+          </a:prstGeom>
+          <a:noFill/>
+        </p:spPr>
+        <p:txBody>
+          <a:bodyPr wrap="square" lIns="27432" tIns="12801" rIns="27432" bIns="12801" anchor="ctr">
+            <a:spAutoFit/>
+          </a:bodyPr>
+          <a:lstStyle/>
+          <a:p>
+            <a:pPr algn="l">
+              <a:lnSpc>
+                <a:spcPct val="106000"/>
+              </a:lnSpc>
+              <a:spcBef>
+                <a:spcPts val="0"/>
+              </a:spcBef>
+              <a:spcAft>
+                <a:spcPts val="0"/>
+              </a:spcAft>
+            </a:pPr>
+            <a:r>
+              <a:rPr b="0" dirty="0">
+                <a:solidFill>
+                  <a:srgbClr val="17232C"/>
+                </a:solidFill>
+                <a:latin typeface="Calibri"/>
+              </a:rPr>
+              <a:t>3  Use 5× </a:t>
+            </a:r>
+            <a:r>
+              <a:rPr b="0" dirty="0" err="1">
+                <a:solidFill>
+                  <a:srgbClr val="17232C"/>
+                </a:solidFill>
+                <a:latin typeface="Calibri"/>
+              </a:rPr>
+              <a:t>vx_shfl_bfly</a:t>
+            </a:r>
+            <a:endParaRPr b="0" dirty="0">
+              <a:solidFill>
+                <a:srgbClr val="17232C"/>
+              </a:solidFill>
+              <a:latin typeface="Calibri"/>
+            </a:endParaRPr>
+          </a:p>
+        </p:txBody>
+      </p:sp>
+      <p:sp>
+        <p:nvSpPr>
+          <p:cNvPr id="24" name="Rounded Rectangle 23"/>
+          <p:cNvSpPr/>
+          <p:nvPr/>
+        </p:nvSpPr>
+        <p:spPr>
+          <a:xfrm>
+            <a:off x="640080" y="4242816"/>
+            <a:ext cx="7845552" cy="320040"/>
+          </a:xfrm>
+          <a:prstGeom prst="roundRect">
+            <a:avLst>
+              <a:gd name="adj" fmla="val 7000"/>
+            </a:avLst>
+          </a:prstGeom>
+          <a:solidFill>
+            <a:srgbClr val="E2F2F9"/>
+          </a:solidFill>
+          <a:ln w="8890">
+            <a:solidFill>
+              <a:srgbClr val="E2F2F9"/>
+            </a:solidFill>
+          </a:ln>
+        </p:spPr>
+        <p:style>
+          <a:lnRef idx="1">
+            <a:schemeClr val="accent1"/>
+          </a:lnRef>
+          <a:fillRef idx="3">
+            <a:schemeClr val="accent1"/>
+          </a:fillRef>
+          <a:effectRef idx="2">
+            <a:schemeClr val="accent1"/>
+          </a:effectRef>
+          <a:fontRef idx="minor">
+            <a:schemeClr val="lt1"/>
+          </a:fontRef>
+        </p:style>
+        <p:txBody>
+          <a:bodyPr rtlCol="0" anchor="ctr"/>
+          <a:lstStyle/>
+          <a:p>
+            <a:pPr algn="ctr"/>
+            <a:endParaRPr/>
+          </a:p>
+        </p:txBody>
+      </p:sp>
+      <p:sp>
+        <p:nvSpPr>
+          <p:cNvPr id="25" name="TextBox 24"/>
+          <p:cNvSpPr txBox="1"/>
+          <p:nvPr/>
+        </p:nvSpPr>
+        <p:spPr>
+          <a:xfrm>
+            <a:off x="749808" y="4261104"/>
+            <a:ext cx="7571231" cy="246888"/>
+          </a:xfrm>
+          <a:prstGeom prst="rect">
+            <a:avLst/>
+          </a:prstGeom>
+          <a:noFill/>
+        </p:spPr>
+        <p:txBody>
+          <a:bodyPr wrap="square" lIns="27432" tIns="12801" rIns="27432" bIns="12801" anchor="ctr">
+            <a:spAutoFit/>
+          </a:bodyPr>
+          <a:lstStyle/>
+          <a:p>
+            <a:pPr algn="l">
+              <a:lnSpc>
+                <a:spcPct val="106000"/>
+              </a:lnSpc>
+              <a:spcBef>
+                <a:spcPts val="0"/>
+              </a:spcBef>
+              <a:spcAft>
+                <a:spcPts val="0"/>
+              </a:spcAft>
+            </a:pPr>
+            <a:r>
+              <a:rPr sz="1030" b="1">
+                <a:solidFill>
+                  <a:srgbClr val="063352"/>
+                </a:solidFill>
+                <a:latin typeface="Consolas"/>
+              </a:rPr>
+              <a:t>./run.sh --baseline  [build fails]     ./run.sh  [both examples PASS]</a:t>
+            </a:r>
+          </a:p>
+        </p:txBody>
+      </p:sp>
+      <p:sp>
+        <p:nvSpPr>
+          <p:cNvPr id="26" name="TextBox 25"/>
+          <p:cNvSpPr txBox="1"/>
+          <p:nvPr/>
+        </p:nvSpPr>
+        <p:spPr>
+          <a:xfrm>
+            <a:off x="640080" y="4625035"/>
+            <a:ext cx="7680960" cy="201168"/>
+          </a:xfrm>
+          <a:prstGeom prst="rect">
+            <a:avLst/>
+          </a:prstGeom>
+          <a:noFill/>
+        </p:spPr>
+        <p:txBody>
+          <a:bodyPr wrap="square" lIns="27432" tIns="12801" rIns="27432" bIns="12801" anchor="ctr">
+            <a:spAutoFit/>
+          </a:bodyPr>
+          <a:lstStyle/>
+          <a:p>
+            <a:pPr algn="l">
+              <a:lnSpc>
+                <a:spcPct val="106000"/>
+              </a:lnSpc>
+              <a:spcBef>
+                <a:spcPts val="0"/>
+              </a:spcBef>
+              <a:spcAft>
+                <a:spcPts val="0"/>
+              </a:spcAft>
+            </a:pPr>
+            <a:r>
+              <a:rPr sz="919" b="0">
+                <a:solidFill>
+                  <a:srgbClr val="47545D"/>
+                </a:solidFill>
+                <a:latin typeface="Calibri"/>
+                <a:hlinkClick r:id="rId3"/>
+              </a:rPr>
+              <a:t>Source: Volt v1.1  ·  docs/7.1.tutorial_kernel_extension.md</a:t>
+            </a:r>
+          </a:p>
+        </p:txBody>
+      </p:sp>
+      <p:sp>
+        <p:nvSpPr>
+          <p:cNvPr id="30" name="제목 29">
+            <a:extLst>
+              <a:ext uri="{FF2B5EF4-FFF2-40B4-BE49-F238E27FC236}">
+                <a16:creationId xmlns:a16="http://schemas.microsoft.com/office/drawing/2014/main" id="{1F397FE9-398E-C82A-60A5-6D100E36CCB9}"/>
               </a:ext>
             </a:extLst>
           </p:cNvPr>
@@ -12406,489 +13691,19 @@
           <a:lstStyle/>
           <a:p>
             <a:r>
-              <a:rPr kumimoji="1" lang="en-US" altLang="ko-Kore-KR" dirty="0"/>
-              <a:t>2026 Publications</a:t>
-            </a:r>
-            <a:endParaRPr kumimoji="1" lang="ko-Kore-KR" altLang="en-US" dirty="0"/>
-          </a:p>
-        </p:txBody>
-      </p:sp>
-      <p:sp>
-        <p:nvSpPr>
-          <p:cNvPr id="3" name="내용 개체 틀 2">
-            <a:extLst>
-              <a:ext uri="{FF2B5EF4-FFF2-40B4-BE49-F238E27FC236}">
-                <a16:creationId xmlns:a16="http://schemas.microsoft.com/office/drawing/2014/main" id="{323C88A3-FAEF-1031-521E-C60F42D92D55}"/>
-              </a:ext>
-            </a:extLst>
-          </p:cNvPr>
-          <p:cNvSpPr>
-            <a:spLocks noGrp="1"/>
-          </p:cNvSpPr>
-          <p:nvPr>
-            <p:ph idx="1"/>
-          </p:nvPr>
-        </p:nvSpPr>
-        <p:spPr>
-          <a:xfrm>
-            <a:off x="628649" y="1200004"/>
-            <a:ext cx="8090807" cy="3432718"/>
-          </a:xfrm>
-        </p:spPr>
-        <p:txBody>
-          <a:bodyPr>
-            <a:noAutofit/>
-          </a:bodyPr>
-          <a:lstStyle/>
-          <a:p>
-            <a:pPr algn="l"/>
-            <a:r>
-              <a:rPr lang="en" altLang="ko-Kore-KR" sz="1600" b="1" dirty="0">
-                <a:effectLst/>
-              </a:rPr>
-              <a:t>Inside VOLT: Designing an Open-Source GPU Compiler</a:t>
-            </a:r>
-          </a:p>
-          <a:p>
-            <a:pPr lvl="1"/>
-            <a:r>
-              <a:rPr lang="en" altLang="ko-Kore-KR" sz="1400" dirty="0" err="1">
-                <a:effectLst/>
-              </a:rPr>
-              <a:t>Shinnung</a:t>
-            </a:r>
-            <a:r>
-              <a:rPr lang="en" altLang="ko-Kore-KR" sz="1400" dirty="0">
-                <a:effectLst/>
-              </a:rPr>
-              <a:t> Jeong, </a:t>
-            </a:r>
-            <a:r>
-              <a:rPr lang="en" altLang="ko-Kore-KR" sz="1400" dirty="0" err="1">
-                <a:effectLst/>
-              </a:rPr>
-              <a:t>Chihyo</a:t>
-            </a:r>
-            <a:r>
-              <a:rPr lang="en" altLang="ko-Kore-KR" sz="1400" dirty="0">
-                <a:effectLst/>
-              </a:rPr>
-              <a:t> Ahn, </a:t>
-            </a:r>
-            <a:r>
-              <a:rPr lang="en" altLang="ko-Kore-KR" sz="1400" dirty="0" err="1">
-                <a:effectLst/>
-              </a:rPr>
-              <a:t>Huanzhi</a:t>
-            </a:r>
-            <a:r>
-              <a:rPr lang="en" altLang="ko-Kore-KR" sz="1400" dirty="0">
-                <a:effectLst/>
-              </a:rPr>
-              <a:t> Pu, </a:t>
-            </a:r>
-            <a:r>
-              <a:rPr lang="en" altLang="ko-Kore-KR" sz="1400" dirty="0" err="1">
-                <a:effectLst/>
-              </a:rPr>
-              <a:t>Jisheng</a:t>
-            </a:r>
-            <a:r>
-              <a:rPr lang="en" altLang="ko-Kore-KR" sz="1400" dirty="0">
-                <a:effectLst/>
-              </a:rPr>
-              <a:t> Zhao, </a:t>
-            </a:r>
-            <a:r>
-              <a:rPr lang="en" altLang="ko-Kore-KR" sz="1400" dirty="0" err="1">
-                <a:effectLst/>
-              </a:rPr>
-              <a:t>Hyesoon</a:t>
-            </a:r>
-            <a:r>
-              <a:rPr lang="en" altLang="ko-Kore-KR" sz="1400" dirty="0">
-                <a:effectLst/>
-              </a:rPr>
-              <a:t> Kim, Blaise Tine</a:t>
-            </a:r>
-            <a:br>
-              <a:rPr lang="en" altLang="ko-Kore-KR" sz="1400" dirty="0">
-                <a:effectLst/>
-              </a:rPr>
-            </a:br>
-            <a:r>
-              <a:rPr lang="en" altLang="ko-Kore-KR" sz="1400" dirty="0">
-                <a:effectLst/>
-              </a:rPr>
-              <a:t>The ACM SIGPLAN 2026 International Conference on Compiler Construction (CC), Feb 2026</a:t>
-            </a:r>
-          </a:p>
-          <a:p>
-            <a:pPr algn="l"/>
-            <a:r>
-              <a:rPr lang="en" altLang="ko-Kore-KR" sz="1600" b="1" dirty="0" err="1">
-                <a:effectLst/>
-              </a:rPr>
-              <a:t>FastTrackGPU</a:t>
-            </a:r>
-            <a:r>
-              <a:rPr lang="en" altLang="ko-Kore-KR" sz="1600" b="1" dirty="0">
-                <a:effectLst/>
-              </a:rPr>
-              <a:t>: Static-Analysis–Guided Analytical Modeling for Softcore GPUs </a:t>
-            </a:r>
-          </a:p>
-          <a:p>
-            <a:pPr lvl="1"/>
-            <a:r>
-              <a:rPr lang="en" altLang="ko-Kore-KR" sz="1400" dirty="0" err="1">
-                <a:effectLst/>
-              </a:rPr>
-              <a:t>Chihyo</a:t>
-            </a:r>
-            <a:r>
-              <a:rPr lang="en" altLang="ko-Kore-KR" sz="1400" dirty="0">
-                <a:effectLst/>
-              </a:rPr>
-              <a:t> Ahn, </a:t>
-            </a:r>
-            <a:r>
-              <a:rPr lang="en" altLang="ko-Kore-KR" sz="1400" dirty="0" err="1">
-                <a:effectLst/>
-              </a:rPr>
-              <a:t>Shinnung</a:t>
-            </a:r>
-            <a:r>
-              <a:rPr lang="en" altLang="ko-Kore-KR" sz="1400" dirty="0">
-                <a:effectLst/>
-              </a:rPr>
-              <a:t> Jeong, Liam Paul Cooper, </a:t>
-            </a:r>
-            <a:r>
-              <a:rPr lang="en" altLang="ko-Kore-KR" sz="1400" dirty="0" err="1">
-                <a:effectLst/>
-              </a:rPr>
-              <a:t>Ruobing</a:t>
-            </a:r>
-            <a:r>
-              <a:rPr lang="en" altLang="ko-Kore-KR" sz="1400" dirty="0">
-                <a:effectLst/>
-              </a:rPr>
-              <a:t> Han, </a:t>
-            </a:r>
-            <a:r>
-              <a:rPr lang="en" altLang="ko-Kore-KR" sz="1400" dirty="0" err="1">
-                <a:effectLst/>
-              </a:rPr>
-              <a:t>Huanzhi</a:t>
-            </a:r>
-            <a:r>
-              <a:rPr lang="en" altLang="ko-Kore-KR" sz="1400" dirty="0">
-                <a:effectLst/>
-              </a:rPr>
-              <a:t> Pu, Nicholas </a:t>
-            </a:r>
-            <a:r>
-              <a:rPr lang="en" altLang="ko-Kore-KR" sz="1400" dirty="0" err="1">
-                <a:effectLst/>
-              </a:rPr>
-              <a:t>Parnenzini</a:t>
-            </a:r>
-            <a:r>
-              <a:rPr lang="en" altLang="ko-Kore-KR" sz="1400" dirty="0">
-                <a:effectLst/>
-              </a:rPr>
-              <a:t>, </a:t>
-            </a:r>
-            <a:r>
-              <a:rPr lang="en" altLang="ko-Kore-KR" sz="1400" dirty="0" err="1">
-                <a:effectLst/>
-              </a:rPr>
-              <a:t>Jisheng</a:t>
-            </a:r>
-            <a:r>
-              <a:rPr lang="en" altLang="ko-Kore-KR" sz="1400" dirty="0">
-                <a:effectLst/>
-              </a:rPr>
-              <a:t> Zhao, Blaise Tine, </a:t>
-            </a:r>
-            <a:r>
-              <a:rPr lang="en" altLang="ko-Kore-KR" sz="1400" dirty="0" err="1">
-                <a:effectLst/>
-              </a:rPr>
-              <a:t>Hyesoon</a:t>
-            </a:r>
-            <a:r>
-              <a:rPr lang="en" altLang="ko-Kore-KR" sz="1400" dirty="0">
-                <a:effectLst/>
-              </a:rPr>
-              <a:t> Kim</a:t>
-            </a:r>
-            <a:br>
-              <a:rPr lang="en" altLang="ko-Kore-KR" sz="1400" dirty="0">
-                <a:effectLst/>
-              </a:rPr>
-            </a:br>
-            <a:r>
-              <a:rPr lang="en" altLang="ko-Kore-KR" sz="1400" dirty="0">
-                <a:effectLst/>
-              </a:rPr>
-              <a:t>IEEE Computer Architecture Letters (CAL), 2026</a:t>
-            </a:r>
-          </a:p>
-          <a:p>
-            <a:pPr algn="l"/>
-            <a:r>
-              <a:rPr lang="en" altLang="ko-Kore-KR" sz="1600" b="1" dirty="0">
-                <a:effectLst/>
-              </a:rPr>
-              <a:t>Toward End-to-End ML Support on Vortex</a:t>
-            </a:r>
-          </a:p>
-          <a:p>
-            <a:pPr lvl="1"/>
-            <a:r>
-              <a:rPr lang="en" altLang="ko-Kore-KR" sz="1400" dirty="0" err="1">
-                <a:effectLst/>
-              </a:rPr>
-              <a:t>Shinnung</a:t>
-            </a:r>
-            <a:r>
-              <a:rPr lang="en" altLang="ko-Kore-KR" sz="1400" dirty="0">
-                <a:effectLst/>
-              </a:rPr>
-              <a:t> Jeong, </a:t>
-            </a:r>
-            <a:r>
-              <a:rPr lang="en" altLang="ko-Kore-KR" sz="1400" dirty="0" err="1">
-                <a:effectLst/>
-              </a:rPr>
-              <a:t>Chihyo</a:t>
-            </a:r>
-            <a:r>
-              <a:rPr lang="en" altLang="ko-Kore-KR" sz="1400" dirty="0">
-                <a:effectLst/>
-              </a:rPr>
-              <a:t> Ahn, Sai Hemanth Reddy </a:t>
-            </a:r>
-            <a:r>
-              <a:rPr lang="en" altLang="ko-Kore-KR" sz="1400" dirty="0" err="1">
-                <a:effectLst/>
-              </a:rPr>
-              <a:t>Bheemreddy,Liam</a:t>
-            </a:r>
-            <a:r>
-              <a:rPr lang="en" altLang="ko-Kore-KR" sz="1400" dirty="0">
-                <a:effectLst/>
-              </a:rPr>
-              <a:t> Cooper, </a:t>
-            </a:r>
-            <a:r>
-              <a:rPr lang="en" altLang="ko-Kore-KR" sz="1400" dirty="0" err="1">
-                <a:effectLst/>
-              </a:rPr>
-              <a:t>Krishil</a:t>
-            </a:r>
-            <a:r>
-              <a:rPr lang="en" altLang="ko-Kore-KR" sz="1400" dirty="0">
-                <a:effectLst/>
-              </a:rPr>
-              <a:t> Gandhi, </a:t>
-            </a:r>
-            <a:r>
-              <a:rPr lang="en" altLang="ko-Kore-KR" sz="1400" dirty="0" err="1">
-                <a:effectLst/>
-              </a:rPr>
-              <a:t>Chulhyung</a:t>
-            </a:r>
-            <a:r>
-              <a:rPr lang="en" altLang="ko-Kore-KR" sz="1400" dirty="0">
-                <a:effectLst/>
-              </a:rPr>
-              <a:t> Park, Vincent Pham, </a:t>
-            </a:r>
-            <a:r>
-              <a:rPr lang="en" altLang="ko-Kore-KR" sz="1400" dirty="0" err="1">
-                <a:effectLst/>
-              </a:rPr>
-              <a:t>Huanzhi</a:t>
-            </a:r>
-            <a:r>
-              <a:rPr lang="en" altLang="ko-Kore-KR" sz="1400" dirty="0">
-                <a:effectLst/>
-              </a:rPr>
-              <a:t> Pu, Saurabh Singh, Mitul Tandon, </a:t>
-            </a:r>
-            <a:r>
-              <a:rPr lang="en" altLang="ko-Kore-KR" sz="1400" dirty="0" err="1">
-                <a:effectLst/>
-              </a:rPr>
-              <a:t>Jisheng</a:t>
-            </a:r>
-            <a:r>
-              <a:rPr lang="en" altLang="ko-Kore-KR" sz="1400" dirty="0">
-                <a:effectLst/>
-              </a:rPr>
-              <a:t> Zhao, and </a:t>
-            </a:r>
-            <a:r>
-              <a:rPr lang="en" altLang="ko-Kore-KR" sz="1400" dirty="0" err="1">
-                <a:effectLst/>
-              </a:rPr>
-              <a:t>Hyesoon</a:t>
-            </a:r>
-            <a:r>
-              <a:rPr lang="en" altLang="ko-Kore-KR" sz="1400" dirty="0">
-                <a:effectLst/>
-              </a:rPr>
-              <a:t> Kim</a:t>
-            </a:r>
-            <a:br>
-              <a:rPr lang="en" altLang="ko-Kore-KR" sz="1400" dirty="0">
-                <a:effectLst/>
-              </a:rPr>
-            </a:br>
-            <a:r>
-              <a:rPr lang="en" altLang="ko-Kore-KR" sz="1400" dirty="0">
-                <a:effectLst/>
-              </a:rPr>
-              <a:t>Open-Source Computer Architecture Research (OSCAR), 2026</a:t>
-            </a:r>
-          </a:p>
-          <a:p>
-            <a:pPr algn="l"/>
-            <a:r>
-              <a:rPr lang="en" altLang="ko-Kore-KR" sz="1600" b="1" dirty="0" err="1">
-                <a:effectLst/>
-              </a:rPr>
-              <a:t>CuLifter</a:t>
-            </a:r>
-            <a:r>
-              <a:rPr lang="en" altLang="ko-Kore-KR" sz="1600" b="1" dirty="0">
-                <a:effectLst/>
-              </a:rPr>
-              <a:t>: Lifting GPU Binaries to Typed IR</a:t>
-            </a:r>
-          </a:p>
-          <a:p>
-            <a:pPr lvl="1"/>
-            <a:r>
-              <a:rPr lang="en" altLang="ko-Kore-KR" sz="1400" dirty="0" err="1">
-                <a:effectLst/>
-              </a:rPr>
-              <a:t>Jisheng</a:t>
-            </a:r>
-            <a:r>
-              <a:rPr lang="en" altLang="ko-Kore-KR" sz="1400" dirty="0">
-                <a:effectLst/>
-              </a:rPr>
-              <a:t> Zhao*, </a:t>
-            </a:r>
-            <a:r>
-              <a:rPr lang="en" altLang="ko-Kore-KR" sz="1400" dirty="0" err="1">
-                <a:effectLst/>
-              </a:rPr>
-              <a:t>Huanzhi</a:t>
-            </a:r>
-            <a:r>
-              <a:rPr lang="en" altLang="ko-Kore-KR" sz="1400" dirty="0">
-                <a:effectLst/>
-              </a:rPr>
-              <a:t> Pu*, </a:t>
-            </a:r>
-            <a:r>
-              <a:rPr lang="en" altLang="ko-Kore-KR" sz="1400" dirty="0" err="1">
-                <a:effectLst/>
-              </a:rPr>
-              <a:t>Shinnung</a:t>
-            </a:r>
-            <a:r>
-              <a:rPr lang="en" altLang="ko-Kore-KR" sz="1400" dirty="0">
-                <a:effectLst/>
-              </a:rPr>
-              <a:t> Jeong, </a:t>
-            </a:r>
-            <a:r>
-              <a:rPr lang="en" altLang="ko-Kore-KR" sz="1400" dirty="0" err="1">
-                <a:effectLst/>
-              </a:rPr>
-              <a:t>Chihyo</a:t>
-            </a:r>
-            <a:r>
-              <a:rPr lang="en" altLang="ko-Kore-KR" sz="1400" dirty="0">
-                <a:effectLst/>
-              </a:rPr>
-              <a:t> Ahn, and </a:t>
-            </a:r>
-            <a:r>
-              <a:rPr lang="en" altLang="ko-Kore-KR" sz="1400" dirty="0" err="1">
-                <a:effectLst/>
-              </a:rPr>
-              <a:t>Hyesoon</a:t>
-            </a:r>
-            <a:r>
-              <a:rPr lang="en" altLang="ko-Kore-KR" sz="1400" dirty="0">
-                <a:effectLst/>
-              </a:rPr>
-              <a:t> Kim</a:t>
-            </a:r>
-            <a:br>
-              <a:rPr lang="en" altLang="ko-Kore-KR" sz="1400" dirty="0">
-                <a:effectLst/>
-              </a:rPr>
-            </a:br>
-            <a:r>
-              <a:rPr lang="en" altLang="ko-Kore-KR" sz="1400" dirty="0">
-                <a:effectLst/>
-              </a:rPr>
-              <a:t>59th IEEE/ACM International Symposium on Microarchitecture® (MICRO), 2026</a:t>
-            </a:r>
-          </a:p>
-          <a:p>
-            <a:pPr marL="0" indent="0">
-              <a:buNone/>
-            </a:pPr>
-            <a:endParaRPr lang="en" altLang="ko-Kore-KR" sz="1600" dirty="0">
-              <a:effectLst/>
-            </a:endParaRPr>
-          </a:p>
-        </p:txBody>
-      </p:sp>
-      <p:sp>
-        <p:nvSpPr>
-          <p:cNvPr id="4" name="슬라이드 번호 개체 틀 3">
-            <a:extLst>
-              <a:ext uri="{FF2B5EF4-FFF2-40B4-BE49-F238E27FC236}">
-                <a16:creationId xmlns:a16="http://schemas.microsoft.com/office/drawing/2014/main" id="{D9A175D6-EEE4-7FFC-48CB-FA576C2FEC73}"/>
-              </a:ext>
-            </a:extLst>
-          </p:cNvPr>
-          <p:cNvSpPr>
-            <a:spLocks noGrp="1"/>
-          </p:cNvSpPr>
-          <p:nvPr>
-            <p:ph type="sldNum" sz="quarter" idx="4"/>
-          </p:nvPr>
-        </p:nvSpPr>
-        <p:spPr/>
-        <p:txBody>
-          <a:bodyPr/>
-          <a:lstStyle/>
-          <a:p>
-            <a:fld id="{C5E74F64-7780-9C4F-983D-3F814FF801CD}" type="slidenum">
-              <a:rPr lang="en-US" smtClean="0"/>
-              <a:t>17</a:t>
-            </a:fld>
-            <a:endParaRPr lang="en-US" dirty="0"/>
+              <a:rPr lang="en" altLang="ko-Kore-KR" sz="3600" b="1" dirty="0">
+                <a:solidFill>
+                  <a:srgbClr val="000000"/>
+                </a:solidFill>
+                <a:latin typeface="Calibri"/>
+              </a:rPr>
+              <a:t>Tutorial 1: Extending Kernel Functions</a:t>
+            </a:r>
+            <a:endParaRPr lang="ko-Kore-KR" altLang="en-US" dirty="0"/>
           </a:p>
         </p:txBody>
       </p:sp>
     </p:spTree>
-    <p:extLst>
-      <p:ext uri="{BB962C8B-B14F-4D97-AF65-F5344CB8AC3E}">
-        <p14:creationId xmlns:p14="http://schemas.microsoft.com/office/powerpoint/2010/main" val="2813626593"/>
-      </p:ext>
-    </p:extLst>
   </p:cSld>
   <p:clrMapOvr>
     <a:masterClrMapping/>
@@ -12915,10 +13730,1041 @@
       </p:grpSpPr>
       <p:sp>
         <p:nvSpPr>
-          <p:cNvPr id="2" name="제목 1">
-            <a:extLst>
-              <a:ext uri="{FF2B5EF4-FFF2-40B4-BE49-F238E27FC236}">
-                <a16:creationId xmlns:a16="http://schemas.microsoft.com/office/drawing/2014/main" id="{10C83B1F-E3DE-8098-5EB4-18D937322FC9}"/>
+          <p:cNvPr id="3" name="TextBox 2"/>
+          <p:cNvSpPr txBox="1"/>
+          <p:nvPr/>
+        </p:nvSpPr>
+        <p:spPr>
+          <a:xfrm>
+            <a:off x="630936" y="1014248"/>
+            <a:ext cx="7955279" cy="275792"/>
+          </a:xfrm>
+          <a:prstGeom prst="rect">
+            <a:avLst/>
+          </a:prstGeom>
+          <a:noFill/>
+        </p:spPr>
+        <p:txBody>
+          <a:bodyPr wrap="square" lIns="27432" tIns="12801" rIns="27432" bIns="12801" anchor="ctr">
+            <a:spAutoFit/>
+          </a:bodyPr>
+          <a:lstStyle/>
+          <a:p>
+            <a:pPr algn="l">
+              <a:lnSpc>
+                <a:spcPct val="106000"/>
+              </a:lnSpc>
+              <a:spcBef>
+                <a:spcPts val="0"/>
+              </a:spcBef>
+              <a:spcAft>
+                <a:spcPts val="0"/>
+              </a:spcAft>
+            </a:pPr>
+            <a:r>
+              <a:rPr sz="1600" b="0" dirty="0">
+                <a:solidFill>
+                  <a:schemeClr val="tx1"/>
+                </a:solidFill>
+                <a:latin typeface="Calibri"/>
+              </a:rPr>
+              <a:t>CUDA application code is unchanged; </a:t>
+            </a:r>
+            <a:r>
+              <a:rPr sz="1600" b="0" dirty="0" err="1">
+                <a:solidFill>
+                  <a:schemeClr val="tx1"/>
+                </a:solidFill>
+                <a:latin typeface="Calibri"/>
+              </a:rPr>
+              <a:t>CuPBoP</a:t>
+            </a:r>
+            <a:r>
+              <a:rPr sz="1600" b="0" dirty="0">
+                <a:solidFill>
+                  <a:schemeClr val="tx1"/>
+                </a:solidFill>
+                <a:latin typeface="Calibri"/>
+              </a:rPr>
+              <a:t> adapts runtime and launch semantics</a:t>
+            </a:r>
+          </a:p>
+        </p:txBody>
+      </p:sp>
+      <p:cxnSp>
+        <p:nvCxnSpPr>
+          <p:cNvPr id="4" name="Connector 3"/>
+          <p:cNvCxnSpPr/>
+          <p:nvPr/>
+        </p:nvCxnSpPr>
+        <p:spPr>
+          <a:xfrm>
+            <a:off x="630936" y="1399032"/>
+            <a:ext cx="7872984" cy="0"/>
+          </a:xfrm>
+          <a:prstGeom prst="line">
+            <a:avLst/>
+          </a:prstGeom>
+          <a:ln w="10160">
+            <a:solidFill>
+              <a:srgbClr val="E2F2F9"/>
+            </a:solidFill>
+          </a:ln>
+        </p:spPr>
+        <p:style>
+          <a:lnRef idx="2">
+            <a:schemeClr val="accent1"/>
+          </a:lnRef>
+          <a:fillRef idx="0">
+            <a:schemeClr val="accent1"/>
+          </a:fillRef>
+          <a:effectRef idx="1">
+            <a:schemeClr val="accent1"/>
+          </a:effectRef>
+          <a:fontRef idx="minor">
+            <a:schemeClr val="tx1"/>
+          </a:fontRef>
+        </p:style>
+      </p:cxnSp>
+      <p:sp>
+        <p:nvSpPr>
+          <p:cNvPr id="5" name="TextBox 4"/>
+          <p:cNvSpPr txBox="1"/>
+          <p:nvPr/>
+        </p:nvSpPr>
+        <p:spPr>
+          <a:xfrm>
+            <a:off x="8366760" y="4690872"/>
+            <a:ext cx="338328" cy="256032"/>
+          </a:xfrm>
+          <a:prstGeom prst="rect">
+            <a:avLst/>
+          </a:prstGeom>
+          <a:noFill/>
+        </p:spPr>
+        <p:txBody>
+          <a:bodyPr wrap="square" lIns="27432" tIns="12801" rIns="27432" bIns="12801" anchor="ctr">
+            <a:spAutoFit/>
+          </a:bodyPr>
+          <a:lstStyle/>
+          <a:p>
+            <a:pPr algn="r">
+              <a:lnSpc>
+                <a:spcPct val="106000"/>
+              </a:lnSpc>
+              <a:spcBef>
+                <a:spcPts val="0"/>
+              </a:spcBef>
+              <a:spcAft>
+                <a:spcPts val="0"/>
+              </a:spcAft>
+            </a:pPr>
+            <a:r>
+              <a:rPr sz="900" b="0">
+                <a:solidFill>
+                  <a:srgbClr val="47545D"/>
+                </a:solidFill>
+                <a:latin typeface="Calibri"/>
+              </a:rPr>
+              <a:t>18</a:t>
+            </a:r>
+          </a:p>
+        </p:txBody>
+      </p:sp>
+      <p:sp>
+        <p:nvSpPr>
+          <p:cNvPr id="6" name="Rounded Rectangle 5"/>
+          <p:cNvSpPr/>
+          <p:nvPr/>
+        </p:nvSpPr>
+        <p:spPr>
+          <a:xfrm>
+            <a:off x="630936" y="1554480"/>
+            <a:ext cx="3822191" cy="2496312"/>
+          </a:xfrm>
+          <a:prstGeom prst="roundRect">
+            <a:avLst>
+              <a:gd name="adj" fmla="val 7000"/>
+            </a:avLst>
+          </a:prstGeom>
+          <a:solidFill>
+            <a:srgbClr val="FBFDFE"/>
+          </a:solidFill>
+          <a:ln w="10160">
+            <a:solidFill>
+              <a:srgbClr val="C5D5E0"/>
+            </a:solidFill>
+          </a:ln>
+        </p:spPr>
+        <p:style>
+          <a:lnRef idx="1">
+            <a:schemeClr val="accent1"/>
+          </a:lnRef>
+          <a:fillRef idx="3">
+            <a:schemeClr val="accent1"/>
+          </a:fillRef>
+          <a:effectRef idx="2">
+            <a:schemeClr val="accent1"/>
+          </a:effectRef>
+          <a:fontRef idx="minor">
+            <a:schemeClr val="lt1"/>
+          </a:fontRef>
+        </p:style>
+        <p:txBody>
+          <a:bodyPr rtlCol="0" anchor="ctr"/>
+          <a:lstStyle/>
+          <a:p>
+            <a:pPr algn="ctr"/>
+            <a:endParaRPr/>
+          </a:p>
+        </p:txBody>
+      </p:sp>
+      <p:sp>
+        <p:nvSpPr>
+          <p:cNvPr id="7" name="Rounded Rectangle 6"/>
+          <p:cNvSpPr/>
+          <p:nvPr/>
+        </p:nvSpPr>
+        <p:spPr>
+          <a:xfrm>
+            <a:off x="640080" y="1563624"/>
+            <a:ext cx="3803904" cy="393192"/>
+          </a:xfrm>
+          <a:prstGeom prst="roundRect">
+            <a:avLst>
+              <a:gd name="adj" fmla="val 7000"/>
+            </a:avLst>
+          </a:prstGeom>
+          <a:solidFill>
+            <a:srgbClr val="E2F2F9"/>
+          </a:solidFill>
+          <a:ln w="2540">
+            <a:solidFill>
+              <a:srgbClr val="E2F2F9"/>
+            </a:solidFill>
+          </a:ln>
+        </p:spPr>
+        <p:style>
+          <a:lnRef idx="1">
+            <a:schemeClr val="accent1"/>
+          </a:lnRef>
+          <a:fillRef idx="3">
+            <a:schemeClr val="accent1"/>
+          </a:fillRef>
+          <a:effectRef idx="2">
+            <a:schemeClr val="accent1"/>
+          </a:effectRef>
+          <a:fontRef idx="minor">
+            <a:schemeClr val="lt1"/>
+          </a:fontRef>
+        </p:style>
+        <p:txBody>
+          <a:bodyPr rtlCol="0" anchor="ctr"/>
+          <a:lstStyle/>
+          <a:p>
+            <a:pPr algn="ctr"/>
+            <a:endParaRPr/>
+          </a:p>
+        </p:txBody>
+      </p:sp>
+      <p:sp>
+        <p:nvSpPr>
+          <p:cNvPr id="8" name="TextBox 7"/>
+          <p:cNvSpPr txBox="1"/>
+          <p:nvPr/>
+        </p:nvSpPr>
+        <p:spPr>
+          <a:xfrm>
+            <a:off x="786384" y="1613212"/>
+            <a:ext cx="3547872" cy="275729"/>
+          </a:xfrm>
+          <a:prstGeom prst="rect">
+            <a:avLst/>
+          </a:prstGeom>
+          <a:noFill/>
+        </p:spPr>
+        <p:txBody>
+          <a:bodyPr wrap="square" lIns="27432" tIns="12801" rIns="27432" bIns="12801" anchor="ctr">
+            <a:spAutoFit/>
+          </a:bodyPr>
+          <a:lstStyle/>
+          <a:p>
+            <a:pPr algn="l">
+              <a:lnSpc>
+                <a:spcPct val="106000"/>
+              </a:lnSpc>
+              <a:spcBef>
+                <a:spcPts val="0"/>
+              </a:spcBef>
+              <a:spcAft>
+                <a:spcPts val="0"/>
+              </a:spcAft>
+            </a:pPr>
+            <a:r>
+              <a:rPr sz="1600" b="1" dirty="0">
+                <a:solidFill>
+                  <a:srgbClr val="063352"/>
+                </a:solidFill>
+                <a:latin typeface="Calibri"/>
+              </a:rPr>
+              <a:t>Existing CUDA host APIs</a:t>
+            </a:r>
+          </a:p>
+        </p:txBody>
+      </p:sp>
+      <p:sp>
+        <p:nvSpPr>
+          <p:cNvPr id="9" name="TextBox 8"/>
+          <p:cNvSpPr txBox="1"/>
+          <p:nvPr/>
+        </p:nvSpPr>
+        <p:spPr>
+          <a:xfrm>
+            <a:off x="850392" y="2044845"/>
+            <a:ext cx="3511296" cy="244566"/>
+          </a:xfrm>
+          <a:prstGeom prst="rect">
+            <a:avLst/>
+          </a:prstGeom>
+          <a:noFill/>
+        </p:spPr>
+        <p:txBody>
+          <a:bodyPr wrap="square" lIns="27432" tIns="12801" rIns="27432" bIns="12801" anchor="ctr">
+            <a:spAutoFit/>
+          </a:bodyPr>
+          <a:lstStyle/>
+          <a:p>
+            <a:pPr algn="l">
+              <a:lnSpc>
+                <a:spcPct val="106000"/>
+              </a:lnSpc>
+              <a:spcBef>
+                <a:spcPts val="0"/>
+              </a:spcBef>
+              <a:spcAft>
+                <a:spcPts val="0"/>
+              </a:spcAft>
+            </a:pPr>
+            <a:r>
+              <a:rPr b="1">
+                <a:solidFill>
+                  <a:srgbClr val="156FA5"/>
+                </a:solidFill>
+                <a:latin typeface="Calibri"/>
+              </a:rPr>
+              <a:t>cudaMemcpy(dst, src, n, kind)</a:t>
+            </a:r>
+          </a:p>
+        </p:txBody>
+      </p:sp>
+      <p:sp>
+        <p:nvSpPr>
+          <p:cNvPr id="10" name="TextBox 9"/>
+          <p:cNvSpPr txBox="1"/>
+          <p:nvPr/>
+        </p:nvSpPr>
+        <p:spPr>
+          <a:xfrm>
+            <a:off x="978408" y="2474645"/>
+            <a:ext cx="3337560" cy="244502"/>
+          </a:xfrm>
+          <a:prstGeom prst="rect">
+            <a:avLst/>
+          </a:prstGeom>
+          <a:noFill/>
+        </p:spPr>
+        <p:txBody>
+          <a:bodyPr wrap="square" lIns="27432" tIns="12801" rIns="27432" bIns="12801" anchor="ctr">
+            <a:spAutoFit/>
+          </a:bodyPr>
+          <a:lstStyle/>
+          <a:p>
+            <a:pPr algn="l">
+              <a:lnSpc>
+                <a:spcPct val="106000"/>
+              </a:lnSpc>
+              <a:spcBef>
+                <a:spcPts val="0"/>
+              </a:spcBef>
+              <a:spcAft>
+                <a:spcPts val="0"/>
+              </a:spcAft>
+            </a:pPr>
+            <a:r>
+              <a:rPr b="0" dirty="0">
+                <a:solidFill>
+                  <a:srgbClr val="17232C"/>
+                </a:solidFill>
+                <a:latin typeface="Calibri"/>
+              </a:rPr>
+              <a:t>Host staging → </a:t>
+            </a:r>
+            <a:r>
+              <a:rPr b="0" dirty="0" err="1">
+                <a:solidFill>
+                  <a:srgbClr val="17232C"/>
+                </a:solidFill>
+                <a:latin typeface="Calibri"/>
+              </a:rPr>
+              <a:t>vx_copy_to_dev</a:t>
+            </a:r>
+            <a:endParaRPr b="0" dirty="0">
+              <a:solidFill>
+                <a:srgbClr val="17232C"/>
+              </a:solidFill>
+              <a:latin typeface="Calibri"/>
+            </a:endParaRPr>
+          </a:p>
+        </p:txBody>
+      </p:sp>
+      <p:cxnSp>
+        <p:nvCxnSpPr>
+          <p:cNvPr id="11" name="Connector 10"/>
+          <p:cNvCxnSpPr/>
+          <p:nvPr/>
+        </p:nvCxnSpPr>
+        <p:spPr>
+          <a:xfrm>
+            <a:off x="868680" y="2880360"/>
+            <a:ext cx="3328416" cy="0"/>
+          </a:xfrm>
+          <a:prstGeom prst="line">
+            <a:avLst/>
+          </a:prstGeom>
+          <a:ln w="15240">
+            <a:solidFill>
+              <a:srgbClr val="C5D5E0"/>
+            </a:solidFill>
+          </a:ln>
+        </p:spPr>
+        <p:style>
+          <a:lnRef idx="2">
+            <a:schemeClr val="accent1"/>
+          </a:lnRef>
+          <a:fillRef idx="0">
+            <a:schemeClr val="accent1"/>
+          </a:fillRef>
+          <a:effectRef idx="1">
+            <a:schemeClr val="accent1"/>
+          </a:effectRef>
+          <a:fontRef idx="minor">
+            <a:schemeClr val="tx1"/>
+          </a:fontRef>
+        </p:style>
+      </p:cxnSp>
+      <p:sp>
+        <p:nvSpPr>
+          <p:cNvPr id="12" name="TextBox 11"/>
+          <p:cNvSpPr txBox="1"/>
+          <p:nvPr/>
+        </p:nvSpPr>
+        <p:spPr>
+          <a:xfrm>
+            <a:off x="850392" y="3032397"/>
+            <a:ext cx="3483864" cy="244566"/>
+          </a:xfrm>
+          <a:prstGeom prst="rect">
+            <a:avLst/>
+          </a:prstGeom>
+          <a:noFill/>
+        </p:spPr>
+        <p:txBody>
+          <a:bodyPr wrap="square" lIns="27432" tIns="12801" rIns="27432" bIns="12801" anchor="ctr">
+            <a:spAutoFit/>
+          </a:bodyPr>
+          <a:lstStyle/>
+          <a:p>
+            <a:pPr algn="l">
+              <a:lnSpc>
+                <a:spcPct val="106000"/>
+              </a:lnSpc>
+              <a:spcBef>
+                <a:spcPts val="0"/>
+              </a:spcBef>
+              <a:spcAft>
+                <a:spcPts val="0"/>
+              </a:spcAft>
+            </a:pPr>
+            <a:r>
+              <a:rPr b="1">
+                <a:solidFill>
+                  <a:srgbClr val="156FA5"/>
+                </a:solidFill>
+                <a:latin typeface="Calibri"/>
+              </a:rPr>
+              <a:t>cudaMemcpyToSymbol(...) </a:t>
+            </a:r>
+          </a:p>
+        </p:txBody>
+      </p:sp>
+      <p:sp>
+        <p:nvSpPr>
+          <p:cNvPr id="13" name="TextBox 12"/>
+          <p:cNvSpPr txBox="1"/>
+          <p:nvPr/>
+        </p:nvSpPr>
+        <p:spPr>
+          <a:xfrm>
+            <a:off x="978408" y="3471341"/>
+            <a:ext cx="3337560" cy="244502"/>
+          </a:xfrm>
+          <a:prstGeom prst="rect">
+            <a:avLst/>
+          </a:prstGeom>
+          <a:noFill/>
+        </p:spPr>
+        <p:txBody>
+          <a:bodyPr wrap="square" lIns="27432" tIns="12801" rIns="27432" bIns="12801" anchor="ctr">
+            <a:spAutoFit/>
+          </a:bodyPr>
+          <a:lstStyle/>
+          <a:p>
+            <a:pPr algn="l">
+              <a:lnSpc>
+                <a:spcPct val="106000"/>
+              </a:lnSpc>
+              <a:spcBef>
+                <a:spcPts val="0"/>
+              </a:spcBef>
+              <a:spcAft>
+                <a:spcPts val="0"/>
+              </a:spcAft>
+            </a:pPr>
+            <a:r>
+              <a:rPr b="0">
+                <a:solidFill>
+                  <a:srgbClr val="17232C"/>
+                </a:solidFill>
+                <a:latin typeface="Calibri"/>
+              </a:rPr>
+              <a:t>Record bytes → launch args → wrapper</a:t>
+            </a:r>
+          </a:p>
+        </p:txBody>
+      </p:sp>
+      <p:sp>
+        <p:nvSpPr>
+          <p:cNvPr id="14" name="Rounded Rectangle 13"/>
+          <p:cNvSpPr/>
+          <p:nvPr/>
+        </p:nvSpPr>
+        <p:spPr>
+          <a:xfrm>
+            <a:off x="4626864" y="1554480"/>
+            <a:ext cx="3822191" cy="2496312"/>
+          </a:xfrm>
+          <a:prstGeom prst="roundRect">
+            <a:avLst>
+              <a:gd name="adj" fmla="val 7000"/>
+            </a:avLst>
+          </a:prstGeom>
+          <a:solidFill>
+            <a:srgbClr val="FBFDFE"/>
+          </a:solidFill>
+          <a:ln w="10160">
+            <a:solidFill>
+              <a:srgbClr val="C5D5E0"/>
+            </a:solidFill>
+          </a:ln>
+        </p:spPr>
+        <p:style>
+          <a:lnRef idx="1">
+            <a:schemeClr val="accent1"/>
+          </a:lnRef>
+          <a:fillRef idx="3">
+            <a:schemeClr val="accent1"/>
+          </a:fillRef>
+          <a:effectRef idx="2">
+            <a:schemeClr val="accent1"/>
+          </a:effectRef>
+          <a:fontRef idx="minor">
+            <a:schemeClr val="lt1"/>
+          </a:fontRef>
+        </p:style>
+        <p:txBody>
+          <a:bodyPr rtlCol="0" anchor="ctr"/>
+          <a:lstStyle/>
+          <a:p>
+            <a:pPr algn="ctr"/>
+            <a:endParaRPr/>
+          </a:p>
+        </p:txBody>
+      </p:sp>
+      <p:sp>
+        <p:nvSpPr>
+          <p:cNvPr id="15" name="Rounded Rectangle 14"/>
+          <p:cNvSpPr/>
+          <p:nvPr/>
+        </p:nvSpPr>
+        <p:spPr>
+          <a:xfrm>
+            <a:off x="4636007" y="1563624"/>
+            <a:ext cx="3803904" cy="393192"/>
+          </a:xfrm>
+          <a:prstGeom prst="roundRect">
+            <a:avLst>
+              <a:gd name="adj" fmla="val 7000"/>
+            </a:avLst>
+          </a:prstGeom>
+          <a:solidFill>
+            <a:srgbClr val="E2F2F9"/>
+          </a:solidFill>
+          <a:ln w="2540">
+            <a:solidFill>
+              <a:srgbClr val="E2F2F9"/>
+            </a:solidFill>
+          </a:ln>
+        </p:spPr>
+        <p:style>
+          <a:lnRef idx="1">
+            <a:schemeClr val="accent1"/>
+          </a:lnRef>
+          <a:fillRef idx="3">
+            <a:schemeClr val="accent1"/>
+          </a:fillRef>
+          <a:effectRef idx="2">
+            <a:schemeClr val="accent1"/>
+          </a:effectRef>
+          <a:fontRef idx="minor">
+            <a:schemeClr val="lt1"/>
+          </a:fontRef>
+        </p:style>
+        <p:txBody>
+          <a:bodyPr rtlCol="0" anchor="ctr"/>
+          <a:lstStyle/>
+          <a:p>
+            <a:pPr algn="ctr"/>
+            <a:endParaRPr/>
+          </a:p>
+        </p:txBody>
+      </p:sp>
+      <p:sp>
+        <p:nvSpPr>
+          <p:cNvPr id="16" name="TextBox 15"/>
+          <p:cNvSpPr txBox="1"/>
+          <p:nvPr/>
+        </p:nvSpPr>
+        <p:spPr>
+          <a:xfrm>
+            <a:off x="4782312" y="1613212"/>
+            <a:ext cx="3547872" cy="275729"/>
+          </a:xfrm>
+          <a:prstGeom prst="rect">
+            <a:avLst/>
+          </a:prstGeom>
+          <a:noFill/>
+        </p:spPr>
+        <p:txBody>
+          <a:bodyPr wrap="square" lIns="27432" tIns="12801" rIns="27432" bIns="12801" anchor="ctr">
+            <a:spAutoFit/>
+          </a:bodyPr>
+          <a:lstStyle/>
+          <a:p>
+            <a:pPr algn="l">
+              <a:lnSpc>
+                <a:spcPct val="106000"/>
+              </a:lnSpc>
+              <a:spcBef>
+                <a:spcPts val="0"/>
+              </a:spcBef>
+              <a:spcAft>
+                <a:spcPts val="0"/>
+              </a:spcAft>
+            </a:pPr>
+            <a:r>
+              <a:rPr sz="1600" b="1">
+                <a:solidFill>
+                  <a:srgbClr val="063352"/>
+                </a:solidFill>
+                <a:latin typeface="Calibri"/>
+              </a:rPr>
+              <a:t>New API: cudaMemGetInfo</a:t>
+            </a:r>
+          </a:p>
+        </p:txBody>
+      </p:sp>
+      <p:sp>
+        <p:nvSpPr>
+          <p:cNvPr id="17" name="Rounded Rectangle 16"/>
+          <p:cNvSpPr/>
+          <p:nvPr/>
+        </p:nvSpPr>
+        <p:spPr>
+          <a:xfrm>
+            <a:off x="4800600" y="2029968"/>
+            <a:ext cx="3429000" cy="384048"/>
+          </a:xfrm>
+          <a:prstGeom prst="roundRect">
+            <a:avLst>
+              <a:gd name="adj" fmla="val 7000"/>
+            </a:avLst>
+          </a:prstGeom>
+          <a:solidFill>
+            <a:srgbClr val="F5F9FB"/>
+          </a:solidFill>
+          <a:ln w="8890">
+            <a:solidFill>
+              <a:srgbClr val="F5F9FB"/>
+            </a:solidFill>
+          </a:ln>
+        </p:spPr>
+        <p:style>
+          <a:lnRef idx="1">
+            <a:schemeClr val="accent1"/>
+          </a:lnRef>
+          <a:fillRef idx="3">
+            <a:schemeClr val="accent1"/>
+          </a:fillRef>
+          <a:effectRef idx="2">
+            <a:schemeClr val="accent1"/>
+          </a:effectRef>
+          <a:fontRef idx="minor">
+            <a:schemeClr val="lt1"/>
+          </a:fontRef>
+        </p:style>
+        <p:txBody>
+          <a:bodyPr rtlCol="0" anchor="ctr"/>
+          <a:lstStyle/>
+          <a:p>
+            <a:pPr algn="ctr"/>
+            <a:endParaRPr/>
+          </a:p>
+        </p:txBody>
+      </p:sp>
+      <p:sp>
+        <p:nvSpPr>
+          <p:cNvPr id="18" name="TextBox 17"/>
+          <p:cNvSpPr txBox="1"/>
+          <p:nvPr/>
+        </p:nvSpPr>
+        <p:spPr>
+          <a:xfrm>
+            <a:off x="4901184" y="2099709"/>
+            <a:ext cx="3264408" cy="244566"/>
+          </a:xfrm>
+          <a:prstGeom prst="rect">
+            <a:avLst/>
+          </a:prstGeom>
+          <a:noFill/>
+        </p:spPr>
+        <p:txBody>
+          <a:bodyPr wrap="square" lIns="27432" tIns="12801" rIns="27432" bIns="12801" anchor="ctr">
+            <a:spAutoFit/>
+          </a:bodyPr>
+          <a:lstStyle/>
+          <a:p>
+            <a:pPr algn="l">
+              <a:lnSpc>
+                <a:spcPct val="106000"/>
+              </a:lnSpc>
+              <a:spcBef>
+                <a:spcPts val="0"/>
+              </a:spcBef>
+              <a:spcAft>
+                <a:spcPts val="0"/>
+              </a:spcAft>
+            </a:pPr>
+            <a:r>
+              <a:rPr b="1">
+                <a:solidFill>
+                  <a:srgbClr val="156FA5"/>
+                </a:solidFill>
+                <a:latin typeface="Calibri"/>
+              </a:rPr>
+              <a:t>cudaMemGetInfo(&amp;free, &amp;total)</a:t>
+            </a:r>
+          </a:p>
+        </p:txBody>
+      </p:sp>
+      <p:sp>
+        <p:nvSpPr>
+          <p:cNvPr id="19" name="TextBox 18"/>
+          <p:cNvSpPr txBox="1"/>
+          <p:nvPr/>
+        </p:nvSpPr>
+        <p:spPr>
+          <a:xfrm>
+            <a:off x="4864608" y="2625521"/>
+            <a:ext cx="3319272" cy="244502"/>
+          </a:xfrm>
+          <a:prstGeom prst="rect">
+            <a:avLst/>
+          </a:prstGeom>
+          <a:noFill/>
+        </p:spPr>
+        <p:txBody>
+          <a:bodyPr wrap="square" lIns="27432" tIns="12801" rIns="27432" bIns="12801" anchor="ctr">
+            <a:spAutoFit/>
+          </a:bodyPr>
+          <a:lstStyle/>
+          <a:p>
+            <a:pPr algn="l">
+              <a:lnSpc>
+                <a:spcPct val="106000"/>
+              </a:lnSpc>
+              <a:spcBef>
+                <a:spcPts val="0"/>
+              </a:spcBef>
+              <a:spcAft>
+                <a:spcPts val="0"/>
+              </a:spcAft>
+            </a:pPr>
+            <a:r>
+              <a:rPr b="0" dirty="0" err="1">
+                <a:solidFill>
+                  <a:srgbClr val="063352"/>
+                </a:solidFill>
+                <a:latin typeface="Calibri"/>
+              </a:rPr>
+              <a:t>vx_mem_info</a:t>
+            </a:r>
+            <a:r>
+              <a:rPr b="0" dirty="0">
+                <a:solidFill>
+                  <a:srgbClr val="063352"/>
+                </a:solidFill>
+                <a:latin typeface="Calibri"/>
+              </a:rPr>
+              <a:t>(device, &amp;free, &amp;used)</a:t>
+            </a:r>
+          </a:p>
+        </p:txBody>
+      </p:sp>
+      <p:sp>
+        <p:nvSpPr>
+          <p:cNvPr id="20" name="TextBox 19"/>
+          <p:cNvSpPr txBox="1"/>
+          <p:nvPr/>
+        </p:nvSpPr>
+        <p:spPr>
+          <a:xfrm>
+            <a:off x="4882896" y="3032429"/>
+            <a:ext cx="3273552" cy="244502"/>
+          </a:xfrm>
+          <a:prstGeom prst="rect">
+            <a:avLst/>
+          </a:prstGeom>
+          <a:noFill/>
+        </p:spPr>
+        <p:txBody>
+          <a:bodyPr wrap="square" lIns="27432" tIns="12801" rIns="27432" bIns="12801" anchor="ctr">
+            <a:spAutoFit/>
+          </a:bodyPr>
+          <a:lstStyle/>
+          <a:p>
+            <a:pPr algn="l">
+              <a:lnSpc>
+                <a:spcPct val="106000"/>
+              </a:lnSpc>
+              <a:spcBef>
+                <a:spcPts val="0"/>
+              </a:spcBef>
+              <a:spcAft>
+                <a:spcPts val="0"/>
+              </a:spcAft>
+            </a:pPr>
+            <a:r>
+              <a:rPr b="0" dirty="0">
+                <a:solidFill>
+                  <a:srgbClr val="17232C"/>
+                </a:solidFill>
+                <a:latin typeface="Calibri"/>
+              </a:rPr>
+              <a:t>total = free + used</a:t>
+            </a:r>
+          </a:p>
+        </p:txBody>
+      </p:sp>
+      <p:sp>
+        <p:nvSpPr>
+          <p:cNvPr id="21" name="TextBox 20"/>
+          <p:cNvSpPr txBox="1"/>
+          <p:nvPr/>
+        </p:nvSpPr>
+        <p:spPr>
+          <a:xfrm>
+            <a:off x="4864608" y="3393720"/>
+            <a:ext cx="3255264" cy="472897"/>
+          </a:xfrm>
+          <a:prstGeom prst="rect">
+            <a:avLst/>
+          </a:prstGeom>
+          <a:noFill/>
+        </p:spPr>
+        <p:txBody>
+          <a:bodyPr wrap="square" lIns="27432" tIns="12801" rIns="27432" bIns="12801" anchor="ctr">
+            <a:spAutoFit/>
+          </a:bodyPr>
+          <a:lstStyle/>
+          <a:p>
+            <a:pPr algn="l">
+              <a:lnSpc>
+                <a:spcPct val="106000"/>
+              </a:lnSpc>
+              <a:spcBef>
+                <a:spcPts val="0"/>
+              </a:spcBef>
+              <a:spcAft>
+                <a:spcPts val="0"/>
+              </a:spcAft>
+            </a:pPr>
+            <a:r>
+              <a:rPr b="0" dirty="0">
+                <a:solidFill>
+                  <a:srgbClr val="47545D"/>
+                </a:solidFill>
+                <a:latin typeface="Calibri"/>
+              </a:rPr>
+              <a:t>Only host runtime + header; no kernel translator edit</a:t>
+            </a:r>
+          </a:p>
+        </p:txBody>
+      </p:sp>
+      <p:sp>
+        <p:nvSpPr>
+          <p:cNvPr id="22" name="Rounded Rectangle 21"/>
+          <p:cNvSpPr/>
+          <p:nvPr/>
+        </p:nvSpPr>
+        <p:spPr>
+          <a:xfrm>
+            <a:off x="640080" y="4242816"/>
+            <a:ext cx="7845552" cy="320040"/>
+          </a:xfrm>
+          <a:prstGeom prst="roundRect">
+            <a:avLst>
+              <a:gd name="adj" fmla="val 7000"/>
+            </a:avLst>
+          </a:prstGeom>
+          <a:solidFill>
+            <a:srgbClr val="E2F2F9"/>
+          </a:solidFill>
+          <a:ln w="8890">
+            <a:solidFill>
+              <a:srgbClr val="E2F2F9"/>
+            </a:solidFill>
+          </a:ln>
+        </p:spPr>
+        <p:style>
+          <a:lnRef idx="1">
+            <a:schemeClr val="accent1"/>
+          </a:lnRef>
+          <a:fillRef idx="3">
+            <a:schemeClr val="accent1"/>
+          </a:fillRef>
+          <a:effectRef idx="2">
+            <a:schemeClr val="accent1"/>
+          </a:effectRef>
+          <a:fontRef idx="minor">
+            <a:schemeClr val="lt1"/>
+          </a:fontRef>
+        </p:style>
+        <p:txBody>
+          <a:bodyPr rtlCol="0" anchor="ctr"/>
+          <a:lstStyle/>
+          <a:p>
+            <a:pPr algn="ctr"/>
+            <a:endParaRPr/>
+          </a:p>
+        </p:txBody>
+      </p:sp>
+      <p:sp>
+        <p:nvSpPr>
+          <p:cNvPr id="23" name="TextBox 22"/>
+          <p:cNvSpPr txBox="1"/>
+          <p:nvPr/>
+        </p:nvSpPr>
+        <p:spPr>
+          <a:xfrm>
+            <a:off x="749808" y="4261104"/>
+            <a:ext cx="7571231" cy="246888"/>
+          </a:xfrm>
+          <a:prstGeom prst="rect">
+            <a:avLst/>
+          </a:prstGeom>
+          <a:noFill/>
+        </p:spPr>
+        <p:txBody>
+          <a:bodyPr wrap="square" lIns="27432" tIns="12801" rIns="27432" bIns="12801" anchor="ctr">
+            <a:spAutoFit/>
+          </a:bodyPr>
+          <a:lstStyle/>
+          <a:p>
+            <a:pPr algn="l">
+              <a:lnSpc>
+                <a:spcPct val="106000"/>
+              </a:lnSpc>
+              <a:spcBef>
+                <a:spcPts val="0"/>
+              </a:spcBef>
+              <a:spcAft>
+                <a:spcPts val="0"/>
+              </a:spcAft>
+            </a:pPr>
+            <a:r>
+              <a:rPr sz="1030" b="1">
+                <a:solidFill>
+                  <a:srgbClr val="063352"/>
+                </a:solidFill>
+                <a:latin typeface="Consolas"/>
+              </a:rPr>
+              <a:t>./run.sh --baseline  [link fails]       ./run.sh  [memory checks PASS]</a:t>
+            </a:r>
+          </a:p>
+        </p:txBody>
+      </p:sp>
+      <p:sp>
+        <p:nvSpPr>
+          <p:cNvPr id="24" name="TextBox 23"/>
+          <p:cNvSpPr txBox="1"/>
+          <p:nvPr/>
+        </p:nvSpPr>
+        <p:spPr>
+          <a:xfrm>
+            <a:off x="640080" y="4625035"/>
+            <a:ext cx="7680960" cy="201168"/>
+          </a:xfrm>
+          <a:prstGeom prst="rect">
+            <a:avLst/>
+          </a:prstGeom>
+          <a:noFill/>
+        </p:spPr>
+        <p:txBody>
+          <a:bodyPr wrap="square" lIns="27432" tIns="12801" rIns="27432" bIns="12801" anchor="ctr">
+            <a:spAutoFit/>
+          </a:bodyPr>
+          <a:lstStyle/>
+          <a:p>
+            <a:pPr algn="l">
+              <a:lnSpc>
+                <a:spcPct val="106000"/>
+              </a:lnSpc>
+              <a:spcBef>
+                <a:spcPts val="0"/>
+              </a:spcBef>
+              <a:spcAft>
+                <a:spcPts val="0"/>
+              </a:spcAft>
+            </a:pPr>
+            <a:r>
+              <a:rPr sz="919" b="0">
+                <a:solidFill>
+                  <a:srgbClr val="47545D"/>
+                </a:solidFill>
+                <a:latin typeface="Calibri"/>
+                <a:hlinkClick r:id="rId3"/>
+              </a:rPr>
+              <a:t>Source: Volt v1.1  ·  docs/7.2.tutorial_host_extension.md</a:t>
+            </a:r>
+          </a:p>
+        </p:txBody>
+      </p:sp>
+      <p:sp>
+        <p:nvSpPr>
+          <p:cNvPr id="26" name="제목 25">
+            <a:extLst>
+              <a:ext uri="{FF2B5EF4-FFF2-40B4-BE49-F238E27FC236}">
+                <a16:creationId xmlns:a16="http://schemas.microsoft.com/office/drawing/2014/main" id="{2A1A3673-7203-6720-DECA-E9D7B7CBB29C}"/>
               </a:ext>
             </a:extLst>
           </p:cNvPr>
@@ -12931,178 +14777,23 @@
         </p:nvSpPr>
         <p:spPr/>
         <p:txBody>
-          <a:bodyPr>
-            <a:normAutofit fontScale="90000"/>
-          </a:bodyPr>
-          <a:lstStyle/>
-          <a:p>
-            <a:r>
-              <a:rPr kumimoji="1" lang="en-US" altLang="ko-Kore-KR" dirty="0" err="1"/>
-              <a:t>CuLifter</a:t>
-            </a:r>
-            <a:r>
-              <a:rPr kumimoji="1" lang="en-US" altLang="ko-Kore-KR" dirty="0"/>
-              <a:t> (Micro26, Day 2 Session 6A)</a:t>
-            </a:r>
-            <a:endParaRPr kumimoji="1" lang="ko-Kore-KR" altLang="en-US" dirty="0"/>
-          </a:p>
-        </p:txBody>
-      </p:sp>
-      <p:sp>
-        <p:nvSpPr>
-          <p:cNvPr id="3" name="내용 개체 틀 2">
-            <a:extLst>
-              <a:ext uri="{FF2B5EF4-FFF2-40B4-BE49-F238E27FC236}">
-                <a16:creationId xmlns:a16="http://schemas.microsoft.com/office/drawing/2014/main" id="{9866A3F3-528D-6DF2-33ED-2CB746BAF460}"/>
-              </a:ext>
-            </a:extLst>
-          </p:cNvPr>
-          <p:cNvSpPr>
-            <a:spLocks noGrp="1"/>
-          </p:cNvSpPr>
-          <p:nvPr>
-            <p:ph idx="1"/>
-          </p:nvPr>
-        </p:nvSpPr>
-        <p:spPr>
-          <a:xfrm>
-            <a:off x="628650" y="1200004"/>
-            <a:ext cx="8373836" cy="3432718"/>
-          </a:xfrm>
-        </p:spPr>
-        <p:txBody>
-          <a:bodyPr>
-            <a:normAutofit/>
-          </a:bodyPr>
-          <a:lstStyle/>
-          <a:p>
-            <a:r>
-              <a:rPr lang="en" altLang="ko-Kore-KR" sz="1600" b="1" dirty="0"/>
-              <a:t>GPU Binary Type Recovery</a:t>
-            </a:r>
-          </a:p>
-          <a:p>
-            <a:pPr lvl="1"/>
-            <a:r>
-              <a:rPr lang="en" altLang="ko-Kore-KR" sz="1400" dirty="0"/>
-              <a:t>Identify type recovery as the central challenge of GPU binary lifting</a:t>
-            </a:r>
-          </a:p>
-          <a:p>
-            <a:r>
-              <a:rPr lang="en" altLang="ko-Kore-KR" sz="1600" b="1" dirty="0"/>
-              <a:t>SIMT-Aware Structure </a:t>
-            </a:r>
-            <a:r>
-              <a:rPr lang="en" altLang="ko-Kore-KR" sz="1600" b="1" dirty="0" err="1"/>
-              <a:t>Reconstructio</a:t>
-            </a:r>
-            <a:r>
-              <a:rPr lang="en-US" altLang="ko-Kore-KR" sz="1600" b="1" dirty="0"/>
-              <a:t>n</a:t>
-            </a:r>
-            <a:endParaRPr lang="en" altLang="ko-Kore-KR" sz="1600" b="1" dirty="0"/>
-          </a:p>
-          <a:p>
-            <a:pPr lvl="1"/>
-            <a:r>
-              <a:rPr lang="en" altLang="ko-Kore-KR" sz="1400" dirty="0"/>
-              <a:t>Recover control flow and SSA from SASS, handling SIMT-specific constructs and multi-instruction patterns</a:t>
-            </a:r>
-          </a:p>
-          <a:p>
-            <a:r>
-              <a:rPr lang="en" altLang="ko-Kore-KR" sz="1600" b="1" dirty="0"/>
-              <a:t>End-to-End SASS-to-LLVM IR Lifting</a:t>
-            </a:r>
-          </a:p>
-          <a:p>
-            <a:pPr lvl="1"/>
-            <a:r>
-              <a:rPr lang="en" altLang="ko-Kore-KR" sz="1400" dirty="0"/>
-              <a:t>Support multiple GPU generations (SM75–SM120), enabling compiler analysis and cross-platform</a:t>
-            </a:r>
-          </a:p>
-          <a:p>
-            <a:r>
-              <a:rPr lang="en" altLang="ko-Kore-KR" sz="1600" b="1" dirty="0"/>
-              <a:t>Comprehensive Evaluation</a:t>
-            </a:r>
-          </a:p>
-          <a:p>
-            <a:pPr lvl="1"/>
-            <a:r>
-              <a:rPr lang="en" altLang="ko-Kore-KR" sz="1400" dirty="0"/>
-              <a:t>11,977 kernels across 8 benchmark suites, achieving 96.3% exe correctness among 3,584 kernels</a:t>
-            </a:r>
-          </a:p>
-        </p:txBody>
-      </p:sp>
-      <p:sp>
-        <p:nvSpPr>
-          <p:cNvPr id="4" name="슬라이드 번호 개체 틀 3">
-            <a:extLst>
-              <a:ext uri="{FF2B5EF4-FFF2-40B4-BE49-F238E27FC236}">
-                <a16:creationId xmlns:a16="http://schemas.microsoft.com/office/drawing/2014/main" id="{C7CB1920-14B6-5E34-72A0-838A04FB3C45}"/>
-              </a:ext>
-            </a:extLst>
-          </p:cNvPr>
-          <p:cNvSpPr>
-            <a:spLocks noGrp="1"/>
-          </p:cNvSpPr>
-          <p:nvPr>
-            <p:ph type="sldNum" sz="quarter" idx="4"/>
-          </p:nvPr>
-        </p:nvSpPr>
-        <p:spPr/>
-        <p:txBody>
           <a:bodyPr/>
           <a:lstStyle/>
           <a:p>
-            <a:fld id="{C5E74F64-7780-9C4F-983D-3F814FF801CD}" type="slidenum">
-              <a:rPr lang="en-US" smtClean="0"/>
-              <a:t>18</a:t>
-            </a:fld>
-            <a:endParaRPr lang="en-US" dirty="0"/>
-          </a:p>
-        </p:txBody>
-      </p:sp>
-      <p:pic>
-        <p:nvPicPr>
-          <p:cNvPr id="43" name="그림 42">
-            <a:extLst>
-              <a:ext uri="{FF2B5EF4-FFF2-40B4-BE49-F238E27FC236}">
-                <a16:creationId xmlns:a16="http://schemas.microsoft.com/office/drawing/2014/main" id="{C4907553-01C9-CE60-6065-0882CEDBC247}"/>
-              </a:ext>
-            </a:extLst>
-          </p:cNvPr>
-          <p:cNvPicPr>
-            <a:picLocks noChangeAspect="1"/>
-          </p:cNvPicPr>
-          <p:nvPr/>
-        </p:nvPicPr>
-        <p:blipFill>
-          <a:blip r:embed="rId3"/>
-          <a:stretch>
-            <a:fillRect/>
-          </a:stretch>
-        </p:blipFill>
-        <p:spPr>
-          <a:xfrm>
-            <a:off x="913039" y="3564174"/>
-            <a:ext cx="7317921" cy="1409662"/>
-          </a:xfrm>
-          <a:prstGeom prst="rect">
-            <a:avLst/>
-          </a:prstGeom>
-        </p:spPr>
-      </p:pic>
+            <a:r>
+              <a:rPr lang="en" altLang="ko-Kore-KR" sz="3600" b="1" dirty="0">
+                <a:solidFill>
+                  <a:srgbClr val="000000"/>
+                </a:solidFill>
+                <a:latin typeface="Calibri"/>
+              </a:rPr>
+              <a:t>Tutorial 2: Extending Host Functions</a:t>
+            </a:r>
+            <a:endParaRPr lang="ko-Kore-KR" altLang="en-US" dirty="0"/>
+          </a:p>
+        </p:txBody>
+      </p:sp>
     </p:spTree>
-    <p:extLst>
-      <p:ext uri="{BB962C8B-B14F-4D97-AF65-F5344CB8AC3E}">
-        <p14:creationId xmlns:p14="http://schemas.microsoft.com/office/powerpoint/2010/main" val="4279990483"/>
-      </p:ext>
-    </p:extLst>
   </p:cSld>
   <p:clrMapOvr>
     <a:masterClrMapping/>
@@ -13129,10 +14820,1320 @@
       </p:grpSpPr>
       <p:sp>
         <p:nvSpPr>
-          <p:cNvPr id="2" name="제목 1">
-            <a:extLst>
-              <a:ext uri="{FF2B5EF4-FFF2-40B4-BE49-F238E27FC236}">
-                <a16:creationId xmlns:a16="http://schemas.microsoft.com/office/drawing/2014/main" id="{17E9D4B6-0515-9420-2759-6A4AE6D941C0}"/>
+          <p:cNvPr id="3" name="TextBox 2"/>
+          <p:cNvSpPr txBox="1"/>
+          <p:nvPr/>
+        </p:nvSpPr>
+        <p:spPr>
+          <a:xfrm>
+            <a:off x="630936" y="1014248"/>
+            <a:ext cx="7955279" cy="275792"/>
+          </a:xfrm>
+          <a:prstGeom prst="rect">
+            <a:avLst/>
+          </a:prstGeom>
+          <a:noFill/>
+        </p:spPr>
+        <p:txBody>
+          <a:bodyPr wrap="square" lIns="27432" tIns="12801" rIns="27432" bIns="12801" anchor="ctr">
+            <a:spAutoFit/>
+          </a:bodyPr>
+          <a:lstStyle/>
+          <a:p>
+            <a:pPr algn="l">
+              <a:lnSpc>
+                <a:spcPct val="106000"/>
+              </a:lnSpc>
+              <a:spcBef>
+                <a:spcPts val="0"/>
+              </a:spcBef>
+              <a:spcAft>
+                <a:spcPts val="0"/>
+              </a:spcAft>
+            </a:pPr>
+            <a:r>
+              <a:rPr sz="1600" b="0" dirty="0">
+                <a:solidFill>
+                  <a:schemeClr val="tx1"/>
+                </a:solidFill>
+                <a:latin typeface="Calibri"/>
+              </a:rPr>
+              <a:t>The same CUDA __shared__ variable can use different Vortex memory resources</a:t>
+            </a:r>
+          </a:p>
+        </p:txBody>
+      </p:sp>
+      <p:cxnSp>
+        <p:nvCxnSpPr>
+          <p:cNvPr id="4" name="Connector 3"/>
+          <p:cNvCxnSpPr/>
+          <p:nvPr/>
+        </p:nvCxnSpPr>
+        <p:spPr>
+          <a:xfrm>
+            <a:off x="630936" y="1399032"/>
+            <a:ext cx="7872984" cy="0"/>
+          </a:xfrm>
+          <a:prstGeom prst="line">
+            <a:avLst/>
+          </a:prstGeom>
+          <a:ln w="10160">
+            <a:solidFill>
+              <a:srgbClr val="E2F2F9"/>
+            </a:solidFill>
+          </a:ln>
+        </p:spPr>
+        <p:style>
+          <a:lnRef idx="2">
+            <a:schemeClr val="accent1"/>
+          </a:lnRef>
+          <a:fillRef idx="0">
+            <a:schemeClr val="accent1"/>
+          </a:fillRef>
+          <a:effectRef idx="1">
+            <a:schemeClr val="accent1"/>
+          </a:effectRef>
+          <a:fontRef idx="minor">
+            <a:schemeClr val="tx1"/>
+          </a:fontRef>
+        </p:style>
+      </p:cxnSp>
+      <p:sp>
+        <p:nvSpPr>
+          <p:cNvPr id="5" name="TextBox 4"/>
+          <p:cNvSpPr txBox="1"/>
+          <p:nvPr/>
+        </p:nvSpPr>
+        <p:spPr>
+          <a:xfrm>
+            <a:off x="8366760" y="4690872"/>
+            <a:ext cx="338328" cy="256032"/>
+          </a:xfrm>
+          <a:prstGeom prst="rect">
+            <a:avLst/>
+          </a:prstGeom>
+          <a:noFill/>
+        </p:spPr>
+        <p:txBody>
+          <a:bodyPr wrap="square" lIns="27432" tIns="12801" rIns="27432" bIns="12801" anchor="ctr">
+            <a:spAutoFit/>
+          </a:bodyPr>
+          <a:lstStyle/>
+          <a:p>
+            <a:pPr algn="r">
+              <a:lnSpc>
+                <a:spcPct val="106000"/>
+              </a:lnSpc>
+              <a:spcBef>
+                <a:spcPts val="0"/>
+              </a:spcBef>
+              <a:spcAft>
+                <a:spcPts val="0"/>
+              </a:spcAft>
+            </a:pPr>
+            <a:r>
+              <a:rPr sz="900" b="0">
+                <a:solidFill>
+                  <a:srgbClr val="47545D"/>
+                </a:solidFill>
+                <a:latin typeface="Calibri"/>
+              </a:rPr>
+              <a:t>19</a:t>
+            </a:r>
+          </a:p>
+        </p:txBody>
+      </p:sp>
+      <p:sp>
+        <p:nvSpPr>
+          <p:cNvPr id="6" name="Rounded Rectangle 5"/>
+          <p:cNvSpPr/>
+          <p:nvPr/>
+        </p:nvSpPr>
+        <p:spPr>
+          <a:xfrm>
+            <a:off x="630936" y="1554480"/>
+            <a:ext cx="4818888" cy="2496312"/>
+          </a:xfrm>
+          <a:prstGeom prst="roundRect">
+            <a:avLst>
+              <a:gd name="adj" fmla="val 7000"/>
+            </a:avLst>
+          </a:prstGeom>
+          <a:solidFill>
+            <a:srgbClr val="FBFDFE"/>
+          </a:solidFill>
+          <a:ln w="10160">
+            <a:solidFill>
+              <a:srgbClr val="C5D5E0"/>
+            </a:solidFill>
+          </a:ln>
+        </p:spPr>
+        <p:style>
+          <a:lnRef idx="1">
+            <a:schemeClr val="accent1"/>
+          </a:lnRef>
+          <a:fillRef idx="3">
+            <a:schemeClr val="accent1"/>
+          </a:fillRef>
+          <a:effectRef idx="2">
+            <a:schemeClr val="accent1"/>
+          </a:effectRef>
+          <a:fontRef idx="minor">
+            <a:schemeClr val="lt1"/>
+          </a:fontRef>
+        </p:style>
+        <p:txBody>
+          <a:bodyPr rtlCol="0" anchor="ctr"/>
+          <a:lstStyle/>
+          <a:p>
+            <a:pPr algn="ctr"/>
+            <a:endParaRPr/>
+          </a:p>
+        </p:txBody>
+      </p:sp>
+      <p:sp>
+        <p:nvSpPr>
+          <p:cNvPr id="7" name="Rounded Rectangle 6"/>
+          <p:cNvSpPr/>
+          <p:nvPr/>
+        </p:nvSpPr>
+        <p:spPr>
+          <a:xfrm>
+            <a:off x="640080" y="1563624"/>
+            <a:ext cx="4800600" cy="393192"/>
+          </a:xfrm>
+          <a:prstGeom prst="roundRect">
+            <a:avLst>
+              <a:gd name="adj" fmla="val 7000"/>
+            </a:avLst>
+          </a:prstGeom>
+          <a:solidFill>
+            <a:srgbClr val="E2F2F9"/>
+          </a:solidFill>
+          <a:ln w="2540">
+            <a:solidFill>
+              <a:srgbClr val="E2F2F9"/>
+            </a:solidFill>
+          </a:ln>
+        </p:spPr>
+        <p:style>
+          <a:lnRef idx="1">
+            <a:schemeClr val="accent1"/>
+          </a:lnRef>
+          <a:fillRef idx="3">
+            <a:schemeClr val="accent1"/>
+          </a:fillRef>
+          <a:effectRef idx="2">
+            <a:schemeClr val="accent1"/>
+          </a:effectRef>
+          <a:fontRef idx="minor">
+            <a:schemeClr val="lt1"/>
+          </a:fontRef>
+        </p:style>
+        <p:txBody>
+          <a:bodyPr rtlCol="0" anchor="ctr"/>
+          <a:lstStyle/>
+          <a:p>
+            <a:pPr algn="ctr"/>
+            <a:endParaRPr/>
+          </a:p>
+        </p:txBody>
+      </p:sp>
+      <p:sp>
+        <p:nvSpPr>
+          <p:cNvPr id="8" name="TextBox 7"/>
+          <p:cNvSpPr txBox="1"/>
+          <p:nvPr/>
+        </p:nvSpPr>
+        <p:spPr>
+          <a:xfrm>
+            <a:off x="786384" y="1613212"/>
+            <a:ext cx="4544568" cy="275729"/>
+          </a:xfrm>
+          <a:prstGeom prst="rect">
+            <a:avLst/>
+          </a:prstGeom>
+          <a:noFill/>
+        </p:spPr>
+        <p:txBody>
+          <a:bodyPr wrap="square" lIns="27432" tIns="12801" rIns="27432" bIns="12801" anchor="ctr">
+            <a:spAutoFit/>
+          </a:bodyPr>
+          <a:lstStyle/>
+          <a:p>
+            <a:pPr algn="l">
+              <a:lnSpc>
+                <a:spcPct val="106000"/>
+              </a:lnSpc>
+              <a:spcBef>
+                <a:spcPts val="0"/>
+              </a:spcBef>
+              <a:spcAft>
+                <a:spcPts val="0"/>
+              </a:spcAft>
+            </a:pPr>
+            <a:r>
+              <a:rPr sz="1600" b="1" dirty="0">
+                <a:solidFill>
+                  <a:srgbClr val="063352"/>
+                </a:solidFill>
+                <a:latin typeface="Calibri"/>
+              </a:rPr>
+              <a:t>Select the lowering policy  (SCHEDULE=2)</a:t>
+            </a:r>
+          </a:p>
+        </p:txBody>
+      </p:sp>
+      <p:sp>
+        <p:nvSpPr>
+          <p:cNvPr id="9" name="Rounded Rectangle 8"/>
+          <p:cNvSpPr/>
+          <p:nvPr/>
+        </p:nvSpPr>
+        <p:spPr>
+          <a:xfrm>
+            <a:off x="832104" y="2136648"/>
+            <a:ext cx="1283818" cy="356616"/>
+          </a:xfrm>
+          <a:prstGeom prst="roundRect">
+            <a:avLst>
+              <a:gd name="adj" fmla="val 7000"/>
+            </a:avLst>
+          </a:prstGeom>
+          <a:solidFill>
+            <a:srgbClr val="E2F2F9"/>
+          </a:solidFill>
+          <a:ln w="8890">
+            <a:solidFill>
+              <a:srgbClr val="E2F2F9"/>
+            </a:solidFill>
+          </a:ln>
+        </p:spPr>
+        <p:style>
+          <a:lnRef idx="1">
+            <a:schemeClr val="accent1"/>
+          </a:lnRef>
+          <a:fillRef idx="3">
+            <a:schemeClr val="accent1"/>
+          </a:fillRef>
+          <a:effectRef idx="2">
+            <a:schemeClr val="accent1"/>
+          </a:effectRef>
+          <a:fontRef idx="minor">
+            <a:schemeClr val="lt1"/>
+          </a:fontRef>
+        </p:style>
+        <p:txBody>
+          <a:bodyPr rtlCol="0" anchor="ctr"/>
+          <a:lstStyle/>
+          <a:p>
+            <a:pPr algn="ctr"/>
+            <a:endParaRPr/>
+          </a:p>
+        </p:txBody>
+      </p:sp>
+      <p:sp>
+        <p:nvSpPr>
+          <p:cNvPr id="10" name="TextBox 9"/>
+          <p:cNvSpPr txBox="1"/>
+          <p:nvPr/>
+        </p:nvSpPr>
+        <p:spPr>
+          <a:xfrm>
+            <a:off x="859536" y="2183529"/>
+            <a:ext cx="1234440" cy="244566"/>
+          </a:xfrm>
+          <a:prstGeom prst="rect">
+            <a:avLst/>
+          </a:prstGeom>
+          <a:noFill/>
+        </p:spPr>
+        <p:txBody>
+          <a:bodyPr wrap="square" lIns="27432" tIns="12801" rIns="27432" bIns="12801" anchor="ctr">
+            <a:spAutoFit/>
+          </a:bodyPr>
+          <a:lstStyle/>
+          <a:p>
+            <a:pPr algn="ctr">
+              <a:lnSpc>
+                <a:spcPct val="106000"/>
+              </a:lnSpc>
+              <a:spcBef>
+                <a:spcPts val="0"/>
+              </a:spcBef>
+              <a:spcAft>
+                <a:spcPts val="0"/>
+              </a:spcAft>
+            </a:pPr>
+            <a:r>
+              <a:rPr b="1" dirty="0">
+                <a:solidFill>
+                  <a:srgbClr val="063352"/>
+                </a:solidFill>
+                <a:latin typeface="Calibri"/>
+              </a:rPr>
+              <a:t>LOCALMEM=0</a:t>
+            </a:r>
+          </a:p>
+        </p:txBody>
+      </p:sp>
+      <p:sp>
+        <p:nvSpPr>
+          <p:cNvPr id="11" name="TextBox 10"/>
+          <p:cNvSpPr txBox="1"/>
+          <p:nvPr/>
+        </p:nvSpPr>
+        <p:spPr>
+          <a:xfrm>
+            <a:off x="2249424" y="2188101"/>
+            <a:ext cx="1508760" cy="244566"/>
+          </a:xfrm>
+          <a:prstGeom prst="rect">
+            <a:avLst/>
+          </a:prstGeom>
+          <a:noFill/>
+        </p:spPr>
+        <p:txBody>
+          <a:bodyPr wrap="square" lIns="27432" tIns="12801" rIns="27432" bIns="12801" anchor="ctr">
+            <a:spAutoFit/>
+          </a:bodyPr>
+          <a:lstStyle/>
+          <a:p>
+            <a:pPr algn="l">
+              <a:lnSpc>
+                <a:spcPct val="106000"/>
+              </a:lnSpc>
+              <a:spcBef>
+                <a:spcPts val="0"/>
+              </a:spcBef>
+              <a:spcAft>
+                <a:spcPts val="0"/>
+              </a:spcAft>
+            </a:pPr>
+            <a:r>
+              <a:rPr b="1" dirty="0">
+                <a:solidFill>
+                  <a:srgbClr val="17232C"/>
+                </a:solidFill>
+                <a:latin typeface="Calibri"/>
+              </a:rPr>
+              <a:t>Global memory</a:t>
+            </a:r>
+          </a:p>
+        </p:txBody>
+      </p:sp>
+      <p:sp>
+        <p:nvSpPr>
+          <p:cNvPr id="12" name="TextBox 11"/>
+          <p:cNvSpPr txBox="1"/>
+          <p:nvPr/>
+        </p:nvSpPr>
+        <p:spPr>
+          <a:xfrm>
+            <a:off x="3822192" y="2188133"/>
+            <a:ext cx="1819656" cy="244502"/>
+          </a:xfrm>
+          <a:prstGeom prst="rect">
+            <a:avLst/>
+          </a:prstGeom>
+          <a:noFill/>
+        </p:spPr>
+        <p:txBody>
+          <a:bodyPr wrap="square" lIns="27432" tIns="12801" rIns="27432" bIns="12801" anchor="ctr">
+            <a:spAutoFit/>
+          </a:bodyPr>
+          <a:lstStyle/>
+          <a:p>
+            <a:pPr algn="l">
+              <a:lnSpc>
+                <a:spcPct val="106000"/>
+              </a:lnSpc>
+              <a:spcBef>
+                <a:spcPts val="0"/>
+              </a:spcBef>
+              <a:spcAft>
+                <a:spcPts val="0"/>
+              </a:spcAft>
+            </a:pPr>
+            <a:r>
+              <a:rPr b="0">
+                <a:solidFill>
+                  <a:srgbClr val="47545D"/>
+                </a:solidFill>
+                <a:latin typeface="Calibri"/>
+              </a:rPr>
+              <a:t>cached by L1 / L2</a:t>
+            </a:r>
+          </a:p>
+        </p:txBody>
+      </p:sp>
+      <p:sp>
+        <p:nvSpPr>
+          <p:cNvPr id="13" name="Rounded Rectangle 12"/>
+          <p:cNvSpPr/>
+          <p:nvPr/>
+        </p:nvSpPr>
+        <p:spPr>
+          <a:xfrm>
+            <a:off x="832104" y="2731008"/>
+            <a:ext cx="1283818" cy="356616"/>
+          </a:xfrm>
+          <a:prstGeom prst="roundRect">
+            <a:avLst>
+              <a:gd name="adj" fmla="val 7000"/>
+            </a:avLst>
+          </a:prstGeom>
+          <a:solidFill>
+            <a:srgbClr val="E5F7EB"/>
+          </a:solidFill>
+          <a:ln w="8890">
+            <a:solidFill>
+              <a:srgbClr val="E5F7EB"/>
+            </a:solidFill>
+          </a:ln>
+        </p:spPr>
+        <p:style>
+          <a:lnRef idx="1">
+            <a:schemeClr val="accent1"/>
+          </a:lnRef>
+          <a:fillRef idx="3">
+            <a:schemeClr val="accent1"/>
+          </a:fillRef>
+          <a:effectRef idx="2">
+            <a:schemeClr val="accent1"/>
+          </a:effectRef>
+          <a:fontRef idx="minor">
+            <a:schemeClr val="lt1"/>
+          </a:fontRef>
+        </p:style>
+        <p:txBody>
+          <a:bodyPr rtlCol="0" anchor="ctr"/>
+          <a:lstStyle/>
+          <a:p>
+            <a:pPr algn="ctr"/>
+            <a:endParaRPr/>
+          </a:p>
+        </p:txBody>
+      </p:sp>
+      <p:sp>
+        <p:nvSpPr>
+          <p:cNvPr id="14" name="TextBox 13"/>
+          <p:cNvSpPr txBox="1"/>
+          <p:nvPr/>
+        </p:nvSpPr>
+        <p:spPr>
+          <a:xfrm>
+            <a:off x="859536" y="2777889"/>
+            <a:ext cx="1234440" cy="244566"/>
+          </a:xfrm>
+          <a:prstGeom prst="rect">
+            <a:avLst/>
+          </a:prstGeom>
+          <a:noFill/>
+        </p:spPr>
+        <p:txBody>
+          <a:bodyPr wrap="square" lIns="27432" tIns="12801" rIns="27432" bIns="12801" anchor="ctr">
+            <a:spAutoFit/>
+          </a:bodyPr>
+          <a:lstStyle/>
+          <a:p>
+            <a:pPr algn="ctr">
+              <a:lnSpc>
+                <a:spcPct val="106000"/>
+              </a:lnSpc>
+              <a:spcBef>
+                <a:spcPts val="0"/>
+              </a:spcBef>
+              <a:spcAft>
+                <a:spcPts val="0"/>
+              </a:spcAft>
+            </a:pPr>
+            <a:r>
+              <a:rPr b="1">
+                <a:solidFill>
+                  <a:srgbClr val="063352"/>
+                </a:solidFill>
+                <a:latin typeface="Calibri"/>
+              </a:rPr>
+              <a:t>LOCALMEM=1</a:t>
+            </a:r>
+          </a:p>
+        </p:txBody>
+      </p:sp>
+      <p:sp>
+        <p:nvSpPr>
+          <p:cNvPr id="15" name="TextBox 14"/>
+          <p:cNvSpPr txBox="1"/>
+          <p:nvPr/>
+        </p:nvSpPr>
+        <p:spPr>
+          <a:xfrm>
+            <a:off x="2249424" y="2782461"/>
+            <a:ext cx="1508760" cy="244566"/>
+          </a:xfrm>
+          <a:prstGeom prst="rect">
+            <a:avLst/>
+          </a:prstGeom>
+          <a:noFill/>
+        </p:spPr>
+        <p:txBody>
+          <a:bodyPr wrap="square" lIns="27432" tIns="12801" rIns="27432" bIns="12801" anchor="ctr">
+            <a:spAutoFit/>
+          </a:bodyPr>
+          <a:lstStyle/>
+          <a:p>
+            <a:pPr algn="l">
+              <a:lnSpc>
+                <a:spcPct val="106000"/>
+              </a:lnSpc>
+              <a:spcBef>
+                <a:spcPts val="0"/>
+              </a:spcBef>
+              <a:spcAft>
+                <a:spcPts val="0"/>
+              </a:spcAft>
+            </a:pPr>
+            <a:r>
+              <a:rPr b="1">
+                <a:solidFill>
+                  <a:srgbClr val="17232C"/>
+                </a:solidFill>
+                <a:latin typeface="Calibri"/>
+              </a:rPr>
+              <a:t>Local memory</a:t>
+            </a:r>
+          </a:p>
+        </p:txBody>
+      </p:sp>
+      <p:sp>
+        <p:nvSpPr>
+          <p:cNvPr id="16" name="TextBox 15"/>
+          <p:cNvSpPr txBox="1"/>
+          <p:nvPr/>
+        </p:nvSpPr>
+        <p:spPr>
+          <a:xfrm>
+            <a:off x="3822192" y="2782493"/>
+            <a:ext cx="1819656" cy="244502"/>
+          </a:xfrm>
+          <a:prstGeom prst="rect">
+            <a:avLst/>
+          </a:prstGeom>
+          <a:noFill/>
+        </p:spPr>
+        <p:txBody>
+          <a:bodyPr wrap="square" lIns="27432" tIns="12801" rIns="27432" bIns="12801" anchor="ctr">
+            <a:spAutoFit/>
+          </a:bodyPr>
+          <a:lstStyle/>
+          <a:p>
+            <a:pPr algn="l">
+              <a:lnSpc>
+                <a:spcPct val="106000"/>
+              </a:lnSpc>
+              <a:spcBef>
+                <a:spcPts val="0"/>
+              </a:spcBef>
+              <a:spcAft>
+                <a:spcPts val="0"/>
+              </a:spcAft>
+            </a:pPr>
+            <a:r>
+              <a:rPr b="0">
+                <a:solidFill>
+                  <a:srgbClr val="47545D"/>
+                </a:solidFill>
+                <a:latin typeface="Calibri"/>
+              </a:rPr>
+              <a:t>per-core LMEM</a:t>
+            </a:r>
+          </a:p>
+        </p:txBody>
+      </p:sp>
+      <p:sp>
+        <p:nvSpPr>
+          <p:cNvPr id="17" name="Rounded Rectangle 16"/>
+          <p:cNvSpPr/>
+          <p:nvPr/>
+        </p:nvSpPr>
+        <p:spPr>
+          <a:xfrm>
+            <a:off x="832104" y="3325368"/>
+            <a:ext cx="1283818" cy="356616"/>
+          </a:xfrm>
+          <a:prstGeom prst="roundRect">
+            <a:avLst>
+              <a:gd name="adj" fmla="val 7000"/>
+            </a:avLst>
+          </a:prstGeom>
+          <a:solidFill>
+            <a:srgbClr val="FDF4E8"/>
+          </a:solidFill>
+          <a:ln w="8890">
+            <a:solidFill>
+              <a:srgbClr val="FDF4E8"/>
+            </a:solidFill>
+          </a:ln>
+        </p:spPr>
+        <p:style>
+          <a:lnRef idx="1">
+            <a:schemeClr val="accent1"/>
+          </a:lnRef>
+          <a:fillRef idx="3">
+            <a:schemeClr val="accent1"/>
+          </a:fillRef>
+          <a:effectRef idx="2">
+            <a:schemeClr val="accent1"/>
+          </a:effectRef>
+          <a:fontRef idx="minor">
+            <a:schemeClr val="lt1"/>
+          </a:fontRef>
+        </p:style>
+        <p:txBody>
+          <a:bodyPr rtlCol="0" anchor="ctr"/>
+          <a:lstStyle/>
+          <a:p>
+            <a:pPr algn="ctr"/>
+            <a:endParaRPr/>
+          </a:p>
+        </p:txBody>
+      </p:sp>
+      <p:sp>
+        <p:nvSpPr>
+          <p:cNvPr id="18" name="TextBox 17"/>
+          <p:cNvSpPr txBox="1"/>
+          <p:nvPr/>
+        </p:nvSpPr>
+        <p:spPr>
+          <a:xfrm>
+            <a:off x="859536" y="3372249"/>
+            <a:ext cx="1234440" cy="244566"/>
+          </a:xfrm>
+          <a:prstGeom prst="rect">
+            <a:avLst/>
+          </a:prstGeom>
+          <a:noFill/>
+        </p:spPr>
+        <p:txBody>
+          <a:bodyPr wrap="square" lIns="27432" tIns="12801" rIns="27432" bIns="12801" anchor="ctr">
+            <a:spAutoFit/>
+          </a:bodyPr>
+          <a:lstStyle/>
+          <a:p>
+            <a:pPr algn="ctr">
+              <a:lnSpc>
+                <a:spcPct val="106000"/>
+              </a:lnSpc>
+              <a:spcBef>
+                <a:spcPts val="0"/>
+              </a:spcBef>
+              <a:spcAft>
+                <a:spcPts val="0"/>
+              </a:spcAft>
+            </a:pPr>
+            <a:r>
+              <a:rPr b="1">
+                <a:solidFill>
+                  <a:srgbClr val="063352"/>
+                </a:solidFill>
+                <a:latin typeface="Calibri"/>
+              </a:rPr>
+              <a:t>LOCALMEM=2</a:t>
+            </a:r>
+          </a:p>
+        </p:txBody>
+      </p:sp>
+      <p:sp>
+        <p:nvSpPr>
+          <p:cNvPr id="19" name="TextBox 18"/>
+          <p:cNvSpPr txBox="1"/>
+          <p:nvPr/>
+        </p:nvSpPr>
+        <p:spPr>
+          <a:xfrm>
+            <a:off x="2249424" y="3376821"/>
+            <a:ext cx="1508760" cy="244566"/>
+          </a:xfrm>
+          <a:prstGeom prst="rect">
+            <a:avLst/>
+          </a:prstGeom>
+          <a:noFill/>
+        </p:spPr>
+        <p:txBody>
+          <a:bodyPr wrap="square" lIns="27432" tIns="12801" rIns="27432" bIns="12801" anchor="ctr">
+            <a:spAutoFit/>
+          </a:bodyPr>
+          <a:lstStyle/>
+          <a:p>
+            <a:pPr algn="l">
+              <a:lnSpc>
+                <a:spcPct val="106000"/>
+              </a:lnSpc>
+              <a:spcBef>
+                <a:spcPts val="0"/>
+              </a:spcBef>
+              <a:spcAft>
+                <a:spcPts val="0"/>
+              </a:spcAft>
+            </a:pPr>
+            <a:r>
+              <a:rPr b="1">
+                <a:solidFill>
+                  <a:srgbClr val="17232C"/>
+                </a:solidFill>
+                <a:latin typeface="Calibri"/>
+              </a:rPr>
+              <a:t>Size-aware</a:t>
+            </a:r>
+          </a:p>
+        </p:txBody>
+      </p:sp>
+      <p:sp>
+        <p:nvSpPr>
+          <p:cNvPr id="20" name="TextBox 19"/>
+          <p:cNvSpPr txBox="1"/>
+          <p:nvPr/>
+        </p:nvSpPr>
+        <p:spPr>
+          <a:xfrm>
+            <a:off x="3822192" y="3376853"/>
+            <a:ext cx="1819656" cy="244502"/>
+          </a:xfrm>
+          <a:prstGeom prst="rect">
+            <a:avLst/>
+          </a:prstGeom>
+          <a:noFill/>
+        </p:spPr>
+        <p:txBody>
+          <a:bodyPr wrap="square" lIns="27432" tIns="12801" rIns="27432" bIns="12801" anchor="ctr">
+            <a:spAutoFit/>
+          </a:bodyPr>
+          <a:lstStyle/>
+          <a:p>
+            <a:pPr algn="l">
+              <a:lnSpc>
+                <a:spcPct val="106000"/>
+              </a:lnSpc>
+              <a:spcBef>
+                <a:spcPts val="0"/>
+              </a:spcBef>
+              <a:spcAft>
+                <a:spcPts val="0"/>
+              </a:spcAft>
+            </a:pPr>
+            <a:r>
+              <a:rPr b="0">
+                <a:solidFill>
+                  <a:srgbClr val="47545D"/>
+                </a:solidFill>
+                <a:latin typeface="Calibri"/>
+              </a:rPr>
+              <a:t>≤ 16 KB → local</a:t>
+            </a:r>
+          </a:p>
+        </p:txBody>
+      </p:sp>
+      <p:sp>
+        <p:nvSpPr>
+          <p:cNvPr id="21" name="Rounded Rectangle 20"/>
+          <p:cNvSpPr/>
+          <p:nvPr/>
+        </p:nvSpPr>
+        <p:spPr>
+          <a:xfrm>
+            <a:off x="5605272" y="1554480"/>
+            <a:ext cx="2843784" cy="2496312"/>
+          </a:xfrm>
+          <a:prstGeom prst="roundRect">
+            <a:avLst>
+              <a:gd name="adj" fmla="val 7000"/>
+            </a:avLst>
+          </a:prstGeom>
+          <a:solidFill>
+            <a:srgbClr val="FBFDFE"/>
+          </a:solidFill>
+          <a:ln w="10160">
+            <a:solidFill>
+              <a:srgbClr val="C5D5E0"/>
+            </a:solidFill>
+          </a:ln>
+        </p:spPr>
+        <p:style>
+          <a:lnRef idx="1">
+            <a:schemeClr val="accent1"/>
+          </a:lnRef>
+          <a:fillRef idx="3">
+            <a:schemeClr val="accent1"/>
+          </a:fillRef>
+          <a:effectRef idx="2">
+            <a:schemeClr val="accent1"/>
+          </a:effectRef>
+          <a:fontRef idx="minor">
+            <a:schemeClr val="lt1"/>
+          </a:fontRef>
+        </p:style>
+        <p:txBody>
+          <a:bodyPr rtlCol="0" anchor="ctr"/>
+          <a:lstStyle/>
+          <a:p>
+            <a:pPr algn="ctr"/>
+            <a:endParaRPr/>
+          </a:p>
+        </p:txBody>
+      </p:sp>
+      <p:sp>
+        <p:nvSpPr>
+          <p:cNvPr id="22" name="Rounded Rectangle 21"/>
+          <p:cNvSpPr/>
+          <p:nvPr/>
+        </p:nvSpPr>
+        <p:spPr>
+          <a:xfrm>
+            <a:off x="5614416" y="1563624"/>
+            <a:ext cx="2825496" cy="393192"/>
+          </a:xfrm>
+          <a:prstGeom prst="roundRect">
+            <a:avLst>
+              <a:gd name="adj" fmla="val 7000"/>
+            </a:avLst>
+          </a:prstGeom>
+          <a:solidFill>
+            <a:srgbClr val="E2F2F9"/>
+          </a:solidFill>
+          <a:ln w="2540">
+            <a:solidFill>
+              <a:srgbClr val="E2F2F9"/>
+            </a:solidFill>
+          </a:ln>
+        </p:spPr>
+        <p:style>
+          <a:lnRef idx="1">
+            <a:schemeClr val="accent1"/>
+          </a:lnRef>
+          <a:fillRef idx="3">
+            <a:schemeClr val="accent1"/>
+          </a:fillRef>
+          <a:effectRef idx="2">
+            <a:schemeClr val="accent1"/>
+          </a:effectRef>
+          <a:fontRef idx="minor">
+            <a:schemeClr val="lt1"/>
+          </a:fontRef>
+        </p:style>
+        <p:txBody>
+          <a:bodyPr rtlCol="0" anchor="ctr"/>
+          <a:lstStyle/>
+          <a:p>
+            <a:pPr algn="ctr"/>
+            <a:endParaRPr/>
+          </a:p>
+        </p:txBody>
+      </p:sp>
+      <p:sp>
+        <p:nvSpPr>
+          <p:cNvPr id="23" name="TextBox 22"/>
+          <p:cNvSpPr txBox="1"/>
+          <p:nvPr/>
+        </p:nvSpPr>
+        <p:spPr>
+          <a:xfrm>
+            <a:off x="5760720" y="1613212"/>
+            <a:ext cx="2569464" cy="275729"/>
+          </a:xfrm>
+          <a:prstGeom prst="rect">
+            <a:avLst/>
+          </a:prstGeom>
+          <a:noFill/>
+        </p:spPr>
+        <p:txBody>
+          <a:bodyPr wrap="square" lIns="27432" tIns="12801" rIns="27432" bIns="12801" anchor="ctr">
+            <a:spAutoFit/>
+          </a:bodyPr>
+          <a:lstStyle/>
+          <a:p>
+            <a:pPr algn="l">
+              <a:lnSpc>
+                <a:spcPct val="106000"/>
+              </a:lnSpc>
+              <a:spcBef>
+                <a:spcPts val="0"/>
+              </a:spcBef>
+              <a:spcAft>
+                <a:spcPts val="0"/>
+              </a:spcAft>
+            </a:pPr>
+            <a:r>
+              <a:rPr sz="1600" b="1">
+                <a:solidFill>
+                  <a:srgbClr val="063352"/>
+                </a:solidFill>
+                <a:latin typeface="Calibri"/>
+              </a:rPr>
+              <a:t>Where to extend</a:t>
+            </a:r>
+          </a:p>
+        </p:txBody>
+      </p:sp>
+      <p:sp>
+        <p:nvSpPr>
+          <p:cNvPr id="24" name="TextBox 23"/>
+          <p:cNvSpPr txBox="1"/>
+          <p:nvPr/>
+        </p:nvSpPr>
+        <p:spPr>
+          <a:xfrm>
+            <a:off x="5815584" y="2108853"/>
+            <a:ext cx="2423160" cy="244566"/>
+          </a:xfrm>
+          <a:prstGeom prst="rect">
+            <a:avLst/>
+          </a:prstGeom>
+          <a:noFill/>
+        </p:spPr>
+        <p:txBody>
+          <a:bodyPr wrap="square" lIns="27432" tIns="12801" rIns="27432" bIns="12801" anchor="ctr">
+            <a:spAutoFit/>
+          </a:bodyPr>
+          <a:lstStyle/>
+          <a:p>
+            <a:pPr algn="l">
+              <a:lnSpc>
+                <a:spcPct val="106000"/>
+              </a:lnSpc>
+              <a:spcBef>
+                <a:spcPts val="0"/>
+              </a:spcBef>
+              <a:spcAft>
+                <a:spcPts val="0"/>
+              </a:spcAft>
+            </a:pPr>
+            <a:r>
+              <a:rPr b="1">
+                <a:solidFill>
+                  <a:srgbClr val="156FA5"/>
+                </a:solidFill>
+                <a:latin typeface="Calibri"/>
+              </a:rPr>
+              <a:t>memory_hierarchy.cpp</a:t>
+            </a:r>
+          </a:p>
+        </p:txBody>
+      </p:sp>
+      <p:sp>
+        <p:nvSpPr>
+          <p:cNvPr id="25" name="TextBox 24"/>
+          <p:cNvSpPr txBox="1"/>
+          <p:nvPr/>
+        </p:nvSpPr>
+        <p:spPr>
+          <a:xfrm>
+            <a:off x="5824728" y="2451785"/>
+            <a:ext cx="2432304" cy="244502"/>
+          </a:xfrm>
+          <a:prstGeom prst="rect">
+            <a:avLst/>
+          </a:prstGeom>
+          <a:noFill/>
+        </p:spPr>
+        <p:txBody>
+          <a:bodyPr wrap="square" lIns="27432" tIns="12801" rIns="27432" bIns="12801" anchor="ctr">
+            <a:spAutoFit/>
+          </a:bodyPr>
+          <a:lstStyle/>
+          <a:p>
+            <a:pPr algn="l">
+              <a:lnSpc>
+                <a:spcPct val="106000"/>
+              </a:lnSpc>
+              <a:spcBef>
+                <a:spcPts val="0"/>
+              </a:spcBef>
+              <a:spcAft>
+                <a:spcPts val="0"/>
+              </a:spcAft>
+            </a:pPr>
+            <a:r>
+              <a:rPr b="0">
+                <a:solidFill>
+                  <a:srgbClr val="17232C"/>
+                </a:solidFill>
+                <a:latin typeface="Calibri"/>
+              </a:rPr>
+              <a:t>Add mem_share2auto_sche_2</a:t>
+            </a:r>
+          </a:p>
+        </p:txBody>
+      </p:sp>
+      <p:cxnSp>
+        <p:nvCxnSpPr>
+          <p:cNvPr id="26" name="Connector 25"/>
+          <p:cNvCxnSpPr/>
+          <p:nvPr/>
+        </p:nvCxnSpPr>
+        <p:spPr>
+          <a:xfrm>
+            <a:off x="5797296" y="2862072"/>
+            <a:ext cx="2414016" cy="0"/>
+          </a:xfrm>
+          <a:prstGeom prst="line">
+            <a:avLst/>
+          </a:prstGeom>
+          <a:ln w="15240">
+            <a:solidFill>
+              <a:srgbClr val="C5D5E0"/>
+            </a:solidFill>
+          </a:ln>
+        </p:spPr>
+        <p:style>
+          <a:lnRef idx="2">
+            <a:schemeClr val="accent1"/>
+          </a:lnRef>
+          <a:fillRef idx="0">
+            <a:schemeClr val="accent1"/>
+          </a:fillRef>
+          <a:effectRef idx="1">
+            <a:schemeClr val="accent1"/>
+          </a:effectRef>
+          <a:fontRef idx="minor">
+            <a:schemeClr val="tx1"/>
+          </a:fontRef>
+        </p:style>
+      </p:cxnSp>
+      <p:sp>
+        <p:nvSpPr>
+          <p:cNvPr id="27" name="TextBox 26"/>
+          <p:cNvSpPr txBox="1"/>
+          <p:nvPr/>
+        </p:nvSpPr>
+        <p:spPr>
+          <a:xfrm>
+            <a:off x="5815584" y="3036969"/>
+            <a:ext cx="2414016" cy="244566"/>
+          </a:xfrm>
+          <a:prstGeom prst="rect">
+            <a:avLst/>
+          </a:prstGeom>
+          <a:noFill/>
+        </p:spPr>
+        <p:txBody>
+          <a:bodyPr wrap="square" lIns="27432" tIns="12801" rIns="27432" bIns="12801" anchor="ctr">
+            <a:spAutoFit/>
+          </a:bodyPr>
+          <a:lstStyle/>
+          <a:p>
+            <a:pPr algn="l">
+              <a:lnSpc>
+                <a:spcPct val="106000"/>
+              </a:lnSpc>
+              <a:spcBef>
+                <a:spcPts val="0"/>
+              </a:spcBef>
+              <a:spcAft>
+                <a:spcPts val="0"/>
+              </a:spcAft>
+            </a:pPr>
+            <a:r>
+              <a:rPr b="1">
+                <a:solidFill>
+                  <a:srgbClr val="156FA5"/>
+                </a:solidFill>
+                <a:latin typeface="Calibri"/>
+              </a:rPr>
+              <a:t>init.cpp</a:t>
+            </a:r>
+          </a:p>
+        </p:txBody>
+      </p:sp>
+      <p:sp>
+        <p:nvSpPr>
+          <p:cNvPr id="28" name="TextBox 27"/>
+          <p:cNvSpPr txBox="1"/>
+          <p:nvPr/>
+        </p:nvSpPr>
+        <p:spPr>
+          <a:xfrm>
+            <a:off x="5824728" y="3361716"/>
+            <a:ext cx="2350008" cy="472897"/>
+          </a:xfrm>
+          <a:prstGeom prst="rect">
+            <a:avLst/>
+          </a:prstGeom>
+          <a:noFill/>
+        </p:spPr>
+        <p:txBody>
+          <a:bodyPr wrap="square" lIns="27432" tIns="12801" rIns="27432" bIns="12801" anchor="ctr">
+            <a:spAutoFit/>
+          </a:bodyPr>
+          <a:lstStyle/>
+          <a:p>
+            <a:pPr algn="l">
+              <a:lnSpc>
+                <a:spcPct val="106000"/>
+              </a:lnSpc>
+              <a:spcBef>
+                <a:spcPts val="0"/>
+              </a:spcBef>
+              <a:spcAft>
+                <a:spcPts val="0"/>
+              </a:spcAft>
+            </a:pPr>
+            <a:r>
+              <a:rPr b="0">
+                <a:solidFill>
+                  <a:srgbClr val="17232C"/>
+                </a:solidFill>
+                <a:latin typeface="Calibri"/>
+              </a:rPr>
+              <a:t>Select the pass with the LOCALMEM flag</a:t>
+            </a:r>
+          </a:p>
+        </p:txBody>
+      </p:sp>
+      <p:sp>
+        <p:nvSpPr>
+          <p:cNvPr id="29" name="Rounded Rectangle 28"/>
+          <p:cNvSpPr/>
+          <p:nvPr/>
+        </p:nvSpPr>
+        <p:spPr>
+          <a:xfrm>
+            <a:off x="640080" y="4242816"/>
+            <a:ext cx="7845552" cy="320040"/>
+          </a:xfrm>
+          <a:prstGeom prst="roundRect">
+            <a:avLst>
+              <a:gd name="adj" fmla="val 7000"/>
+            </a:avLst>
+          </a:prstGeom>
+          <a:solidFill>
+            <a:srgbClr val="E2F2F9"/>
+          </a:solidFill>
+          <a:ln w="8890">
+            <a:solidFill>
+              <a:srgbClr val="E2F2F9"/>
+            </a:solidFill>
+          </a:ln>
+        </p:spPr>
+        <p:style>
+          <a:lnRef idx="1">
+            <a:schemeClr val="accent1"/>
+          </a:lnRef>
+          <a:fillRef idx="3">
+            <a:schemeClr val="accent1"/>
+          </a:fillRef>
+          <a:effectRef idx="2">
+            <a:schemeClr val="accent1"/>
+          </a:effectRef>
+          <a:fontRef idx="minor">
+            <a:schemeClr val="lt1"/>
+          </a:fontRef>
+        </p:style>
+        <p:txBody>
+          <a:bodyPr rtlCol="0" anchor="ctr"/>
+          <a:lstStyle/>
+          <a:p>
+            <a:pPr algn="ctr"/>
+            <a:endParaRPr/>
+          </a:p>
+        </p:txBody>
+      </p:sp>
+      <p:sp>
+        <p:nvSpPr>
+          <p:cNvPr id="30" name="TextBox 29"/>
+          <p:cNvSpPr txBox="1"/>
+          <p:nvPr/>
+        </p:nvSpPr>
+        <p:spPr>
+          <a:xfrm>
+            <a:off x="749808" y="4261104"/>
+            <a:ext cx="7571231" cy="246888"/>
+          </a:xfrm>
+          <a:prstGeom prst="rect">
+            <a:avLst/>
+          </a:prstGeom>
+          <a:noFill/>
+        </p:spPr>
+        <p:txBody>
+          <a:bodyPr wrap="square" lIns="27432" tIns="12801" rIns="27432" bIns="12801" anchor="ctr">
+            <a:spAutoFit/>
+          </a:bodyPr>
+          <a:lstStyle/>
+          <a:p>
+            <a:pPr algn="l">
+              <a:lnSpc>
+                <a:spcPct val="106000"/>
+              </a:lnSpc>
+              <a:spcBef>
+                <a:spcPts val="0"/>
+              </a:spcBef>
+              <a:spcAft>
+                <a:spcPts val="0"/>
+              </a:spcAft>
+            </a:pPr>
+            <a:r>
+              <a:rPr sz="1030" b="1">
+                <a:solidFill>
+                  <a:srgbClr val="063352"/>
+                </a:solidFill>
+                <a:latin typeface="Consolas"/>
+              </a:rPr>
+              <a:t>./run.sh  [compare LOCALMEM 0 / 1 / 2]      BUDGET=32768 ./run.sh nw</a:t>
+            </a:r>
+          </a:p>
+        </p:txBody>
+      </p:sp>
+      <p:sp>
+        <p:nvSpPr>
+          <p:cNvPr id="31" name="TextBox 30"/>
+          <p:cNvSpPr txBox="1"/>
+          <p:nvPr/>
+        </p:nvSpPr>
+        <p:spPr>
+          <a:xfrm>
+            <a:off x="640080" y="4625035"/>
+            <a:ext cx="7680960" cy="201168"/>
+          </a:xfrm>
+          <a:prstGeom prst="rect">
+            <a:avLst/>
+          </a:prstGeom>
+          <a:noFill/>
+        </p:spPr>
+        <p:txBody>
+          <a:bodyPr wrap="square" lIns="27432" tIns="12801" rIns="27432" bIns="12801" anchor="ctr">
+            <a:spAutoFit/>
+          </a:bodyPr>
+          <a:lstStyle/>
+          <a:p>
+            <a:pPr algn="l">
+              <a:lnSpc>
+                <a:spcPct val="106000"/>
+              </a:lnSpc>
+              <a:spcBef>
+                <a:spcPts val="0"/>
+              </a:spcBef>
+              <a:spcAft>
+                <a:spcPts val="0"/>
+              </a:spcAft>
+            </a:pPr>
+            <a:r>
+              <a:rPr sz="919" b="0">
+                <a:solidFill>
+                  <a:srgbClr val="47545D"/>
+                </a:solidFill>
+                <a:latin typeface="Calibri"/>
+                <a:hlinkClick r:id="rId3"/>
+              </a:rPr>
+              <a:t>Source: Volt v1.1  ·  docs/7.3.tutorial_shared_memory.md</a:t>
+            </a:r>
+          </a:p>
+        </p:txBody>
+      </p:sp>
+      <p:sp>
+        <p:nvSpPr>
+          <p:cNvPr id="33" name="제목 32">
+            <a:extLst>
+              <a:ext uri="{FF2B5EF4-FFF2-40B4-BE49-F238E27FC236}">
+                <a16:creationId xmlns:a16="http://schemas.microsoft.com/office/drawing/2014/main" id="{8B669FA4-5F7D-7C61-8859-5CC431D5A619}"/>
               </a:ext>
             </a:extLst>
           </p:cNvPr>
@@ -13140,56 +16141,28 @@
             <a:spLocks noGrp="1"/>
           </p:cNvSpPr>
           <p:nvPr>
-            <p:ph type="ctrTitle"/>
+            <p:ph type="title"/>
           </p:nvPr>
         </p:nvSpPr>
-        <p:spPr>
-          <a:xfrm>
-            <a:off x="1143000" y="504889"/>
-            <a:ext cx="6858000" cy="2358053"/>
-          </a:xfrm>
-        </p:spPr>
+        <p:spPr/>
         <p:txBody>
           <a:bodyPr/>
           <a:lstStyle/>
           <a:p>
             <a:r>
-              <a:rPr kumimoji="1" lang="en-US" altLang="ko-Kore-KR" dirty="0"/>
-              <a:t>Thank you </a:t>
-            </a:r>
-            <a:br>
-              <a:rPr kumimoji="1" lang="en-US" altLang="ko-Kore-KR" dirty="0"/>
-            </a:br>
-            <a:r>
-              <a:rPr kumimoji="1" lang="en-US" altLang="ko-Kore-KR" sz="1800" dirty="0"/>
-              <a:t>https://</a:t>
-            </a:r>
-            <a:r>
-              <a:rPr kumimoji="1" lang="en-US" altLang="ko-Kore-KR" sz="1800" dirty="0" err="1"/>
-              <a:t>github.com</a:t>
-            </a:r>
-            <a:r>
-              <a:rPr kumimoji="1" lang="en-US" altLang="ko-Kore-KR" sz="1800" dirty="0"/>
-              <a:t>/</a:t>
-            </a:r>
-            <a:r>
-              <a:rPr kumimoji="1" lang="en-US" altLang="ko-Kore-KR" sz="1800" dirty="0" err="1"/>
-              <a:t>vortexgpgpu</a:t>
-            </a:r>
-            <a:r>
-              <a:rPr kumimoji="1" lang="en-US" altLang="ko-Kore-KR" sz="1800" dirty="0"/>
-              <a:t>/Volt</a:t>
-            </a:r>
-            <a:endParaRPr kumimoji="1" lang="ko-Kore-KR" altLang="en-US" sz="1800" dirty="0"/>
+              <a:rPr lang="en" altLang="ko-Kore-KR" sz="3600" b="1" dirty="0">
+                <a:solidFill>
+                  <a:srgbClr val="000000"/>
+                </a:solidFill>
+                <a:latin typeface="Calibri"/>
+              </a:rPr>
+              <a:t>Tutorial 3: Extending Memory Lowering</a:t>
+            </a:r>
+            <a:endParaRPr lang="ko-Kore-KR" altLang="en-US" dirty="0"/>
           </a:p>
         </p:txBody>
       </p:sp>
     </p:spTree>
-    <p:extLst>
-      <p:ext uri="{BB962C8B-B14F-4D97-AF65-F5344CB8AC3E}">
-        <p14:creationId xmlns:p14="http://schemas.microsoft.com/office/powerpoint/2010/main" val="1682751556"/>
-      </p:ext>
-    </p:extLst>
   </p:cSld>
   <p:clrMapOvr>
     <a:masterClrMapping/>
@@ -14141,6 +17114,2103 @@
     <p:extLst>
       <p:ext uri="{BB962C8B-B14F-4D97-AF65-F5344CB8AC3E}">
         <p14:creationId xmlns:p14="http://schemas.microsoft.com/office/powerpoint/2010/main" val="2743264847"/>
+      </p:ext>
+    </p:extLst>
+  </p:cSld>
+  <p:clrMapOvr>
+    <a:masterClrMapping/>
+  </p:clrMapOvr>
+</p:sld>
+</file>
+
+<file path=ppt/slides/slide20.xml><?xml version="1.0" encoding="utf-8"?>
+<p:sld xmlns:a="http://schemas.openxmlformats.org/drawingml/2006/main" xmlns:r="http://schemas.openxmlformats.org/officeDocument/2006/relationships" xmlns:p="http://schemas.openxmlformats.org/presentationml/2006/main">
+  <p:cSld>
+    <p:spTree>
+      <p:nvGrpSpPr>
+        <p:cNvPr id="1" name=""/>
+        <p:cNvGrpSpPr/>
+        <p:nvPr/>
+      </p:nvGrpSpPr>
+      <p:grpSpPr>
+        <a:xfrm>
+          <a:off x="0" y="0"/>
+          <a:ext cx="0" cy="0"/>
+          <a:chOff x="0" y="0"/>
+          <a:chExt cx="0" cy="0"/>
+        </a:xfrm>
+      </p:grpSpPr>
+      <p:sp>
+        <p:nvSpPr>
+          <p:cNvPr id="3" name="TextBox 2"/>
+          <p:cNvSpPr txBox="1"/>
+          <p:nvPr/>
+        </p:nvSpPr>
+        <p:spPr>
+          <a:xfrm>
+            <a:off x="630936" y="1014248"/>
+            <a:ext cx="7955279" cy="275792"/>
+          </a:xfrm>
+          <a:prstGeom prst="rect">
+            <a:avLst/>
+          </a:prstGeom>
+          <a:noFill/>
+        </p:spPr>
+        <p:txBody>
+          <a:bodyPr wrap="square" lIns="27432" tIns="12801" rIns="27432" bIns="12801" anchor="ctr">
+            <a:spAutoFit/>
+          </a:bodyPr>
+          <a:lstStyle/>
+          <a:p>
+            <a:pPr algn="l">
+              <a:lnSpc>
+                <a:spcPct val="106000"/>
+              </a:lnSpc>
+              <a:spcBef>
+                <a:spcPts val="0"/>
+              </a:spcBef>
+              <a:spcAft>
+                <a:spcPts val="0"/>
+              </a:spcAft>
+            </a:pPr>
+            <a:r>
+              <a:rPr sz="1600" b="0" dirty="0" err="1">
+                <a:solidFill>
+                  <a:schemeClr val="tx1"/>
+                </a:solidFill>
+                <a:latin typeface="Calibri"/>
+              </a:rPr>
+              <a:t>CuPBoP</a:t>
+            </a:r>
+            <a:r>
+              <a:rPr sz="1600" b="0" dirty="0">
+                <a:solidFill>
+                  <a:schemeClr val="tx1"/>
+                </a:solidFill>
+                <a:latin typeface="Calibri"/>
+              </a:rPr>
+              <a:t> translates tensor computation and tile movement to Vortex 3.0 hardware</a:t>
+            </a:r>
+          </a:p>
+        </p:txBody>
+      </p:sp>
+      <p:cxnSp>
+        <p:nvCxnSpPr>
+          <p:cNvPr id="4" name="Connector 3"/>
+          <p:cNvCxnSpPr/>
+          <p:nvPr/>
+        </p:nvCxnSpPr>
+        <p:spPr>
+          <a:xfrm>
+            <a:off x="630936" y="1399032"/>
+            <a:ext cx="7872984" cy="0"/>
+          </a:xfrm>
+          <a:prstGeom prst="line">
+            <a:avLst/>
+          </a:prstGeom>
+          <a:ln w="10160">
+            <a:solidFill>
+              <a:srgbClr val="E2F2F9"/>
+            </a:solidFill>
+          </a:ln>
+        </p:spPr>
+        <p:style>
+          <a:lnRef idx="2">
+            <a:schemeClr val="accent1"/>
+          </a:lnRef>
+          <a:fillRef idx="0">
+            <a:schemeClr val="accent1"/>
+          </a:fillRef>
+          <a:effectRef idx="1">
+            <a:schemeClr val="accent1"/>
+          </a:effectRef>
+          <a:fontRef idx="minor">
+            <a:schemeClr val="tx1"/>
+          </a:fontRef>
+        </p:style>
+      </p:cxnSp>
+      <p:sp>
+        <p:nvSpPr>
+          <p:cNvPr id="5" name="TextBox 4"/>
+          <p:cNvSpPr txBox="1"/>
+          <p:nvPr/>
+        </p:nvSpPr>
+        <p:spPr>
+          <a:xfrm>
+            <a:off x="8366760" y="4690872"/>
+            <a:ext cx="338328" cy="256032"/>
+          </a:xfrm>
+          <a:prstGeom prst="rect">
+            <a:avLst/>
+          </a:prstGeom>
+          <a:noFill/>
+        </p:spPr>
+        <p:txBody>
+          <a:bodyPr wrap="square" lIns="27432" tIns="12801" rIns="27432" bIns="12801" anchor="ctr">
+            <a:spAutoFit/>
+          </a:bodyPr>
+          <a:lstStyle/>
+          <a:p>
+            <a:pPr algn="r">
+              <a:lnSpc>
+                <a:spcPct val="106000"/>
+              </a:lnSpc>
+              <a:spcBef>
+                <a:spcPts val="0"/>
+              </a:spcBef>
+              <a:spcAft>
+                <a:spcPts val="0"/>
+              </a:spcAft>
+            </a:pPr>
+            <a:r>
+              <a:rPr sz="900" b="0">
+                <a:solidFill>
+                  <a:srgbClr val="47545D"/>
+                </a:solidFill>
+                <a:latin typeface="Calibri"/>
+              </a:rPr>
+              <a:t>20</a:t>
+            </a:r>
+          </a:p>
+        </p:txBody>
+      </p:sp>
+      <p:sp>
+        <p:nvSpPr>
+          <p:cNvPr id="6" name="Rounded Rectangle 5"/>
+          <p:cNvSpPr/>
+          <p:nvPr/>
+        </p:nvSpPr>
+        <p:spPr>
+          <a:xfrm>
+            <a:off x="630936" y="1652016"/>
+            <a:ext cx="2532888" cy="2002536"/>
+          </a:xfrm>
+          <a:prstGeom prst="roundRect">
+            <a:avLst>
+              <a:gd name="adj" fmla="val 7000"/>
+            </a:avLst>
+          </a:prstGeom>
+          <a:solidFill>
+            <a:srgbClr val="FBFDFE"/>
+          </a:solidFill>
+          <a:ln w="10160">
+            <a:solidFill>
+              <a:srgbClr val="C5D5E0"/>
+            </a:solidFill>
+          </a:ln>
+        </p:spPr>
+        <p:style>
+          <a:lnRef idx="1">
+            <a:schemeClr val="accent1"/>
+          </a:lnRef>
+          <a:fillRef idx="3">
+            <a:schemeClr val="accent1"/>
+          </a:fillRef>
+          <a:effectRef idx="2">
+            <a:schemeClr val="accent1"/>
+          </a:effectRef>
+          <a:fontRef idx="minor">
+            <a:schemeClr val="lt1"/>
+          </a:fontRef>
+        </p:style>
+        <p:txBody>
+          <a:bodyPr rtlCol="0" anchor="ctr"/>
+          <a:lstStyle/>
+          <a:p>
+            <a:pPr algn="ctr"/>
+            <a:endParaRPr/>
+          </a:p>
+        </p:txBody>
+      </p:sp>
+      <p:sp>
+        <p:nvSpPr>
+          <p:cNvPr id="7" name="Rounded Rectangle 6"/>
+          <p:cNvSpPr/>
+          <p:nvPr/>
+        </p:nvSpPr>
+        <p:spPr>
+          <a:xfrm>
+            <a:off x="640080" y="1661160"/>
+            <a:ext cx="2514600" cy="393192"/>
+          </a:xfrm>
+          <a:prstGeom prst="roundRect">
+            <a:avLst>
+              <a:gd name="adj" fmla="val 7000"/>
+            </a:avLst>
+          </a:prstGeom>
+          <a:solidFill>
+            <a:srgbClr val="E2F2F9"/>
+          </a:solidFill>
+          <a:ln w="2540">
+            <a:solidFill>
+              <a:srgbClr val="E2F2F9"/>
+            </a:solidFill>
+          </a:ln>
+        </p:spPr>
+        <p:style>
+          <a:lnRef idx="1">
+            <a:schemeClr val="accent1"/>
+          </a:lnRef>
+          <a:fillRef idx="3">
+            <a:schemeClr val="accent1"/>
+          </a:fillRef>
+          <a:effectRef idx="2">
+            <a:schemeClr val="accent1"/>
+          </a:effectRef>
+          <a:fontRef idx="minor">
+            <a:schemeClr val="lt1"/>
+          </a:fontRef>
+        </p:style>
+        <p:txBody>
+          <a:bodyPr rtlCol="0" anchor="ctr"/>
+          <a:lstStyle/>
+          <a:p>
+            <a:pPr algn="ctr"/>
+            <a:endParaRPr sz="1600"/>
+          </a:p>
+        </p:txBody>
+      </p:sp>
+      <p:sp>
+        <p:nvSpPr>
+          <p:cNvPr id="8" name="TextBox 7"/>
+          <p:cNvSpPr txBox="1"/>
+          <p:nvPr/>
+        </p:nvSpPr>
+        <p:spPr>
+          <a:xfrm>
+            <a:off x="786384" y="1710748"/>
+            <a:ext cx="2258568" cy="275729"/>
+          </a:xfrm>
+          <a:prstGeom prst="rect">
+            <a:avLst/>
+          </a:prstGeom>
+          <a:noFill/>
+        </p:spPr>
+        <p:txBody>
+          <a:bodyPr wrap="square" lIns="27432" tIns="12801" rIns="27432" bIns="12801" anchor="ctr">
+            <a:spAutoFit/>
+          </a:bodyPr>
+          <a:lstStyle/>
+          <a:p>
+            <a:pPr algn="l">
+              <a:lnSpc>
+                <a:spcPct val="106000"/>
+              </a:lnSpc>
+              <a:spcBef>
+                <a:spcPts val="0"/>
+              </a:spcBef>
+              <a:spcAft>
+                <a:spcPts val="0"/>
+              </a:spcAft>
+            </a:pPr>
+            <a:r>
+              <a:rPr sz="1600" b="1">
+                <a:solidFill>
+                  <a:srgbClr val="063352"/>
+                </a:solidFill>
+                <a:latin typeface="Calibri"/>
+              </a:rPr>
+              <a:t>WMMA  →  TCU</a:t>
+            </a:r>
+          </a:p>
+        </p:txBody>
+      </p:sp>
+      <p:sp>
+        <p:nvSpPr>
+          <p:cNvPr id="9" name="TextBox 8"/>
+          <p:cNvSpPr txBox="1"/>
+          <p:nvPr/>
+        </p:nvSpPr>
+        <p:spPr>
+          <a:xfrm>
+            <a:off x="804671" y="2210993"/>
+            <a:ext cx="2194560" cy="244502"/>
+          </a:xfrm>
+          <a:prstGeom prst="rect">
+            <a:avLst/>
+          </a:prstGeom>
+          <a:noFill/>
+        </p:spPr>
+        <p:txBody>
+          <a:bodyPr wrap="square" lIns="27432" tIns="12801" rIns="27432" bIns="12801" anchor="ctr">
+            <a:spAutoFit/>
+          </a:bodyPr>
+          <a:lstStyle/>
+          <a:p>
+            <a:pPr algn="l">
+              <a:lnSpc>
+                <a:spcPct val="106000"/>
+              </a:lnSpc>
+              <a:spcBef>
+                <a:spcPts val="0"/>
+              </a:spcBef>
+              <a:spcAft>
+                <a:spcPts val="0"/>
+              </a:spcAft>
+            </a:pPr>
+            <a:r>
+              <a:rPr b="0">
+                <a:solidFill>
+                  <a:srgbClr val="17232C"/>
+                </a:solidFill>
+                <a:latin typeface="Calibri"/>
+              </a:rPr>
+              <a:t>CUDA wmma helpers</a:t>
+            </a:r>
+          </a:p>
+        </p:txBody>
+      </p:sp>
+      <p:cxnSp>
+        <p:nvCxnSpPr>
+          <p:cNvPr id="10" name="Connector 9"/>
+          <p:cNvCxnSpPr/>
+          <p:nvPr/>
+        </p:nvCxnSpPr>
+        <p:spPr>
+          <a:xfrm>
+            <a:off x="841247" y="2584704"/>
+            <a:ext cx="2093977" cy="0"/>
+          </a:xfrm>
+          <a:prstGeom prst="line">
+            <a:avLst/>
+          </a:prstGeom>
+          <a:ln w="15240">
+            <a:solidFill>
+              <a:srgbClr val="C5D5E0"/>
+            </a:solidFill>
+          </a:ln>
+        </p:spPr>
+        <p:style>
+          <a:lnRef idx="2">
+            <a:schemeClr val="accent1"/>
+          </a:lnRef>
+          <a:fillRef idx="0">
+            <a:schemeClr val="accent1"/>
+          </a:fillRef>
+          <a:effectRef idx="1">
+            <a:schemeClr val="accent1"/>
+          </a:effectRef>
+          <a:fontRef idx="minor">
+            <a:schemeClr val="tx1"/>
+          </a:fontRef>
+        </p:style>
+      </p:cxnSp>
+      <p:sp>
+        <p:nvSpPr>
+          <p:cNvPr id="11" name="TextBox 10"/>
+          <p:cNvSpPr txBox="1"/>
+          <p:nvPr/>
+        </p:nvSpPr>
+        <p:spPr>
+          <a:xfrm>
+            <a:off x="804671" y="2709341"/>
+            <a:ext cx="2194560" cy="244502"/>
+          </a:xfrm>
+          <a:prstGeom prst="rect">
+            <a:avLst/>
+          </a:prstGeom>
+          <a:noFill/>
+        </p:spPr>
+        <p:txBody>
+          <a:bodyPr wrap="square" lIns="27432" tIns="12801" rIns="27432" bIns="12801" anchor="ctr">
+            <a:spAutoFit/>
+          </a:bodyPr>
+          <a:lstStyle/>
+          <a:p>
+            <a:pPr algn="l">
+              <a:lnSpc>
+                <a:spcPct val="106000"/>
+              </a:lnSpc>
+              <a:spcBef>
+                <a:spcPts val="0"/>
+              </a:spcBef>
+              <a:spcAft>
+                <a:spcPts val="0"/>
+              </a:spcAft>
+            </a:pPr>
+            <a:r>
+              <a:rPr b="0">
+                <a:solidFill>
+                  <a:srgbClr val="17232C"/>
+                </a:solidFill>
+                <a:latin typeface="Calibri"/>
+              </a:rPr>
+              <a:t>Runtime wmma_context</a:t>
+            </a:r>
+          </a:p>
+        </p:txBody>
+      </p:sp>
+      <p:sp>
+        <p:nvSpPr>
+          <p:cNvPr id="12" name="TextBox 11"/>
+          <p:cNvSpPr txBox="1"/>
+          <p:nvPr/>
+        </p:nvSpPr>
+        <p:spPr>
+          <a:xfrm>
+            <a:off x="804671" y="3189401"/>
+            <a:ext cx="2194560" cy="244502"/>
+          </a:xfrm>
+          <a:prstGeom prst="rect">
+            <a:avLst/>
+          </a:prstGeom>
+          <a:noFill/>
+        </p:spPr>
+        <p:txBody>
+          <a:bodyPr wrap="square" lIns="27432" tIns="12801" rIns="27432" bIns="12801" anchor="ctr">
+            <a:spAutoFit/>
+          </a:bodyPr>
+          <a:lstStyle/>
+          <a:p>
+            <a:pPr algn="l">
+              <a:lnSpc>
+                <a:spcPct val="106000"/>
+              </a:lnSpc>
+              <a:spcBef>
+                <a:spcPts val="0"/>
+              </a:spcBef>
+              <a:spcAft>
+                <a:spcPts val="0"/>
+              </a:spcAft>
+            </a:pPr>
+            <a:r>
+              <a:rPr b="0">
+                <a:solidFill>
+                  <a:srgbClr val="47545D"/>
+                </a:solidFill>
+                <a:latin typeface="Calibri"/>
+              </a:rPr>
+              <a:t>TCU matrix multiply</a:t>
+            </a:r>
+          </a:p>
+        </p:txBody>
+      </p:sp>
+      <p:sp>
+        <p:nvSpPr>
+          <p:cNvPr id="13" name="Rounded Rectangle 12"/>
+          <p:cNvSpPr/>
+          <p:nvPr/>
+        </p:nvSpPr>
+        <p:spPr>
+          <a:xfrm>
+            <a:off x="3264408" y="1652016"/>
+            <a:ext cx="2532888" cy="2002536"/>
+          </a:xfrm>
+          <a:prstGeom prst="roundRect">
+            <a:avLst>
+              <a:gd name="adj" fmla="val 7000"/>
+            </a:avLst>
+          </a:prstGeom>
+          <a:solidFill>
+            <a:srgbClr val="FBFDFE"/>
+          </a:solidFill>
+          <a:ln w="10160">
+            <a:solidFill>
+              <a:srgbClr val="C5D5E0"/>
+            </a:solidFill>
+          </a:ln>
+        </p:spPr>
+        <p:style>
+          <a:lnRef idx="1">
+            <a:schemeClr val="accent1"/>
+          </a:lnRef>
+          <a:fillRef idx="3">
+            <a:schemeClr val="accent1"/>
+          </a:fillRef>
+          <a:effectRef idx="2">
+            <a:schemeClr val="accent1"/>
+          </a:effectRef>
+          <a:fontRef idx="minor">
+            <a:schemeClr val="lt1"/>
+          </a:fontRef>
+        </p:style>
+        <p:txBody>
+          <a:bodyPr rtlCol="0" anchor="ctr"/>
+          <a:lstStyle/>
+          <a:p>
+            <a:pPr algn="ctr"/>
+            <a:endParaRPr/>
+          </a:p>
+        </p:txBody>
+      </p:sp>
+      <p:sp>
+        <p:nvSpPr>
+          <p:cNvPr id="14" name="Rounded Rectangle 13"/>
+          <p:cNvSpPr/>
+          <p:nvPr/>
+        </p:nvSpPr>
+        <p:spPr>
+          <a:xfrm>
+            <a:off x="3273551" y="1661160"/>
+            <a:ext cx="2514600" cy="393192"/>
+          </a:xfrm>
+          <a:prstGeom prst="roundRect">
+            <a:avLst>
+              <a:gd name="adj" fmla="val 7000"/>
+            </a:avLst>
+          </a:prstGeom>
+          <a:solidFill>
+            <a:srgbClr val="E2F2F9"/>
+          </a:solidFill>
+          <a:ln w="2540">
+            <a:solidFill>
+              <a:srgbClr val="E2F2F9"/>
+            </a:solidFill>
+          </a:ln>
+        </p:spPr>
+        <p:style>
+          <a:lnRef idx="1">
+            <a:schemeClr val="accent1"/>
+          </a:lnRef>
+          <a:fillRef idx="3">
+            <a:schemeClr val="accent1"/>
+          </a:fillRef>
+          <a:effectRef idx="2">
+            <a:schemeClr val="accent1"/>
+          </a:effectRef>
+          <a:fontRef idx="minor">
+            <a:schemeClr val="lt1"/>
+          </a:fontRef>
+        </p:style>
+        <p:txBody>
+          <a:bodyPr rtlCol="0" anchor="ctr"/>
+          <a:lstStyle/>
+          <a:p>
+            <a:pPr algn="ctr"/>
+            <a:endParaRPr sz="1600"/>
+          </a:p>
+        </p:txBody>
+      </p:sp>
+      <p:sp>
+        <p:nvSpPr>
+          <p:cNvPr id="15" name="TextBox 14"/>
+          <p:cNvSpPr txBox="1"/>
+          <p:nvPr/>
+        </p:nvSpPr>
+        <p:spPr>
+          <a:xfrm>
+            <a:off x="3419856" y="1710748"/>
+            <a:ext cx="2258568" cy="275729"/>
+          </a:xfrm>
+          <a:prstGeom prst="rect">
+            <a:avLst/>
+          </a:prstGeom>
+          <a:noFill/>
+        </p:spPr>
+        <p:txBody>
+          <a:bodyPr wrap="square" lIns="27432" tIns="12801" rIns="27432" bIns="12801" anchor="ctr">
+            <a:spAutoFit/>
+          </a:bodyPr>
+          <a:lstStyle/>
+          <a:p>
+            <a:pPr algn="l">
+              <a:lnSpc>
+                <a:spcPct val="106000"/>
+              </a:lnSpc>
+              <a:spcBef>
+                <a:spcPts val="0"/>
+              </a:spcBef>
+              <a:spcAft>
+                <a:spcPts val="0"/>
+              </a:spcAft>
+            </a:pPr>
+            <a:r>
+              <a:rPr sz="1600" b="1">
+                <a:solidFill>
+                  <a:srgbClr val="063352"/>
+                </a:solidFill>
+                <a:latin typeface="Calibri"/>
+              </a:rPr>
+              <a:t>WGMMA  →  TCU</a:t>
+            </a:r>
+          </a:p>
+        </p:txBody>
+      </p:sp>
+      <p:sp>
+        <p:nvSpPr>
+          <p:cNvPr id="16" name="TextBox 15"/>
+          <p:cNvSpPr txBox="1"/>
+          <p:nvPr/>
+        </p:nvSpPr>
+        <p:spPr>
+          <a:xfrm>
+            <a:off x="3438144" y="2210993"/>
+            <a:ext cx="2194560" cy="244502"/>
+          </a:xfrm>
+          <a:prstGeom prst="rect">
+            <a:avLst/>
+          </a:prstGeom>
+          <a:noFill/>
+        </p:spPr>
+        <p:txBody>
+          <a:bodyPr wrap="square" lIns="27432" tIns="12801" rIns="27432" bIns="12801" anchor="ctr">
+            <a:spAutoFit/>
+          </a:bodyPr>
+          <a:lstStyle/>
+          <a:p>
+            <a:pPr algn="l">
+              <a:lnSpc>
+                <a:spcPct val="106000"/>
+              </a:lnSpc>
+              <a:spcBef>
+                <a:spcPts val="0"/>
+              </a:spcBef>
+              <a:spcAft>
+                <a:spcPts val="0"/>
+              </a:spcAft>
+            </a:pPr>
+            <a:r>
+              <a:rPr b="0">
+                <a:solidFill>
+                  <a:srgbClr val="17232C"/>
+                </a:solidFill>
+                <a:latin typeface="Calibri"/>
+              </a:rPr>
+              <a:t>Hopper wgmma.mma_async</a:t>
+            </a:r>
+          </a:p>
+        </p:txBody>
+      </p:sp>
+      <p:cxnSp>
+        <p:nvCxnSpPr>
+          <p:cNvPr id="17" name="Connector 16"/>
+          <p:cNvCxnSpPr/>
+          <p:nvPr/>
+        </p:nvCxnSpPr>
+        <p:spPr>
+          <a:xfrm>
+            <a:off x="3474720" y="2584704"/>
+            <a:ext cx="2093976" cy="0"/>
+          </a:xfrm>
+          <a:prstGeom prst="line">
+            <a:avLst/>
+          </a:prstGeom>
+          <a:ln w="15240">
+            <a:solidFill>
+              <a:srgbClr val="C5D5E0"/>
+            </a:solidFill>
+          </a:ln>
+        </p:spPr>
+        <p:style>
+          <a:lnRef idx="2">
+            <a:schemeClr val="accent1"/>
+          </a:lnRef>
+          <a:fillRef idx="0">
+            <a:schemeClr val="accent1"/>
+          </a:fillRef>
+          <a:effectRef idx="1">
+            <a:schemeClr val="accent1"/>
+          </a:effectRef>
+          <a:fontRef idx="minor">
+            <a:schemeClr val="tx1"/>
+          </a:fontRef>
+        </p:style>
+      </p:cxnSp>
+      <p:sp>
+        <p:nvSpPr>
+          <p:cNvPr id="18" name="TextBox 17"/>
+          <p:cNvSpPr txBox="1"/>
+          <p:nvPr/>
+        </p:nvSpPr>
+        <p:spPr>
+          <a:xfrm>
+            <a:off x="3438144" y="2709341"/>
+            <a:ext cx="2194560" cy="244502"/>
+          </a:xfrm>
+          <a:prstGeom prst="rect">
+            <a:avLst/>
+          </a:prstGeom>
+          <a:noFill/>
+        </p:spPr>
+        <p:txBody>
+          <a:bodyPr wrap="square" lIns="27432" tIns="12801" rIns="27432" bIns="12801" anchor="ctr">
+            <a:spAutoFit/>
+          </a:bodyPr>
+          <a:lstStyle/>
+          <a:p>
+            <a:pPr algn="l">
+              <a:lnSpc>
+                <a:spcPct val="106000"/>
+              </a:lnSpc>
+              <a:spcBef>
+                <a:spcPts val="0"/>
+              </a:spcBef>
+              <a:spcAft>
+                <a:spcPts val="0"/>
+              </a:spcAft>
+            </a:pPr>
+            <a:r>
+              <a:rPr b="0">
+                <a:solidFill>
+                  <a:srgbClr val="17232C"/>
+                </a:solidFill>
+                <a:latin typeface="Calibri"/>
+              </a:rPr>
+              <a:t>Synchronous lowering</a:t>
+            </a:r>
+          </a:p>
+        </p:txBody>
+      </p:sp>
+      <p:sp>
+        <p:nvSpPr>
+          <p:cNvPr id="19" name="TextBox 18"/>
+          <p:cNvSpPr txBox="1"/>
+          <p:nvPr/>
+        </p:nvSpPr>
+        <p:spPr>
+          <a:xfrm>
+            <a:off x="3438144" y="3075204"/>
+            <a:ext cx="2194560" cy="472897"/>
+          </a:xfrm>
+          <a:prstGeom prst="rect">
+            <a:avLst/>
+          </a:prstGeom>
+          <a:noFill/>
+        </p:spPr>
+        <p:txBody>
+          <a:bodyPr wrap="square" lIns="27432" tIns="12801" rIns="27432" bIns="12801" anchor="ctr">
+            <a:spAutoFit/>
+          </a:bodyPr>
+          <a:lstStyle/>
+          <a:p>
+            <a:pPr algn="l">
+              <a:lnSpc>
+                <a:spcPct val="106000"/>
+              </a:lnSpc>
+              <a:spcBef>
+                <a:spcPts val="0"/>
+              </a:spcBef>
+              <a:spcAft>
+                <a:spcPts val="0"/>
+              </a:spcAft>
+            </a:pPr>
+            <a:r>
+              <a:rPr b="0">
+                <a:solidFill>
+                  <a:srgbClr val="47545D"/>
+                </a:solidFill>
+                <a:latin typeface="Calibri"/>
+              </a:rPr>
+              <a:t>Descriptor + layout conversion</a:t>
+            </a:r>
+          </a:p>
+        </p:txBody>
+      </p:sp>
+      <p:sp>
+        <p:nvSpPr>
+          <p:cNvPr id="20" name="Rounded Rectangle 19"/>
+          <p:cNvSpPr/>
+          <p:nvPr/>
+        </p:nvSpPr>
+        <p:spPr>
+          <a:xfrm>
+            <a:off x="5897880" y="1652016"/>
+            <a:ext cx="2532888" cy="2002536"/>
+          </a:xfrm>
+          <a:prstGeom prst="roundRect">
+            <a:avLst>
+              <a:gd name="adj" fmla="val 7000"/>
+            </a:avLst>
+          </a:prstGeom>
+          <a:solidFill>
+            <a:srgbClr val="FBFDFE"/>
+          </a:solidFill>
+          <a:ln w="10160">
+            <a:solidFill>
+              <a:srgbClr val="C5D5E0"/>
+            </a:solidFill>
+          </a:ln>
+        </p:spPr>
+        <p:style>
+          <a:lnRef idx="1">
+            <a:schemeClr val="accent1"/>
+          </a:lnRef>
+          <a:fillRef idx="3">
+            <a:schemeClr val="accent1"/>
+          </a:fillRef>
+          <a:effectRef idx="2">
+            <a:schemeClr val="accent1"/>
+          </a:effectRef>
+          <a:fontRef idx="minor">
+            <a:schemeClr val="lt1"/>
+          </a:fontRef>
+        </p:style>
+        <p:txBody>
+          <a:bodyPr rtlCol="0" anchor="ctr"/>
+          <a:lstStyle/>
+          <a:p>
+            <a:pPr algn="ctr"/>
+            <a:endParaRPr/>
+          </a:p>
+        </p:txBody>
+      </p:sp>
+      <p:sp>
+        <p:nvSpPr>
+          <p:cNvPr id="21" name="Rounded Rectangle 20"/>
+          <p:cNvSpPr/>
+          <p:nvPr/>
+        </p:nvSpPr>
+        <p:spPr>
+          <a:xfrm>
+            <a:off x="5907024" y="1661160"/>
+            <a:ext cx="2514600" cy="393192"/>
+          </a:xfrm>
+          <a:prstGeom prst="roundRect">
+            <a:avLst>
+              <a:gd name="adj" fmla="val 7000"/>
+            </a:avLst>
+          </a:prstGeom>
+          <a:solidFill>
+            <a:srgbClr val="E2F2F9"/>
+          </a:solidFill>
+          <a:ln w="2540">
+            <a:solidFill>
+              <a:srgbClr val="E2F2F9"/>
+            </a:solidFill>
+          </a:ln>
+        </p:spPr>
+        <p:style>
+          <a:lnRef idx="1">
+            <a:schemeClr val="accent1"/>
+          </a:lnRef>
+          <a:fillRef idx="3">
+            <a:schemeClr val="accent1"/>
+          </a:fillRef>
+          <a:effectRef idx="2">
+            <a:schemeClr val="accent1"/>
+          </a:effectRef>
+          <a:fontRef idx="minor">
+            <a:schemeClr val="lt1"/>
+          </a:fontRef>
+        </p:style>
+        <p:txBody>
+          <a:bodyPr rtlCol="0" anchor="ctr"/>
+          <a:lstStyle/>
+          <a:p>
+            <a:pPr algn="ctr"/>
+            <a:endParaRPr sz="1600"/>
+          </a:p>
+        </p:txBody>
+      </p:sp>
+      <p:sp>
+        <p:nvSpPr>
+          <p:cNvPr id="22" name="TextBox 21"/>
+          <p:cNvSpPr txBox="1"/>
+          <p:nvPr/>
+        </p:nvSpPr>
+        <p:spPr>
+          <a:xfrm>
+            <a:off x="6053328" y="1710748"/>
+            <a:ext cx="2258568" cy="275729"/>
+          </a:xfrm>
+          <a:prstGeom prst="rect">
+            <a:avLst/>
+          </a:prstGeom>
+          <a:noFill/>
+        </p:spPr>
+        <p:txBody>
+          <a:bodyPr wrap="square" lIns="27432" tIns="12801" rIns="27432" bIns="12801" anchor="ctr">
+            <a:spAutoFit/>
+          </a:bodyPr>
+          <a:lstStyle/>
+          <a:p>
+            <a:pPr algn="l">
+              <a:lnSpc>
+                <a:spcPct val="106000"/>
+              </a:lnSpc>
+              <a:spcBef>
+                <a:spcPts val="0"/>
+              </a:spcBef>
+              <a:spcAft>
+                <a:spcPts val="0"/>
+              </a:spcAft>
+            </a:pPr>
+            <a:r>
+              <a:rPr sz="1600" b="1">
+                <a:solidFill>
+                  <a:srgbClr val="063352"/>
+                </a:solidFill>
+                <a:latin typeface="Calibri"/>
+              </a:rPr>
+              <a:t>DXA  →  Tile Copies</a:t>
+            </a:r>
+          </a:p>
+        </p:txBody>
+      </p:sp>
+      <p:sp>
+        <p:nvSpPr>
+          <p:cNvPr id="23" name="TextBox 22"/>
+          <p:cNvSpPr txBox="1"/>
+          <p:nvPr/>
+        </p:nvSpPr>
+        <p:spPr>
+          <a:xfrm>
+            <a:off x="6071616" y="2210993"/>
+            <a:ext cx="2194560" cy="244502"/>
+          </a:xfrm>
+          <a:prstGeom prst="rect">
+            <a:avLst/>
+          </a:prstGeom>
+          <a:noFill/>
+        </p:spPr>
+        <p:txBody>
+          <a:bodyPr wrap="square" lIns="27432" tIns="12801" rIns="27432" bIns="12801" anchor="ctr">
+            <a:spAutoFit/>
+          </a:bodyPr>
+          <a:lstStyle/>
+          <a:p>
+            <a:pPr algn="l">
+              <a:lnSpc>
+                <a:spcPct val="106000"/>
+              </a:lnSpc>
+              <a:spcBef>
+                <a:spcPts val="0"/>
+              </a:spcBef>
+              <a:spcAft>
+                <a:spcPts val="0"/>
+              </a:spcAft>
+            </a:pPr>
+            <a:r>
+              <a:rPr b="0">
+                <a:solidFill>
+                  <a:srgbClr val="17232C"/>
+                </a:solidFill>
+                <a:latin typeface="Calibri"/>
+              </a:rPr>
+              <a:t>Host descriptor programming</a:t>
+            </a:r>
+          </a:p>
+        </p:txBody>
+      </p:sp>
+      <p:cxnSp>
+        <p:nvCxnSpPr>
+          <p:cNvPr id="24" name="Connector 23"/>
+          <p:cNvCxnSpPr/>
+          <p:nvPr/>
+        </p:nvCxnSpPr>
+        <p:spPr>
+          <a:xfrm>
+            <a:off x="6108192" y="2584704"/>
+            <a:ext cx="2093976" cy="0"/>
+          </a:xfrm>
+          <a:prstGeom prst="line">
+            <a:avLst/>
+          </a:prstGeom>
+          <a:ln w="15240">
+            <a:solidFill>
+              <a:srgbClr val="C5D5E0"/>
+            </a:solidFill>
+          </a:ln>
+        </p:spPr>
+        <p:style>
+          <a:lnRef idx="2">
+            <a:schemeClr val="accent1"/>
+          </a:lnRef>
+          <a:fillRef idx="0">
+            <a:schemeClr val="accent1"/>
+          </a:fillRef>
+          <a:effectRef idx="1">
+            <a:schemeClr val="accent1"/>
+          </a:effectRef>
+          <a:fontRef idx="minor">
+            <a:schemeClr val="tx1"/>
+          </a:fontRef>
+        </p:style>
+      </p:cxnSp>
+      <p:sp>
+        <p:nvSpPr>
+          <p:cNvPr id="25" name="TextBox 24"/>
+          <p:cNvSpPr txBox="1"/>
+          <p:nvPr/>
+        </p:nvSpPr>
+        <p:spPr>
+          <a:xfrm>
+            <a:off x="6071616" y="2709341"/>
+            <a:ext cx="2194560" cy="244502"/>
+          </a:xfrm>
+          <a:prstGeom prst="rect">
+            <a:avLst/>
+          </a:prstGeom>
+          <a:noFill/>
+        </p:spPr>
+        <p:txBody>
+          <a:bodyPr wrap="square" lIns="27432" tIns="12801" rIns="27432" bIns="12801" anchor="ctr">
+            <a:spAutoFit/>
+          </a:bodyPr>
+          <a:lstStyle/>
+          <a:p>
+            <a:pPr algn="l">
+              <a:lnSpc>
+                <a:spcPct val="106000"/>
+              </a:lnSpc>
+              <a:spcBef>
+                <a:spcPts val="0"/>
+              </a:spcBef>
+              <a:spcAft>
+                <a:spcPts val="0"/>
+              </a:spcAft>
+            </a:pPr>
+            <a:r>
+              <a:rPr b="0">
+                <a:solidFill>
+                  <a:srgbClr val="17232C"/>
+                </a:solidFill>
+                <a:latin typeface="Calibri"/>
+              </a:rPr>
+              <a:t>2-D global → local</a:t>
+            </a:r>
+          </a:p>
+        </p:txBody>
+      </p:sp>
+      <p:sp>
+        <p:nvSpPr>
+          <p:cNvPr id="26" name="TextBox 25"/>
+          <p:cNvSpPr txBox="1"/>
+          <p:nvPr/>
+        </p:nvSpPr>
+        <p:spPr>
+          <a:xfrm>
+            <a:off x="6071616" y="3189401"/>
+            <a:ext cx="2194560" cy="244502"/>
+          </a:xfrm>
+          <a:prstGeom prst="rect">
+            <a:avLst/>
+          </a:prstGeom>
+          <a:noFill/>
+        </p:spPr>
+        <p:txBody>
+          <a:bodyPr wrap="square" lIns="27432" tIns="12801" rIns="27432" bIns="12801" anchor="ctr">
+            <a:spAutoFit/>
+          </a:bodyPr>
+          <a:lstStyle/>
+          <a:p>
+            <a:pPr algn="l">
+              <a:lnSpc>
+                <a:spcPct val="106000"/>
+              </a:lnSpc>
+              <a:spcBef>
+                <a:spcPts val="0"/>
+              </a:spcBef>
+              <a:spcAft>
+                <a:spcPts val="0"/>
+              </a:spcAft>
+            </a:pPr>
+            <a:r>
+              <a:rPr b="0">
+                <a:solidFill>
+                  <a:srgbClr val="47545D"/>
+                </a:solidFill>
+                <a:latin typeface="Calibri"/>
+              </a:rPr>
+              <a:t>expect_tx + barrier</a:t>
+            </a:r>
+          </a:p>
+        </p:txBody>
+      </p:sp>
+      <p:sp>
+        <p:nvSpPr>
+          <p:cNvPr id="29" name="Rounded Rectangle 28"/>
+          <p:cNvSpPr/>
+          <p:nvPr/>
+        </p:nvSpPr>
+        <p:spPr>
+          <a:xfrm>
+            <a:off x="640080" y="4242816"/>
+            <a:ext cx="7845552" cy="320040"/>
+          </a:xfrm>
+          <a:prstGeom prst="roundRect">
+            <a:avLst>
+              <a:gd name="adj" fmla="val 7000"/>
+            </a:avLst>
+          </a:prstGeom>
+          <a:solidFill>
+            <a:srgbClr val="E2F2F9"/>
+          </a:solidFill>
+          <a:ln w="8890">
+            <a:solidFill>
+              <a:srgbClr val="E2F2F9"/>
+            </a:solidFill>
+          </a:ln>
+        </p:spPr>
+        <p:style>
+          <a:lnRef idx="1">
+            <a:schemeClr val="accent1"/>
+          </a:lnRef>
+          <a:fillRef idx="3">
+            <a:schemeClr val="accent1"/>
+          </a:fillRef>
+          <a:effectRef idx="2">
+            <a:schemeClr val="accent1"/>
+          </a:effectRef>
+          <a:fontRef idx="minor">
+            <a:schemeClr val="lt1"/>
+          </a:fontRef>
+        </p:style>
+        <p:txBody>
+          <a:bodyPr rtlCol="0" anchor="ctr"/>
+          <a:lstStyle/>
+          <a:p>
+            <a:pPr algn="ctr"/>
+            <a:endParaRPr/>
+          </a:p>
+        </p:txBody>
+      </p:sp>
+      <p:sp>
+        <p:nvSpPr>
+          <p:cNvPr id="30" name="TextBox 29"/>
+          <p:cNvSpPr txBox="1"/>
+          <p:nvPr/>
+        </p:nvSpPr>
+        <p:spPr>
+          <a:xfrm>
+            <a:off x="749808" y="4261104"/>
+            <a:ext cx="7571231" cy="246888"/>
+          </a:xfrm>
+          <a:prstGeom prst="rect">
+            <a:avLst/>
+          </a:prstGeom>
+          <a:noFill/>
+        </p:spPr>
+        <p:txBody>
+          <a:bodyPr wrap="square" lIns="27432" tIns="12801" rIns="27432" bIns="12801" anchor="ctr">
+            <a:spAutoFit/>
+          </a:bodyPr>
+          <a:lstStyle/>
+          <a:p>
+            <a:pPr algn="l">
+              <a:lnSpc>
+                <a:spcPct val="106000"/>
+              </a:lnSpc>
+              <a:spcBef>
+                <a:spcPts val="0"/>
+              </a:spcBef>
+              <a:spcAft>
+                <a:spcPts val="0"/>
+              </a:spcAft>
+            </a:pPr>
+            <a:r>
+              <a:rPr sz="1030" b="1">
+                <a:solidFill>
+                  <a:srgbClr val="063352"/>
+                </a:solidFill>
+                <a:latin typeface="Consolas"/>
+              </a:rPr>
+              <a:t>./run.sh  [TCU + DXA SimX GEMM experiments E1 / E2 / E3]</a:t>
+            </a:r>
+          </a:p>
+        </p:txBody>
+      </p:sp>
+      <p:sp>
+        <p:nvSpPr>
+          <p:cNvPr id="31" name="TextBox 30"/>
+          <p:cNvSpPr txBox="1"/>
+          <p:nvPr/>
+        </p:nvSpPr>
+        <p:spPr>
+          <a:xfrm>
+            <a:off x="640080" y="4625035"/>
+            <a:ext cx="7680960" cy="201168"/>
+          </a:xfrm>
+          <a:prstGeom prst="rect">
+            <a:avLst/>
+          </a:prstGeom>
+          <a:noFill/>
+        </p:spPr>
+        <p:txBody>
+          <a:bodyPr wrap="square" lIns="27432" tIns="12801" rIns="27432" bIns="12801" anchor="ctr">
+            <a:spAutoFit/>
+          </a:bodyPr>
+          <a:lstStyle/>
+          <a:p>
+            <a:pPr algn="l">
+              <a:lnSpc>
+                <a:spcPct val="106000"/>
+              </a:lnSpc>
+              <a:spcBef>
+                <a:spcPts val="0"/>
+              </a:spcBef>
+              <a:spcAft>
+                <a:spcPts val="0"/>
+              </a:spcAft>
+            </a:pPr>
+            <a:r>
+              <a:rPr sz="919" b="0">
+                <a:solidFill>
+                  <a:srgbClr val="47545D"/>
+                </a:solidFill>
+                <a:latin typeface="Calibri"/>
+                <a:hlinkClick r:id="rId3"/>
+              </a:rPr>
+              <a:t>Source: Volt v1.1  ·  docs/7.4.tutorial_tensor_core.md</a:t>
+            </a:r>
+          </a:p>
+        </p:txBody>
+      </p:sp>
+      <p:sp>
+        <p:nvSpPr>
+          <p:cNvPr id="33" name="제목 32">
+            <a:extLst>
+              <a:ext uri="{FF2B5EF4-FFF2-40B4-BE49-F238E27FC236}">
+                <a16:creationId xmlns:a16="http://schemas.microsoft.com/office/drawing/2014/main" id="{9A56A8F8-AEBC-DF44-EEDF-4008BA1D0137}"/>
+              </a:ext>
+            </a:extLst>
+          </p:cNvPr>
+          <p:cNvSpPr>
+            <a:spLocks noGrp="1"/>
+          </p:cNvSpPr>
+          <p:nvPr>
+            <p:ph type="title"/>
+          </p:nvPr>
+        </p:nvSpPr>
+        <p:spPr/>
+        <p:txBody>
+          <a:bodyPr>
+            <a:normAutofit fontScale="90000"/>
+          </a:bodyPr>
+          <a:lstStyle/>
+          <a:p>
+            <a:r>
+              <a:rPr lang="en" altLang="ko-Kore-KR" sz="3600" b="1" dirty="0">
+                <a:solidFill>
+                  <a:srgbClr val="000000"/>
+                </a:solidFill>
+                <a:latin typeface="Calibri"/>
+              </a:rPr>
+              <a:t>Tutorial 4: Tensor Cores, WGMMA and DXA</a:t>
+            </a:r>
+            <a:endParaRPr lang="ko-Kore-KR" altLang="en-US" dirty="0"/>
+          </a:p>
+        </p:txBody>
+      </p:sp>
+    </p:spTree>
+  </p:cSld>
+  <p:clrMapOvr>
+    <a:masterClrMapping/>
+  </p:clrMapOvr>
+</p:sld>
+</file>
+
+<file path=ppt/slides/slide21.xml><?xml version="1.0" encoding="utf-8"?>
+<p:sld xmlns:a="http://schemas.openxmlformats.org/drawingml/2006/main" xmlns:r="http://schemas.openxmlformats.org/officeDocument/2006/relationships" xmlns:p="http://schemas.openxmlformats.org/presentationml/2006/main">
+  <p:cSld>
+    <p:spTree>
+      <p:nvGrpSpPr>
+        <p:cNvPr id="1" name=""/>
+        <p:cNvGrpSpPr/>
+        <p:nvPr/>
+      </p:nvGrpSpPr>
+      <p:grpSpPr>
+        <a:xfrm>
+          <a:off x="0" y="0"/>
+          <a:ext cx="0" cy="0"/>
+          <a:chOff x="0" y="0"/>
+          <a:chExt cx="0" cy="0"/>
+        </a:xfrm>
+      </p:grpSpPr>
+      <p:sp>
+        <p:nvSpPr>
+          <p:cNvPr id="2" name="제목 1">
+            <a:extLst>
+              <a:ext uri="{FF2B5EF4-FFF2-40B4-BE49-F238E27FC236}">
+                <a16:creationId xmlns:a16="http://schemas.microsoft.com/office/drawing/2014/main" id="{330A76B4-F0AC-64EA-0EB3-EF91FC65C828}"/>
+              </a:ext>
+            </a:extLst>
+          </p:cNvPr>
+          <p:cNvSpPr>
+            <a:spLocks noGrp="1"/>
+          </p:cNvSpPr>
+          <p:nvPr>
+            <p:ph type="title"/>
+          </p:nvPr>
+        </p:nvSpPr>
+        <p:spPr/>
+        <p:txBody>
+          <a:bodyPr/>
+          <a:lstStyle/>
+          <a:p>
+            <a:r>
+              <a:rPr kumimoji="1" lang="en-US" altLang="ko-Kore-KR" dirty="0"/>
+              <a:t>2026 Publications</a:t>
+            </a:r>
+            <a:endParaRPr kumimoji="1" lang="ko-Kore-KR" altLang="en-US" dirty="0"/>
+          </a:p>
+        </p:txBody>
+      </p:sp>
+      <p:sp>
+        <p:nvSpPr>
+          <p:cNvPr id="3" name="내용 개체 틀 2">
+            <a:extLst>
+              <a:ext uri="{FF2B5EF4-FFF2-40B4-BE49-F238E27FC236}">
+                <a16:creationId xmlns:a16="http://schemas.microsoft.com/office/drawing/2014/main" id="{323C88A3-FAEF-1031-521E-C60F42D92D55}"/>
+              </a:ext>
+            </a:extLst>
+          </p:cNvPr>
+          <p:cNvSpPr>
+            <a:spLocks noGrp="1"/>
+          </p:cNvSpPr>
+          <p:nvPr>
+            <p:ph idx="1"/>
+          </p:nvPr>
+        </p:nvSpPr>
+        <p:spPr>
+          <a:xfrm>
+            <a:off x="628649" y="1200004"/>
+            <a:ext cx="8090807" cy="3432718"/>
+          </a:xfrm>
+        </p:spPr>
+        <p:txBody>
+          <a:bodyPr>
+            <a:noAutofit/>
+          </a:bodyPr>
+          <a:lstStyle/>
+          <a:p>
+            <a:pPr algn="l"/>
+            <a:r>
+              <a:rPr lang="en" altLang="ko-Kore-KR" sz="1600" b="1" dirty="0">
+                <a:effectLst/>
+              </a:rPr>
+              <a:t>Inside VOLT: Designing an Open-Source GPU Compiler</a:t>
+            </a:r>
+          </a:p>
+          <a:p>
+            <a:pPr lvl="1"/>
+            <a:r>
+              <a:rPr lang="en" altLang="ko-Kore-KR" sz="1400" dirty="0" err="1">
+                <a:effectLst/>
+              </a:rPr>
+              <a:t>Shinnung</a:t>
+            </a:r>
+            <a:r>
+              <a:rPr lang="en" altLang="ko-Kore-KR" sz="1400" dirty="0">
+                <a:effectLst/>
+              </a:rPr>
+              <a:t> Jeong, </a:t>
+            </a:r>
+            <a:r>
+              <a:rPr lang="en" altLang="ko-Kore-KR" sz="1400" dirty="0" err="1">
+                <a:effectLst/>
+              </a:rPr>
+              <a:t>Chihyo</a:t>
+            </a:r>
+            <a:r>
+              <a:rPr lang="en" altLang="ko-Kore-KR" sz="1400" dirty="0">
+                <a:effectLst/>
+              </a:rPr>
+              <a:t> Ahn, </a:t>
+            </a:r>
+            <a:r>
+              <a:rPr lang="en" altLang="ko-Kore-KR" sz="1400" dirty="0" err="1">
+                <a:effectLst/>
+              </a:rPr>
+              <a:t>Huanzhi</a:t>
+            </a:r>
+            <a:r>
+              <a:rPr lang="en" altLang="ko-Kore-KR" sz="1400" dirty="0">
+                <a:effectLst/>
+              </a:rPr>
+              <a:t> Pu, </a:t>
+            </a:r>
+            <a:r>
+              <a:rPr lang="en" altLang="ko-Kore-KR" sz="1400" dirty="0" err="1">
+                <a:effectLst/>
+              </a:rPr>
+              <a:t>Jisheng</a:t>
+            </a:r>
+            <a:r>
+              <a:rPr lang="en" altLang="ko-Kore-KR" sz="1400" dirty="0">
+                <a:effectLst/>
+              </a:rPr>
+              <a:t> Zhao, </a:t>
+            </a:r>
+            <a:r>
+              <a:rPr lang="en" altLang="ko-Kore-KR" sz="1400" dirty="0" err="1">
+                <a:effectLst/>
+              </a:rPr>
+              <a:t>Hyesoon</a:t>
+            </a:r>
+            <a:r>
+              <a:rPr lang="en" altLang="ko-Kore-KR" sz="1400" dirty="0">
+                <a:effectLst/>
+              </a:rPr>
+              <a:t> Kim, Blaise Tine</a:t>
+            </a:r>
+            <a:br>
+              <a:rPr lang="en" altLang="ko-Kore-KR" sz="1400" dirty="0">
+                <a:effectLst/>
+              </a:rPr>
+            </a:br>
+            <a:r>
+              <a:rPr lang="en" altLang="ko-Kore-KR" sz="1400" dirty="0">
+                <a:effectLst/>
+              </a:rPr>
+              <a:t>The ACM SIGPLAN 2026 International Conference on Compiler Construction (CC), Feb 2026</a:t>
+            </a:r>
+          </a:p>
+          <a:p>
+            <a:pPr algn="l"/>
+            <a:r>
+              <a:rPr lang="en" altLang="ko-Kore-KR" sz="1600" b="1" dirty="0" err="1">
+                <a:effectLst/>
+              </a:rPr>
+              <a:t>FastTrackGPU</a:t>
+            </a:r>
+            <a:r>
+              <a:rPr lang="en" altLang="ko-Kore-KR" sz="1600" b="1" dirty="0">
+                <a:effectLst/>
+              </a:rPr>
+              <a:t>: Static-Analysis–Guided Analytical Modeling for Softcore GPUs </a:t>
+            </a:r>
+          </a:p>
+          <a:p>
+            <a:pPr lvl="1"/>
+            <a:r>
+              <a:rPr lang="en" altLang="ko-Kore-KR" sz="1400" dirty="0" err="1">
+                <a:effectLst/>
+              </a:rPr>
+              <a:t>Chihyo</a:t>
+            </a:r>
+            <a:r>
+              <a:rPr lang="en" altLang="ko-Kore-KR" sz="1400" dirty="0">
+                <a:effectLst/>
+              </a:rPr>
+              <a:t> Ahn, </a:t>
+            </a:r>
+            <a:r>
+              <a:rPr lang="en" altLang="ko-Kore-KR" sz="1400" dirty="0" err="1">
+                <a:effectLst/>
+              </a:rPr>
+              <a:t>Shinnung</a:t>
+            </a:r>
+            <a:r>
+              <a:rPr lang="en" altLang="ko-Kore-KR" sz="1400" dirty="0">
+                <a:effectLst/>
+              </a:rPr>
+              <a:t> Jeong, Liam Paul Cooper, </a:t>
+            </a:r>
+            <a:r>
+              <a:rPr lang="en" altLang="ko-Kore-KR" sz="1400" dirty="0" err="1">
+                <a:effectLst/>
+              </a:rPr>
+              <a:t>Ruobing</a:t>
+            </a:r>
+            <a:r>
+              <a:rPr lang="en" altLang="ko-Kore-KR" sz="1400" dirty="0">
+                <a:effectLst/>
+              </a:rPr>
+              <a:t> Han, </a:t>
+            </a:r>
+            <a:r>
+              <a:rPr lang="en" altLang="ko-Kore-KR" sz="1400" dirty="0" err="1">
+                <a:effectLst/>
+              </a:rPr>
+              <a:t>Huanzhi</a:t>
+            </a:r>
+            <a:r>
+              <a:rPr lang="en" altLang="ko-Kore-KR" sz="1400" dirty="0">
+                <a:effectLst/>
+              </a:rPr>
+              <a:t> Pu, Nicholas </a:t>
+            </a:r>
+            <a:r>
+              <a:rPr lang="en" altLang="ko-Kore-KR" sz="1400" dirty="0" err="1">
+                <a:effectLst/>
+              </a:rPr>
+              <a:t>Parnenzini</a:t>
+            </a:r>
+            <a:r>
+              <a:rPr lang="en" altLang="ko-Kore-KR" sz="1400" dirty="0">
+                <a:effectLst/>
+              </a:rPr>
+              <a:t>, </a:t>
+            </a:r>
+            <a:r>
+              <a:rPr lang="en" altLang="ko-Kore-KR" sz="1400" dirty="0" err="1">
+                <a:effectLst/>
+              </a:rPr>
+              <a:t>Jisheng</a:t>
+            </a:r>
+            <a:r>
+              <a:rPr lang="en" altLang="ko-Kore-KR" sz="1400" dirty="0">
+                <a:effectLst/>
+              </a:rPr>
+              <a:t> Zhao, Blaise Tine, </a:t>
+            </a:r>
+            <a:r>
+              <a:rPr lang="en" altLang="ko-Kore-KR" sz="1400" dirty="0" err="1">
+                <a:effectLst/>
+              </a:rPr>
+              <a:t>Hyesoon</a:t>
+            </a:r>
+            <a:r>
+              <a:rPr lang="en" altLang="ko-Kore-KR" sz="1400" dirty="0">
+                <a:effectLst/>
+              </a:rPr>
+              <a:t> Kim</a:t>
+            </a:r>
+            <a:br>
+              <a:rPr lang="en" altLang="ko-Kore-KR" sz="1400" dirty="0">
+                <a:effectLst/>
+              </a:rPr>
+            </a:br>
+            <a:r>
+              <a:rPr lang="en" altLang="ko-Kore-KR" sz="1400" dirty="0">
+                <a:effectLst/>
+              </a:rPr>
+              <a:t>IEEE Computer Architecture Letters (CAL), 2026</a:t>
+            </a:r>
+          </a:p>
+          <a:p>
+            <a:pPr algn="l"/>
+            <a:r>
+              <a:rPr lang="en" altLang="ko-Kore-KR" sz="1600" b="1" dirty="0">
+                <a:effectLst/>
+              </a:rPr>
+              <a:t>Toward End-to-End ML Support on Vortex</a:t>
+            </a:r>
+          </a:p>
+          <a:p>
+            <a:pPr lvl="1"/>
+            <a:r>
+              <a:rPr lang="en" altLang="ko-Kore-KR" sz="1400" dirty="0" err="1">
+                <a:effectLst/>
+              </a:rPr>
+              <a:t>Shinnung</a:t>
+            </a:r>
+            <a:r>
+              <a:rPr lang="en" altLang="ko-Kore-KR" sz="1400" dirty="0">
+                <a:effectLst/>
+              </a:rPr>
+              <a:t> Jeong, </a:t>
+            </a:r>
+            <a:r>
+              <a:rPr lang="en" altLang="ko-Kore-KR" sz="1400" dirty="0" err="1">
+                <a:effectLst/>
+              </a:rPr>
+              <a:t>Chihyo</a:t>
+            </a:r>
+            <a:r>
+              <a:rPr lang="en" altLang="ko-Kore-KR" sz="1400" dirty="0">
+                <a:effectLst/>
+              </a:rPr>
+              <a:t> Ahn, Sai Hemanth Reddy </a:t>
+            </a:r>
+            <a:r>
+              <a:rPr lang="en" altLang="ko-Kore-KR" sz="1400" dirty="0" err="1">
+                <a:effectLst/>
+              </a:rPr>
+              <a:t>Bheemreddy,Liam</a:t>
+            </a:r>
+            <a:r>
+              <a:rPr lang="en" altLang="ko-Kore-KR" sz="1400" dirty="0">
+                <a:effectLst/>
+              </a:rPr>
+              <a:t> Cooper, </a:t>
+            </a:r>
+            <a:r>
+              <a:rPr lang="en" altLang="ko-Kore-KR" sz="1400" dirty="0" err="1">
+                <a:effectLst/>
+              </a:rPr>
+              <a:t>Krishil</a:t>
+            </a:r>
+            <a:r>
+              <a:rPr lang="en" altLang="ko-Kore-KR" sz="1400" dirty="0">
+                <a:effectLst/>
+              </a:rPr>
+              <a:t> Gandhi, </a:t>
+            </a:r>
+            <a:r>
+              <a:rPr lang="en" altLang="ko-Kore-KR" sz="1400" dirty="0" err="1">
+                <a:effectLst/>
+              </a:rPr>
+              <a:t>Chulhyung</a:t>
+            </a:r>
+            <a:r>
+              <a:rPr lang="en" altLang="ko-Kore-KR" sz="1400" dirty="0">
+                <a:effectLst/>
+              </a:rPr>
+              <a:t> Park, Vincent Pham, </a:t>
+            </a:r>
+            <a:r>
+              <a:rPr lang="en" altLang="ko-Kore-KR" sz="1400" dirty="0" err="1">
+                <a:effectLst/>
+              </a:rPr>
+              <a:t>Huanzhi</a:t>
+            </a:r>
+            <a:r>
+              <a:rPr lang="en" altLang="ko-Kore-KR" sz="1400" dirty="0">
+                <a:effectLst/>
+              </a:rPr>
+              <a:t> Pu, Saurabh Singh, Mitul Tandon, </a:t>
+            </a:r>
+            <a:r>
+              <a:rPr lang="en" altLang="ko-Kore-KR" sz="1400" dirty="0" err="1">
+                <a:effectLst/>
+              </a:rPr>
+              <a:t>Jisheng</a:t>
+            </a:r>
+            <a:r>
+              <a:rPr lang="en" altLang="ko-Kore-KR" sz="1400" dirty="0">
+                <a:effectLst/>
+              </a:rPr>
+              <a:t> Zhao, and </a:t>
+            </a:r>
+            <a:r>
+              <a:rPr lang="en" altLang="ko-Kore-KR" sz="1400" dirty="0" err="1">
+                <a:effectLst/>
+              </a:rPr>
+              <a:t>Hyesoon</a:t>
+            </a:r>
+            <a:r>
+              <a:rPr lang="en" altLang="ko-Kore-KR" sz="1400" dirty="0">
+                <a:effectLst/>
+              </a:rPr>
+              <a:t> Kim</a:t>
+            </a:r>
+            <a:br>
+              <a:rPr lang="en" altLang="ko-Kore-KR" sz="1400" dirty="0">
+                <a:effectLst/>
+              </a:rPr>
+            </a:br>
+            <a:r>
+              <a:rPr lang="en" altLang="ko-Kore-KR" sz="1400" dirty="0">
+                <a:effectLst/>
+              </a:rPr>
+              <a:t>Open-Source Computer Architecture Research (OSCAR), 2026</a:t>
+            </a:r>
+          </a:p>
+          <a:p>
+            <a:pPr algn="l"/>
+            <a:r>
+              <a:rPr lang="en" altLang="ko-Kore-KR" sz="1600" b="1" dirty="0" err="1">
+                <a:effectLst/>
+              </a:rPr>
+              <a:t>CuLifter</a:t>
+            </a:r>
+            <a:r>
+              <a:rPr lang="en" altLang="ko-Kore-KR" sz="1600" b="1" dirty="0">
+                <a:effectLst/>
+              </a:rPr>
+              <a:t>: Lifting GPU Binaries to Typed IR</a:t>
+            </a:r>
+          </a:p>
+          <a:p>
+            <a:pPr lvl="1"/>
+            <a:r>
+              <a:rPr lang="en" altLang="ko-Kore-KR" sz="1400" dirty="0" err="1">
+                <a:effectLst/>
+              </a:rPr>
+              <a:t>Jisheng</a:t>
+            </a:r>
+            <a:r>
+              <a:rPr lang="en" altLang="ko-Kore-KR" sz="1400" dirty="0">
+                <a:effectLst/>
+              </a:rPr>
+              <a:t> Zhao*, </a:t>
+            </a:r>
+            <a:r>
+              <a:rPr lang="en" altLang="ko-Kore-KR" sz="1400" dirty="0" err="1">
+                <a:effectLst/>
+              </a:rPr>
+              <a:t>Huanzhi</a:t>
+            </a:r>
+            <a:r>
+              <a:rPr lang="en" altLang="ko-Kore-KR" sz="1400" dirty="0">
+                <a:effectLst/>
+              </a:rPr>
+              <a:t> Pu*, </a:t>
+            </a:r>
+            <a:r>
+              <a:rPr lang="en" altLang="ko-Kore-KR" sz="1400" dirty="0" err="1">
+                <a:effectLst/>
+              </a:rPr>
+              <a:t>Shinnung</a:t>
+            </a:r>
+            <a:r>
+              <a:rPr lang="en" altLang="ko-Kore-KR" sz="1400" dirty="0">
+                <a:effectLst/>
+              </a:rPr>
+              <a:t> Jeong, </a:t>
+            </a:r>
+            <a:r>
+              <a:rPr lang="en" altLang="ko-Kore-KR" sz="1400" dirty="0" err="1">
+                <a:effectLst/>
+              </a:rPr>
+              <a:t>Chihyo</a:t>
+            </a:r>
+            <a:r>
+              <a:rPr lang="en" altLang="ko-Kore-KR" sz="1400" dirty="0">
+                <a:effectLst/>
+              </a:rPr>
+              <a:t> Ahn, and </a:t>
+            </a:r>
+            <a:r>
+              <a:rPr lang="en" altLang="ko-Kore-KR" sz="1400" dirty="0" err="1">
+                <a:effectLst/>
+              </a:rPr>
+              <a:t>Hyesoon</a:t>
+            </a:r>
+            <a:r>
+              <a:rPr lang="en" altLang="ko-Kore-KR" sz="1400" dirty="0">
+                <a:effectLst/>
+              </a:rPr>
+              <a:t> Kim</a:t>
+            </a:r>
+            <a:br>
+              <a:rPr lang="en" altLang="ko-Kore-KR" sz="1400" dirty="0">
+                <a:effectLst/>
+              </a:rPr>
+            </a:br>
+            <a:r>
+              <a:rPr lang="en" altLang="ko-Kore-KR" sz="1400" dirty="0">
+                <a:effectLst/>
+              </a:rPr>
+              <a:t>59th IEEE/ACM International Symposium on Microarchitecture® (MICRO), 2026</a:t>
+            </a:r>
+          </a:p>
+          <a:p>
+            <a:pPr marL="0" indent="0">
+              <a:buNone/>
+            </a:pPr>
+            <a:endParaRPr lang="en" altLang="ko-Kore-KR" sz="1600" dirty="0">
+              <a:effectLst/>
+            </a:endParaRPr>
+          </a:p>
+        </p:txBody>
+      </p:sp>
+      <p:sp>
+        <p:nvSpPr>
+          <p:cNvPr id="4" name="슬라이드 번호 개체 틀 3">
+            <a:extLst>
+              <a:ext uri="{FF2B5EF4-FFF2-40B4-BE49-F238E27FC236}">
+                <a16:creationId xmlns:a16="http://schemas.microsoft.com/office/drawing/2014/main" id="{D9A175D6-EEE4-7FFC-48CB-FA576C2FEC73}"/>
+              </a:ext>
+            </a:extLst>
+          </p:cNvPr>
+          <p:cNvSpPr>
+            <a:spLocks noGrp="1"/>
+          </p:cNvSpPr>
+          <p:nvPr>
+            <p:ph type="sldNum" sz="quarter" idx="4"/>
+          </p:nvPr>
+        </p:nvSpPr>
+        <p:spPr/>
+        <p:txBody>
+          <a:bodyPr/>
+          <a:lstStyle/>
+          <a:p>
+            <a:fld id="{C5E74F64-7780-9C4F-983D-3F814FF801CD}" type="slidenum">
+              <a:rPr lang="en-US" smtClean="0"/>
+              <a:t>21</a:t>
+            </a:fld>
+            <a:endParaRPr lang="en-US" dirty="0"/>
+          </a:p>
+        </p:txBody>
+      </p:sp>
+    </p:spTree>
+    <p:extLst>
+      <p:ext uri="{BB962C8B-B14F-4D97-AF65-F5344CB8AC3E}">
+        <p14:creationId xmlns:p14="http://schemas.microsoft.com/office/powerpoint/2010/main" val="2813626593"/>
+      </p:ext>
+    </p:extLst>
+  </p:cSld>
+  <p:clrMapOvr>
+    <a:masterClrMapping/>
+  </p:clrMapOvr>
+</p:sld>
+</file>
+
+<file path=ppt/slides/slide22.xml><?xml version="1.0" encoding="utf-8"?>
+<p:sld xmlns:a="http://schemas.openxmlformats.org/drawingml/2006/main" xmlns:r="http://schemas.openxmlformats.org/officeDocument/2006/relationships" xmlns:p="http://schemas.openxmlformats.org/presentationml/2006/main">
+  <p:cSld>
+    <p:spTree>
+      <p:nvGrpSpPr>
+        <p:cNvPr id="1" name=""/>
+        <p:cNvGrpSpPr/>
+        <p:nvPr/>
+      </p:nvGrpSpPr>
+      <p:grpSpPr>
+        <a:xfrm>
+          <a:off x="0" y="0"/>
+          <a:ext cx="0" cy="0"/>
+          <a:chOff x="0" y="0"/>
+          <a:chExt cx="0" cy="0"/>
+        </a:xfrm>
+      </p:grpSpPr>
+      <p:sp>
+        <p:nvSpPr>
+          <p:cNvPr id="2" name="제목 1">
+            <a:extLst>
+              <a:ext uri="{FF2B5EF4-FFF2-40B4-BE49-F238E27FC236}">
+                <a16:creationId xmlns:a16="http://schemas.microsoft.com/office/drawing/2014/main" id="{10C83B1F-E3DE-8098-5EB4-18D937322FC9}"/>
+              </a:ext>
+            </a:extLst>
+          </p:cNvPr>
+          <p:cNvSpPr>
+            <a:spLocks noGrp="1"/>
+          </p:cNvSpPr>
+          <p:nvPr>
+            <p:ph type="title"/>
+          </p:nvPr>
+        </p:nvSpPr>
+        <p:spPr/>
+        <p:txBody>
+          <a:bodyPr>
+            <a:normAutofit fontScale="90000"/>
+          </a:bodyPr>
+          <a:lstStyle/>
+          <a:p>
+            <a:r>
+              <a:rPr kumimoji="1" lang="en-US" altLang="ko-Kore-KR" dirty="0" err="1"/>
+              <a:t>CuLifter</a:t>
+            </a:r>
+            <a:r>
+              <a:rPr kumimoji="1" lang="en-US" altLang="ko-Kore-KR" dirty="0"/>
+              <a:t> (Micro26, Day 2 Session 6A)</a:t>
+            </a:r>
+            <a:endParaRPr kumimoji="1" lang="ko-Kore-KR" altLang="en-US" dirty="0"/>
+          </a:p>
+        </p:txBody>
+      </p:sp>
+      <p:sp>
+        <p:nvSpPr>
+          <p:cNvPr id="3" name="내용 개체 틀 2">
+            <a:extLst>
+              <a:ext uri="{FF2B5EF4-FFF2-40B4-BE49-F238E27FC236}">
+                <a16:creationId xmlns:a16="http://schemas.microsoft.com/office/drawing/2014/main" id="{9866A3F3-528D-6DF2-33ED-2CB746BAF460}"/>
+              </a:ext>
+            </a:extLst>
+          </p:cNvPr>
+          <p:cNvSpPr>
+            <a:spLocks noGrp="1"/>
+          </p:cNvSpPr>
+          <p:nvPr>
+            <p:ph idx="1"/>
+          </p:nvPr>
+        </p:nvSpPr>
+        <p:spPr>
+          <a:xfrm>
+            <a:off x="628650" y="1200004"/>
+            <a:ext cx="8373836" cy="3432718"/>
+          </a:xfrm>
+        </p:spPr>
+        <p:txBody>
+          <a:bodyPr>
+            <a:normAutofit/>
+          </a:bodyPr>
+          <a:lstStyle/>
+          <a:p>
+            <a:r>
+              <a:rPr lang="en" altLang="ko-Kore-KR" sz="1600" b="1" dirty="0"/>
+              <a:t>GPU Binary Type Recovery</a:t>
+            </a:r>
+          </a:p>
+          <a:p>
+            <a:pPr lvl="1"/>
+            <a:r>
+              <a:rPr lang="en" altLang="ko-Kore-KR" sz="1400" dirty="0"/>
+              <a:t>Identify type recovery as the central challenge of GPU binary lifting</a:t>
+            </a:r>
+          </a:p>
+          <a:p>
+            <a:r>
+              <a:rPr lang="en" altLang="ko-Kore-KR" sz="1600" b="1" dirty="0"/>
+              <a:t>SIMT-Aware Structure </a:t>
+            </a:r>
+            <a:r>
+              <a:rPr lang="en" altLang="ko-Kore-KR" sz="1600" b="1" dirty="0" err="1"/>
+              <a:t>Reconstructio</a:t>
+            </a:r>
+            <a:r>
+              <a:rPr lang="en-US" altLang="ko-Kore-KR" sz="1600" b="1" dirty="0"/>
+              <a:t>n</a:t>
+            </a:r>
+            <a:endParaRPr lang="en" altLang="ko-Kore-KR" sz="1600" b="1" dirty="0"/>
+          </a:p>
+          <a:p>
+            <a:pPr lvl="1"/>
+            <a:r>
+              <a:rPr lang="en" altLang="ko-Kore-KR" sz="1400" dirty="0"/>
+              <a:t>Recover control flow and SSA from SASS, handling SIMT-specific constructs and multi-instruction patterns</a:t>
+            </a:r>
+          </a:p>
+          <a:p>
+            <a:r>
+              <a:rPr lang="en" altLang="ko-Kore-KR" sz="1600" b="1" dirty="0"/>
+              <a:t>End-to-End SASS-to-LLVM IR Lifting</a:t>
+            </a:r>
+          </a:p>
+          <a:p>
+            <a:pPr lvl="1"/>
+            <a:r>
+              <a:rPr lang="en" altLang="ko-Kore-KR" sz="1400" dirty="0"/>
+              <a:t>Support multiple GPU generations (SM75–SM120), enabling compiler analysis and cross-platform</a:t>
+            </a:r>
+          </a:p>
+          <a:p>
+            <a:r>
+              <a:rPr lang="en" altLang="ko-Kore-KR" sz="1600" b="1" dirty="0"/>
+              <a:t>Comprehensive Evaluation</a:t>
+            </a:r>
+          </a:p>
+          <a:p>
+            <a:pPr lvl="1"/>
+            <a:r>
+              <a:rPr lang="en" altLang="ko-Kore-KR" sz="1400" dirty="0"/>
+              <a:t>11,977 kernels across 8 benchmark suites, achieving 96.3% exe correctness among 3,584 kernels</a:t>
+            </a:r>
+          </a:p>
+        </p:txBody>
+      </p:sp>
+      <p:sp>
+        <p:nvSpPr>
+          <p:cNvPr id="4" name="슬라이드 번호 개체 틀 3">
+            <a:extLst>
+              <a:ext uri="{FF2B5EF4-FFF2-40B4-BE49-F238E27FC236}">
+                <a16:creationId xmlns:a16="http://schemas.microsoft.com/office/drawing/2014/main" id="{C7CB1920-14B6-5E34-72A0-838A04FB3C45}"/>
+              </a:ext>
+            </a:extLst>
+          </p:cNvPr>
+          <p:cNvSpPr>
+            <a:spLocks noGrp="1"/>
+          </p:cNvSpPr>
+          <p:nvPr>
+            <p:ph type="sldNum" sz="quarter" idx="4"/>
+          </p:nvPr>
+        </p:nvSpPr>
+        <p:spPr/>
+        <p:txBody>
+          <a:bodyPr/>
+          <a:lstStyle/>
+          <a:p>
+            <a:fld id="{C5E74F64-7780-9C4F-983D-3F814FF801CD}" type="slidenum">
+              <a:rPr lang="en-US" smtClean="0"/>
+              <a:t>22</a:t>
+            </a:fld>
+            <a:endParaRPr lang="en-US" dirty="0"/>
+          </a:p>
+        </p:txBody>
+      </p:sp>
+      <p:pic>
+        <p:nvPicPr>
+          <p:cNvPr id="43" name="그림 42">
+            <a:extLst>
+              <a:ext uri="{FF2B5EF4-FFF2-40B4-BE49-F238E27FC236}">
+                <a16:creationId xmlns:a16="http://schemas.microsoft.com/office/drawing/2014/main" id="{C4907553-01C9-CE60-6065-0882CEDBC247}"/>
+              </a:ext>
+            </a:extLst>
+          </p:cNvPr>
+          <p:cNvPicPr>
+            <a:picLocks noChangeAspect="1"/>
+          </p:cNvPicPr>
+          <p:nvPr/>
+        </p:nvPicPr>
+        <p:blipFill>
+          <a:blip r:embed="rId3"/>
+          <a:stretch>
+            <a:fillRect/>
+          </a:stretch>
+        </p:blipFill>
+        <p:spPr>
+          <a:xfrm>
+            <a:off x="913039" y="3564174"/>
+            <a:ext cx="7317921" cy="1409662"/>
+          </a:xfrm>
+          <a:prstGeom prst="rect">
+            <a:avLst/>
+          </a:prstGeom>
+        </p:spPr>
+      </p:pic>
+    </p:spTree>
+    <p:extLst>
+      <p:ext uri="{BB962C8B-B14F-4D97-AF65-F5344CB8AC3E}">
+        <p14:creationId xmlns:p14="http://schemas.microsoft.com/office/powerpoint/2010/main" val="4279990483"/>
+      </p:ext>
+    </p:extLst>
+  </p:cSld>
+  <p:clrMapOvr>
+    <a:masterClrMapping/>
+  </p:clrMapOvr>
+</p:sld>
+</file>
+
+<file path=ppt/slides/slide23.xml><?xml version="1.0" encoding="utf-8"?>
+<p:sld xmlns:a="http://schemas.openxmlformats.org/drawingml/2006/main" xmlns:r="http://schemas.openxmlformats.org/officeDocument/2006/relationships" xmlns:p="http://schemas.openxmlformats.org/presentationml/2006/main">
+  <p:cSld>
+    <p:spTree>
+      <p:nvGrpSpPr>
+        <p:cNvPr id="1" name=""/>
+        <p:cNvGrpSpPr/>
+        <p:nvPr/>
+      </p:nvGrpSpPr>
+      <p:grpSpPr>
+        <a:xfrm>
+          <a:off x="0" y="0"/>
+          <a:ext cx="0" cy="0"/>
+          <a:chOff x="0" y="0"/>
+          <a:chExt cx="0" cy="0"/>
+        </a:xfrm>
+      </p:grpSpPr>
+      <p:sp>
+        <p:nvSpPr>
+          <p:cNvPr id="2" name="제목 1">
+            <a:extLst>
+              <a:ext uri="{FF2B5EF4-FFF2-40B4-BE49-F238E27FC236}">
+                <a16:creationId xmlns:a16="http://schemas.microsoft.com/office/drawing/2014/main" id="{17E9D4B6-0515-9420-2759-6A4AE6D941C0}"/>
+              </a:ext>
+            </a:extLst>
+          </p:cNvPr>
+          <p:cNvSpPr>
+            <a:spLocks noGrp="1"/>
+          </p:cNvSpPr>
+          <p:nvPr>
+            <p:ph type="ctrTitle"/>
+          </p:nvPr>
+        </p:nvSpPr>
+        <p:spPr>
+          <a:xfrm>
+            <a:off x="1143000" y="504889"/>
+            <a:ext cx="6858000" cy="2358053"/>
+          </a:xfrm>
+        </p:spPr>
+        <p:txBody>
+          <a:bodyPr/>
+          <a:lstStyle/>
+          <a:p>
+            <a:r>
+              <a:rPr kumimoji="1" lang="en-US" altLang="ko-Kore-KR" dirty="0"/>
+              <a:t>Thank you </a:t>
+            </a:r>
+            <a:br>
+              <a:rPr kumimoji="1" lang="en-US" altLang="ko-Kore-KR" dirty="0"/>
+            </a:br>
+            <a:r>
+              <a:rPr kumimoji="1" lang="en-US" altLang="ko-Kore-KR" sz="1800" dirty="0"/>
+              <a:t>https://</a:t>
+            </a:r>
+            <a:r>
+              <a:rPr kumimoji="1" lang="en-US" altLang="ko-Kore-KR" sz="1800" dirty="0" err="1"/>
+              <a:t>github.com</a:t>
+            </a:r>
+            <a:r>
+              <a:rPr kumimoji="1" lang="en-US" altLang="ko-Kore-KR" sz="1800" dirty="0"/>
+              <a:t>/</a:t>
+            </a:r>
+            <a:r>
+              <a:rPr kumimoji="1" lang="en-US" altLang="ko-Kore-KR" sz="1800" dirty="0" err="1"/>
+              <a:t>vortexgpgpu</a:t>
+            </a:r>
+            <a:r>
+              <a:rPr kumimoji="1" lang="en-US" altLang="ko-Kore-KR" sz="1800" dirty="0"/>
+              <a:t>/Volt</a:t>
+            </a:r>
+            <a:endParaRPr kumimoji="1" lang="ko-Kore-KR" altLang="en-US" sz="1800" dirty="0"/>
+          </a:p>
+        </p:txBody>
+      </p:sp>
+    </p:spTree>
+    <p:extLst>
+      <p:ext uri="{BB962C8B-B14F-4D97-AF65-F5344CB8AC3E}">
+        <p14:creationId xmlns:p14="http://schemas.microsoft.com/office/powerpoint/2010/main" val="1682751556"/>
       </p:ext>
     </p:extLst>
   </p:cSld>
@@ -20134,6 +25204,24 @@
               <a:rPr lang="en" altLang="ko-Kore-KR" sz="1800" dirty="0"/>
               <a:t>Treats thread divergence management as a first-class concern</a:t>
             </a:r>
+          </a:p>
+          <a:p>
+            <a:pPr lvl="1"/>
+            <a:r>
+              <a:rPr lang="en-US" altLang="ko-Kore-KR" sz="1400" b="1" dirty="0"/>
+              <a:t>Uniformity Analysis</a:t>
+            </a:r>
+          </a:p>
+          <a:p>
+            <a:pPr lvl="1"/>
+            <a:r>
+              <a:rPr lang="en-US" altLang="ko-Kore-KR" sz="1400" b="1" dirty="0"/>
+              <a:t>Divergence Optimization</a:t>
+            </a:r>
+          </a:p>
+          <a:p>
+            <a:pPr lvl="1"/>
+            <a:endParaRPr lang="en" altLang="ko-Kore-KR" sz="1400" dirty="0"/>
           </a:p>
           <a:p>
             <a:pPr>
